--- a/docs/pptx/carbo/jx-carbo-linsubhr-sens-throm3.pptx
+++ b/docs/pptx/carbo/jx-carbo-linsubhr-sens-throm3.pptx
@@ -5261,7 +5261,7 @@
           <p:spPr>
             <a:xfrm>
               <a:off x="817517" y="1896563"/>
-              <a:ext cx="6169365" cy="82021"/>
+              <a:ext cx="6833128" cy="82021"/>
             </a:xfrm>
             <a:prstGeom prst="rect">
               <a:avLst/>
@@ -5293,7 +5293,7 @@
                   <a:latin typeface="Helvetica"/>
                   <a:cs typeface="Helvetica"/>
                 </a:rPr>
-                <a:t>subHR per 0.1 ratio decline: 1.43 (1.15-1.80), p = 0.002  |  per IQR decline (Δ = 0.28): 2.75 (1.46-5.17)  |  IQR: [0.70, 0.98]</a:t>
+                <a:t>subHR per 0.1 ratio decline: 1.43 (1.15-1.80), p_Bonf = 0.010 (n = 6)  |  per IQR decline (Δ = 0.28): 2.75 (1.46-5.17)  |  IQR: [0.70, 0.98]</a:t>
               </a:r>
             </a:p>
           </p:txBody>

--- a/docs/pptx/carbo/jx-carbo-linsubhr-sens-throm3.pptx
+++ b/docs/pptx/carbo/jx-carbo-linsubhr-sens-throm3.pptx
@@ -4984,8 +4984,8 @@
           </p:nvSpPr>
           <p:spPr>
             <a:xfrm>
-              <a:off x="2155289" y="5785772"/>
-              <a:ext cx="155356" cy="80101"/>
+              <a:off x="2152181" y="5785772"/>
+              <a:ext cx="161574" cy="80101"/>
             </a:xfrm>
             <a:prstGeom prst="rect">
               <a:avLst/>
@@ -5017,7 +5017,7 @@
                   <a:latin typeface="Helvetica"/>
                   <a:cs typeface="Helvetica"/>
                 </a:rPr>
-                <a:t>0.6</a:t>
+                <a:t>-40</a:t>
               </a:r>
             </a:p>
           </p:txBody>
@@ -5030,8 +5030,8 @@
           </p:nvSpPr>
           <p:spPr>
             <a:xfrm>
-              <a:off x="3887213" y="5785772"/>
-              <a:ext cx="155356" cy="80101"/>
+              <a:off x="3884104" y="5785772"/>
+              <a:ext cx="161574" cy="80101"/>
             </a:xfrm>
             <a:prstGeom prst="rect">
               <a:avLst/>
@@ -5063,7 +5063,7 @@
                   <a:latin typeface="Helvetica"/>
                   <a:cs typeface="Helvetica"/>
                 </a:rPr>
-                <a:t>0.8</a:t>
+                <a:t>-20</a:t>
               </a:r>
             </a:p>
           </p:txBody>
@@ -5076,8 +5076,8 @@
           </p:nvSpPr>
           <p:spPr>
             <a:xfrm>
-              <a:off x="5619136" y="5785772"/>
-              <a:ext cx="155356" cy="80101"/>
+              <a:off x="5665725" y="5785772"/>
+              <a:ext cx="62179" cy="80101"/>
             </a:xfrm>
             <a:prstGeom prst="rect">
               <a:avLst/>
@@ -5109,7 +5109,7 @@
                   <a:latin typeface="Helvetica"/>
                   <a:cs typeface="Helvetica"/>
                 </a:rPr>
-                <a:t>1.0</a:t>
+                <a:t>0</a:t>
               </a:r>
             </a:p>
           </p:txBody>
@@ -5122,8 +5122,8 @@
           </p:nvSpPr>
           <p:spPr>
             <a:xfrm>
-              <a:off x="7351060" y="5785772"/>
-              <a:ext cx="155356" cy="80101"/>
+              <a:off x="7366559" y="5785772"/>
+              <a:ext cx="124358" cy="80101"/>
             </a:xfrm>
             <a:prstGeom prst="rect">
               <a:avLst/>
@@ -5155,7 +5155,7 @@
                   <a:latin typeface="Helvetica"/>
                   <a:cs typeface="Helvetica"/>
                 </a:rPr>
-                <a:t>1.2</a:t>
+                <a:t>20</a:t>
               </a:r>
             </a:p>
           </p:txBody>
@@ -5168,8 +5168,8 @@
           </p:nvSpPr>
           <p:spPr>
             <a:xfrm>
-              <a:off x="2691419" y="5925448"/>
-              <a:ext cx="4051889" cy="100218"/>
+              <a:off x="1561815" y="5925448"/>
+              <a:ext cx="6311097" cy="100218"/>
             </a:xfrm>
             <a:prstGeom prst="rect">
               <a:avLst/>
@@ -5201,7 +5201,7 @@
                   <a:latin typeface="Helvetica"/>
                   <a:cs typeface="Helvetica"/>
                 </a:rPr>
-                <a:t>Sensitivity eGFR Ratio (CKD-EPI 2012 CysC / CKD-EPI 2021 Cr)</a:t>
+                <a:t>Sensitivity eGFR Difference (%): 100 × (CKD-EPI 2012 CysC − CKD-EPI 2021 Cr) / CKD-EPI 2021 Cr</a:t>
               </a:r>
             </a:p>
           </p:txBody>
@@ -5261,7 +5261,7 @@
           <p:spPr>
             <a:xfrm>
               <a:off x="817517" y="1896563"/>
-              <a:ext cx="6833128" cy="82021"/>
+              <a:ext cx="6959864" cy="82021"/>
             </a:xfrm>
             <a:prstGeom prst="rect">
               <a:avLst/>
@@ -5293,7 +5293,7 @@
                   <a:latin typeface="Helvetica"/>
                   <a:cs typeface="Helvetica"/>
                 </a:rPr>
-                <a:t>subHR per 0.1 ratio decline: 1.43 (1.15-1.80), p_Bonf = 0.010 (n = 6)  |  per IQR decline (Δ = 0.28): 2.75 (1.46-5.17)  |  IQR: [0.70, 0.98]</a:t>
+                <a:t>subHR per 10 % decline: 1.43 (1.15-1.80), p_Bonf = 0.010 (n = 6)  |  per IQR decline (Δ = 28.0 %): 2.75 (1.46-5.17)  |  IQR: [-30.0, -2.0] %</a:t>
               </a:r>
             </a:p>
           </p:txBody>

--- a/docs/pptx/carbo/jx-carbo-linsubhr-sens-throm3.pptx
+++ b/docs/pptx/carbo/jx-carbo-linsubhr-sens-throm3.pptx
@@ -2265,34 +2265,26 @@
         </p:sp>
         <p:sp>
           <p:nvSpPr>
-            <p:cNvPr id="4" name="pl4"/>
+            <p:cNvPr id="4" name="rc4"/>
             <p:cNvSpPr/>
             <p:nvPr/>
           </p:nvSpPr>
           <p:spPr>
             <a:xfrm>
-              <a:off x="817517" y="5142518"/>
-              <a:ext cx="7799693" cy="0"/>
+              <a:off x="457200" y="1600200"/>
+              <a:ext cx="8229600" cy="4525962"/>
             </a:xfrm>
-            <a:custGeom>
+            <a:prstGeom prst="rect">
               <a:avLst/>
-              <a:pathLst>
-                <a:path w="7799693" h="0">
-                  <a:moveTo>
-                    <a:pt x="0" y="0"/>
-                  </a:moveTo>
-                  <a:lnTo>
-                    <a:pt x="7799693" y="0"/>
-                  </a:lnTo>
-                  <a:lnTo>
-                    <a:pt x="7799693" y="0"/>
-                  </a:lnTo>
-                </a:path>
-              </a:pathLst>
-            </a:custGeom>
-            <a:ln w="6775" cap="flat">
+            </a:prstGeom>
+            <a:solidFill>
+              <a:srgbClr val="FFFFFF">
+                <a:alpha val="100000"/>
+              </a:srgbClr>
+            </a:solidFill>
+            <a:ln w="13550" cap="rnd">
               <a:solidFill>
-                <a:srgbClr val="EBEBEB">
+                <a:srgbClr val="FFFFFF">
                   <a:alpha val="100000"/>
                 </a:srgbClr>
               </a:solidFill>
@@ -2314,21 +2306,21 @@
           </p:nvSpPr>
           <p:spPr>
             <a:xfrm>
-              <a:off x="817517" y="4313054"/>
-              <a:ext cx="7799693" cy="0"/>
+              <a:off x="887106" y="3250627"/>
+              <a:ext cx="7660515" cy="0"/>
             </a:xfrm>
             <a:custGeom>
               <a:avLst/>
               <a:pathLst>
-                <a:path w="7799693" h="0">
+                <a:path w="7660515" h="0">
                   <a:moveTo>
                     <a:pt x="0" y="0"/>
                   </a:moveTo>
                   <a:lnTo>
-                    <a:pt x="7799693" y="0"/>
-                  </a:lnTo>
-                  <a:lnTo>
-                    <a:pt x="7799693" y="0"/>
+                    <a:pt x="7660515" y="0"/>
+                  </a:lnTo>
+                  <a:lnTo>
+                    <a:pt x="7660515" y="0"/>
                   </a:lnTo>
                 </a:path>
               </a:pathLst>
@@ -2357,21 +2349,21 @@
           </p:nvSpPr>
           <p:spPr>
             <a:xfrm>
-              <a:off x="817517" y="3483591"/>
-              <a:ext cx="7799693" cy="0"/>
+              <a:off x="887106" y="2951293"/>
+              <a:ext cx="7660515" cy="0"/>
             </a:xfrm>
             <a:custGeom>
               <a:avLst/>
               <a:pathLst>
-                <a:path w="7799693" h="0">
+                <a:path w="7660515" h="0">
                   <a:moveTo>
                     <a:pt x="0" y="0"/>
                   </a:moveTo>
                   <a:lnTo>
-                    <a:pt x="7799693" y="0"/>
-                  </a:lnTo>
-                  <a:lnTo>
-                    <a:pt x="7799693" y="0"/>
+                    <a:pt x="7660515" y="0"/>
+                  </a:lnTo>
+                  <a:lnTo>
+                    <a:pt x="7660515" y="0"/>
                   </a:lnTo>
                 </a:path>
               </a:pathLst>
@@ -2400,21 +2392,21 @@
           </p:nvSpPr>
           <p:spPr>
             <a:xfrm>
-              <a:off x="817517" y="2654127"/>
-              <a:ext cx="7799693" cy="0"/>
+              <a:off x="887106" y="2651959"/>
+              <a:ext cx="7660515" cy="0"/>
             </a:xfrm>
             <a:custGeom>
               <a:avLst/>
               <a:pathLst>
-                <a:path w="7799693" h="0">
+                <a:path w="7660515" h="0">
                   <a:moveTo>
                     <a:pt x="0" y="0"/>
                   </a:moveTo>
                   <a:lnTo>
-                    <a:pt x="7799693" y="0"/>
-                  </a:lnTo>
-                  <a:lnTo>
-                    <a:pt x="7799693" y="0"/>
+                    <a:pt x="7660515" y="0"/>
+                  </a:lnTo>
+                  <a:lnTo>
+                    <a:pt x="7660515" y="0"/>
                   </a:lnTo>
                 </a:path>
               </a:pathLst>
@@ -2443,21 +2435,21 @@
           </p:nvSpPr>
           <p:spPr>
             <a:xfrm>
-              <a:off x="1367006" y="2073503"/>
-              <a:ext cx="0" cy="3649639"/>
+              <a:off x="887106" y="2352625"/>
+              <a:ext cx="7660515" cy="0"/>
             </a:xfrm>
             <a:custGeom>
               <a:avLst/>
               <a:pathLst>
-                <a:path w="0" h="3649639">
+                <a:path w="7660515" h="0">
                   <a:moveTo>
-                    <a:pt x="0" y="3649639"/>
+                    <a:pt x="0" y="0"/>
                   </a:moveTo>
                   <a:lnTo>
-                    <a:pt x="0" y="0"/>
-                  </a:lnTo>
-                  <a:lnTo>
-                    <a:pt x="0" y="0"/>
+                    <a:pt x="7660515" y="0"/>
+                  </a:lnTo>
+                  <a:lnTo>
+                    <a:pt x="7660515" y="0"/>
                   </a:lnTo>
                 </a:path>
               </a:pathLst>
@@ -2486,15 +2478,15 @@
           </p:nvSpPr>
           <p:spPr>
             <a:xfrm>
-              <a:off x="3098929" y="2073503"/>
-              <a:ext cx="0" cy="3649639"/>
+              <a:off x="1426790" y="2143092"/>
+              <a:ext cx="0" cy="1317069"/>
             </a:xfrm>
             <a:custGeom>
               <a:avLst/>
               <a:pathLst>
-                <a:path w="0" h="3649639">
+                <a:path w="0" h="1317069">
                   <a:moveTo>
-                    <a:pt x="0" y="3649639"/>
+                    <a:pt x="0" y="1317069"/>
                   </a:moveTo>
                   <a:lnTo>
                     <a:pt x="0" y="0"/>
@@ -2529,15 +2521,15 @@
           </p:nvSpPr>
           <p:spPr>
             <a:xfrm>
-              <a:off x="4830853" y="2073503"/>
-              <a:ext cx="0" cy="3649639"/>
+              <a:off x="3127809" y="2143092"/>
+              <a:ext cx="0" cy="1317069"/>
             </a:xfrm>
             <a:custGeom>
               <a:avLst/>
               <a:pathLst>
-                <a:path w="0" h="3649639">
+                <a:path w="0" h="1317069">
                   <a:moveTo>
-                    <a:pt x="0" y="3649639"/>
+                    <a:pt x="0" y="1317069"/>
                   </a:moveTo>
                   <a:lnTo>
                     <a:pt x="0" y="0"/>
@@ -2572,15 +2564,15 @@
           </p:nvSpPr>
           <p:spPr>
             <a:xfrm>
-              <a:off x="6562776" y="2073503"/>
-              <a:ext cx="0" cy="3649639"/>
+              <a:off x="4828828" y="2143092"/>
+              <a:ext cx="0" cy="1317069"/>
             </a:xfrm>
             <a:custGeom>
               <a:avLst/>
               <a:pathLst>
-                <a:path w="0" h="3649639">
+                <a:path w="0" h="1317069">
                   <a:moveTo>
-                    <a:pt x="0" y="3649639"/>
+                    <a:pt x="0" y="1317069"/>
                   </a:moveTo>
                   <a:lnTo>
                     <a:pt x="0" y="0"/>
@@ -2615,15 +2607,15 @@
           </p:nvSpPr>
           <p:spPr>
             <a:xfrm>
-              <a:off x="8294700" y="2073503"/>
-              <a:ext cx="0" cy="3649639"/>
+              <a:off x="6529847" y="2143092"/>
+              <a:ext cx="0" cy="1317069"/>
             </a:xfrm>
             <a:custGeom>
               <a:avLst/>
               <a:pathLst>
-                <a:path w="0" h="3649639">
+                <a:path w="0" h="1317069">
                   <a:moveTo>
-                    <a:pt x="0" y="3649639"/>
+                    <a:pt x="0" y="1317069"/>
                   </a:moveTo>
                   <a:lnTo>
                     <a:pt x="0" y="0"/>
@@ -2658,26 +2650,26 @@
           </p:nvSpPr>
           <p:spPr>
             <a:xfrm>
-              <a:off x="817517" y="5557249"/>
-              <a:ext cx="7799693" cy="0"/>
+              <a:off x="8230866" y="2143092"/>
+              <a:ext cx="0" cy="1317069"/>
             </a:xfrm>
             <a:custGeom>
               <a:avLst/>
               <a:pathLst>
-                <a:path w="7799693" h="0">
+                <a:path w="0" h="1317069">
                   <a:moveTo>
+                    <a:pt x="0" y="1317069"/>
+                  </a:moveTo>
+                  <a:lnTo>
                     <a:pt x="0" y="0"/>
-                  </a:moveTo>
-                  <a:lnTo>
-                    <a:pt x="7799693" y="0"/>
-                  </a:lnTo>
-                  <a:lnTo>
-                    <a:pt x="7799693" y="0"/>
+                  </a:lnTo>
+                  <a:lnTo>
+                    <a:pt x="0" y="0"/>
                   </a:lnTo>
                 </a:path>
               </a:pathLst>
             </a:custGeom>
-            <a:ln w="13550" cap="flat">
+            <a:ln w="6775" cap="flat">
               <a:solidFill>
                 <a:srgbClr val="EBEBEB">
                   <a:alpha val="100000"/>
@@ -2701,21 +2693,21 @@
           </p:nvSpPr>
           <p:spPr>
             <a:xfrm>
-              <a:off x="817517" y="4727786"/>
-              <a:ext cx="7799693" cy="0"/>
+              <a:off x="887106" y="3400294"/>
+              <a:ext cx="7660515" cy="0"/>
             </a:xfrm>
             <a:custGeom>
               <a:avLst/>
               <a:pathLst>
-                <a:path w="7799693" h="0">
+                <a:path w="7660515" h="0">
                   <a:moveTo>
                     <a:pt x="0" y="0"/>
                   </a:moveTo>
                   <a:lnTo>
-                    <a:pt x="7799693" y="0"/>
-                  </a:lnTo>
-                  <a:lnTo>
-                    <a:pt x="7799693" y="0"/>
+                    <a:pt x="7660515" y="0"/>
+                  </a:lnTo>
+                  <a:lnTo>
+                    <a:pt x="7660515" y="0"/>
                   </a:lnTo>
                 </a:path>
               </a:pathLst>
@@ -2744,21 +2736,21 @@
           </p:nvSpPr>
           <p:spPr>
             <a:xfrm>
-              <a:off x="817517" y="3898322"/>
-              <a:ext cx="7799693" cy="0"/>
+              <a:off x="887106" y="3100960"/>
+              <a:ext cx="7660515" cy="0"/>
             </a:xfrm>
             <a:custGeom>
               <a:avLst/>
               <a:pathLst>
-                <a:path w="7799693" h="0">
+                <a:path w="7660515" h="0">
                   <a:moveTo>
                     <a:pt x="0" y="0"/>
                   </a:moveTo>
                   <a:lnTo>
-                    <a:pt x="7799693" y="0"/>
-                  </a:lnTo>
-                  <a:lnTo>
-                    <a:pt x="7799693" y="0"/>
+                    <a:pt x="7660515" y="0"/>
+                  </a:lnTo>
+                  <a:lnTo>
+                    <a:pt x="7660515" y="0"/>
                   </a:lnTo>
                 </a:path>
               </a:pathLst>
@@ -2787,21 +2779,21 @@
           </p:nvSpPr>
           <p:spPr>
             <a:xfrm>
-              <a:off x="817517" y="3068859"/>
-              <a:ext cx="7799693" cy="0"/>
+              <a:off x="887106" y="2801626"/>
+              <a:ext cx="7660515" cy="0"/>
             </a:xfrm>
             <a:custGeom>
               <a:avLst/>
               <a:pathLst>
-                <a:path w="7799693" h="0">
+                <a:path w="7660515" h="0">
                   <a:moveTo>
                     <a:pt x="0" y="0"/>
                   </a:moveTo>
                   <a:lnTo>
-                    <a:pt x="7799693" y="0"/>
-                  </a:lnTo>
-                  <a:lnTo>
-                    <a:pt x="7799693" y="0"/>
+                    <a:pt x="7660515" y="0"/>
+                  </a:lnTo>
+                  <a:lnTo>
+                    <a:pt x="7660515" y="0"/>
                   </a:lnTo>
                 </a:path>
               </a:pathLst>
@@ -2830,21 +2822,21 @@
           </p:nvSpPr>
           <p:spPr>
             <a:xfrm>
-              <a:off x="817517" y="2239395"/>
-              <a:ext cx="7799693" cy="0"/>
+              <a:off x="887106" y="2502292"/>
+              <a:ext cx="7660515" cy="0"/>
             </a:xfrm>
             <a:custGeom>
               <a:avLst/>
               <a:pathLst>
-                <a:path w="7799693" h="0">
+                <a:path w="7660515" h="0">
                   <a:moveTo>
                     <a:pt x="0" y="0"/>
                   </a:moveTo>
                   <a:lnTo>
-                    <a:pt x="7799693" y="0"/>
-                  </a:lnTo>
-                  <a:lnTo>
-                    <a:pt x="7799693" y="0"/>
+                    <a:pt x="7660515" y="0"/>
+                  </a:lnTo>
+                  <a:lnTo>
+                    <a:pt x="7660515" y="0"/>
                   </a:lnTo>
                 </a:path>
               </a:pathLst>
@@ -2873,21 +2865,21 @@
           </p:nvSpPr>
           <p:spPr>
             <a:xfrm>
-              <a:off x="2232968" y="2073503"/>
-              <a:ext cx="0" cy="3649639"/>
+              <a:off x="887106" y="2202958"/>
+              <a:ext cx="7660515" cy="0"/>
             </a:xfrm>
             <a:custGeom>
               <a:avLst/>
               <a:pathLst>
-                <a:path w="0" h="3649639">
+                <a:path w="7660515" h="0">
                   <a:moveTo>
-                    <a:pt x="0" y="3649639"/>
+                    <a:pt x="0" y="0"/>
                   </a:moveTo>
                   <a:lnTo>
-                    <a:pt x="0" y="0"/>
-                  </a:lnTo>
-                  <a:lnTo>
-                    <a:pt x="0" y="0"/>
+                    <a:pt x="7660515" y="0"/>
+                  </a:lnTo>
+                  <a:lnTo>
+                    <a:pt x="7660515" y="0"/>
                   </a:lnTo>
                 </a:path>
               </a:pathLst>
@@ -2916,15 +2908,15 @@
           </p:nvSpPr>
           <p:spPr>
             <a:xfrm>
-              <a:off x="3964891" y="2073503"/>
-              <a:ext cx="0" cy="3649639"/>
+              <a:off x="2277299" y="2143092"/>
+              <a:ext cx="0" cy="1317069"/>
             </a:xfrm>
             <a:custGeom>
               <a:avLst/>
               <a:pathLst>
-                <a:path w="0" h="3649639">
+                <a:path w="0" h="1317069">
                   <a:moveTo>
-                    <a:pt x="0" y="3649639"/>
+                    <a:pt x="0" y="1317069"/>
                   </a:moveTo>
                   <a:lnTo>
                     <a:pt x="0" y="0"/>
@@ -2959,15 +2951,15 @@
           </p:nvSpPr>
           <p:spPr>
             <a:xfrm>
-              <a:off x="5696815" y="2073503"/>
-              <a:ext cx="0" cy="3649639"/>
+              <a:off x="3978318" y="2143092"/>
+              <a:ext cx="0" cy="1317069"/>
             </a:xfrm>
             <a:custGeom>
               <a:avLst/>
               <a:pathLst>
-                <a:path w="0" h="3649639">
+                <a:path w="0" h="1317069">
                   <a:moveTo>
-                    <a:pt x="0" y="3649639"/>
+                    <a:pt x="0" y="1317069"/>
                   </a:moveTo>
                   <a:lnTo>
                     <a:pt x="0" y="0"/>
@@ -3002,15 +2994,15 @@
           </p:nvSpPr>
           <p:spPr>
             <a:xfrm>
-              <a:off x="7428738" y="2073503"/>
-              <a:ext cx="0" cy="3649639"/>
+              <a:off x="5679337" y="2143092"/>
+              <a:ext cx="0" cy="1317069"/>
             </a:xfrm>
             <a:custGeom>
               <a:avLst/>
               <a:pathLst>
-                <a:path w="0" h="3649639">
+                <a:path w="0" h="1317069">
                   <a:moveTo>
-                    <a:pt x="0" y="3649639"/>
+                    <a:pt x="0" y="1317069"/>
                   </a:moveTo>
                   <a:lnTo>
                     <a:pt x="0" y="0"/>
@@ -3039,579 +3031,622 @@
         </p:sp>
         <p:sp>
           <p:nvSpPr>
-            <p:cNvPr id="22" name="pg22"/>
+            <p:cNvPr id="22" name="pl22"/>
             <p:cNvSpPr/>
             <p:nvPr/>
           </p:nvSpPr>
           <p:spPr>
             <a:xfrm>
-              <a:off x="1172049" y="2073503"/>
-              <a:ext cx="7090630" cy="3427676"/>
+              <a:off x="7380356" y="2143092"/>
+              <a:ext cx="0" cy="1317069"/>
             </a:xfrm>
             <a:custGeom>
               <a:avLst/>
               <a:pathLst>
-                <a:path w="7090630" h="3427676">
+                <a:path w="0" h="1317069">
                   <a:moveTo>
-                    <a:pt x="994041" y="0"/>
+                    <a:pt x="0" y="1317069"/>
                   </a:moveTo>
                   <a:lnTo>
-                    <a:pt x="1002715" y="20845"/>
-                  </a:lnTo>
-                  <a:lnTo>
-                    <a:pt x="1074337" y="184817"/>
-                  </a:lnTo>
-                  <a:lnTo>
-                    <a:pt x="1145960" y="341025"/>
-                  </a:lnTo>
-                  <a:lnTo>
-                    <a:pt x="1217582" y="489836"/>
-                  </a:lnTo>
-                  <a:lnTo>
-                    <a:pt x="1289205" y="631601"/>
-                  </a:lnTo>
-                  <a:lnTo>
-                    <a:pt x="1360827" y="766654"/>
-                  </a:lnTo>
-                  <a:lnTo>
-                    <a:pt x="1432450" y="895311"/>
-                  </a:lnTo>
-                  <a:lnTo>
-                    <a:pt x="1504073" y="1017876"/>
-                  </a:lnTo>
-                  <a:lnTo>
-                    <a:pt x="1575695" y="1134638"/>
-                  </a:lnTo>
-                  <a:lnTo>
-                    <a:pt x="1647318" y="1245871"/>
-                  </a:lnTo>
-                  <a:lnTo>
-                    <a:pt x="1718940" y="1351837"/>
-                  </a:lnTo>
-                  <a:lnTo>
-                    <a:pt x="1790563" y="1452785"/>
-                  </a:lnTo>
-                  <a:lnTo>
-                    <a:pt x="1862185" y="1548953"/>
-                  </a:lnTo>
-                  <a:lnTo>
-                    <a:pt x="1933808" y="1640568"/>
-                  </a:lnTo>
-                  <a:lnTo>
-                    <a:pt x="2005430" y="1727844"/>
-                  </a:lnTo>
-                  <a:lnTo>
-                    <a:pt x="2077053" y="1810988"/>
-                  </a:lnTo>
-                  <a:lnTo>
-                    <a:pt x="2148675" y="1890195"/>
-                  </a:lnTo>
-                  <a:lnTo>
-                    <a:pt x="2220298" y="1965652"/>
-                  </a:lnTo>
-                  <a:lnTo>
-                    <a:pt x="2291920" y="2037535"/>
-                  </a:lnTo>
-                  <a:lnTo>
-                    <a:pt x="2363543" y="2106015"/>
-                  </a:lnTo>
-                  <a:lnTo>
-                    <a:pt x="2435165" y="2171252"/>
-                  </a:lnTo>
-                  <a:lnTo>
-                    <a:pt x="2506788" y="2233400"/>
-                  </a:lnTo>
-                  <a:lnTo>
-                    <a:pt x="2578410" y="2292605"/>
-                  </a:lnTo>
-                  <a:lnTo>
-                    <a:pt x="2650033" y="2349007"/>
-                  </a:lnTo>
-                  <a:lnTo>
-                    <a:pt x="2721655" y="2402738"/>
-                  </a:lnTo>
-                  <a:lnTo>
-                    <a:pt x="2793278" y="2453925"/>
-                  </a:lnTo>
-                  <a:lnTo>
-                    <a:pt x="2864901" y="2502688"/>
-                  </a:lnTo>
-                  <a:lnTo>
-                    <a:pt x="2936523" y="2549143"/>
-                  </a:lnTo>
-                  <a:lnTo>
-                    <a:pt x="3008146" y="2593397"/>
-                  </a:lnTo>
-                  <a:lnTo>
-                    <a:pt x="3079768" y="2635556"/>
-                  </a:lnTo>
-                  <a:lnTo>
-                    <a:pt x="3151391" y="2659284"/>
-                  </a:lnTo>
-                  <a:lnTo>
-                    <a:pt x="3223013" y="2668469"/>
-                  </a:lnTo>
-                  <a:lnTo>
-                    <a:pt x="3294636" y="2677553"/>
-                  </a:lnTo>
-                  <a:lnTo>
-                    <a:pt x="3366258" y="2686535"/>
-                  </a:lnTo>
-                  <a:lnTo>
-                    <a:pt x="3437881" y="2695417"/>
-                  </a:lnTo>
-                  <a:lnTo>
-                    <a:pt x="3509503" y="2704200"/>
-                  </a:lnTo>
-                  <a:lnTo>
-                    <a:pt x="3581126" y="2712885"/>
-                  </a:lnTo>
-                  <a:lnTo>
-                    <a:pt x="3652748" y="2721474"/>
-                  </a:lnTo>
-                  <a:lnTo>
-                    <a:pt x="3724371" y="2729966"/>
-                  </a:lnTo>
-                  <a:lnTo>
-                    <a:pt x="3795993" y="2738364"/>
-                  </a:lnTo>
-                  <a:lnTo>
-                    <a:pt x="3867616" y="2746669"/>
-                  </a:lnTo>
-                  <a:lnTo>
-                    <a:pt x="3939238" y="2754881"/>
-                  </a:lnTo>
-                  <a:lnTo>
-                    <a:pt x="4010861" y="2763002"/>
-                  </a:lnTo>
-                  <a:lnTo>
-                    <a:pt x="4082483" y="2771032"/>
-                  </a:lnTo>
-                  <a:lnTo>
-                    <a:pt x="4154106" y="2778972"/>
-                  </a:lnTo>
-                  <a:lnTo>
-                    <a:pt x="4225729" y="2786824"/>
-                  </a:lnTo>
-                  <a:lnTo>
-                    <a:pt x="4297351" y="2794589"/>
-                  </a:lnTo>
-                  <a:lnTo>
-                    <a:pt x="4368974" y="2802267"/>
-                  </a:lnTo>
-                  <a:lnTo>
-                    <a:pt x="4440596" y="2809860"/>
-                  </a:lnTo>
-                  <a:lnTo>
-                    <a:pt x="4512219" y="2817368"/>
-                  </a:lnTo>
-                  <a:lnTo>
-                    <a:pt x="4583841" y="2824792"/>
-                  </a:lnTo>
-                  <a:lnTo>
-                    <a:pt x="4655464" y="2832134"/>
-                  </a:lnTo>
-                  <a:lnTo>
-                    <a:pt x="4727086" y="2839394"/>
-                  </a:lnTo>
-                  <a:lnTo>
-                    <a:pt x="4798709" y="2846573"/>
-                  </a:lnTo>
-                  <a:lnTo>
-                    <a:pt x="4870331" y="2853672"/>
-                  </a:lnTo>
-                  <a:lnTo>
-                    <a:pt x="4941954" y="2860691"/>
-                  </a:lnTo>
-                  <a:lnTo>
-                    <a:pt x="5013576" y="2867633"/>
-                  </a:lnTo>
-                  <a:lnTo>
-                    <a:pt x="5085199" y="2874498"/>
-                  </a:lnTo>
-                  <a:lnTo>
-                    <a:pt x="5156821" y="2881285"/>
-                  </a:lnTo>
-                  <a:lnTo>
-                    <a:pt x="5228444" y="2887998"/>
-                  </a:lnTo>
-                  <a:lnTo>
-                    <a:pt x="5300066" y="2894635"/>
-                  </a:lnTo>
-                  <a:lnTo>
-                    <a:pt x="5371689" y="2901199"/>
-                  </a:lnTo>
-                  <a:lnTo>
-                    <a:pt x="5443311" y="2907689"/>
-                  </a:lnTo>
-                  <a:lnTo>
-                    <a:pt x="5514934" y="2914107"/>
-                  </a:lnTo>
-                  <a:lnTo>
-                    <a:pt x="5586557" y="2920454"/>
-                  </a:lnTo>
-                  <a:lnTo>
-                    <a:pt x="5658179" y="2926729"/>
-                  </a:lnTo>
-                  <a:lnTo>
-                    <a:pt x="5729802" y="2932935"/>
-                  </a:lnTo>
-                  <a:lnTo>
-                    <a:pt x="5801424" y="2939072"/>
-                  </a:lnTo>
-                  <a:lnTo>
-                    <a:pt x="5873047" y="2945141"/>
-                  </a:lnTo>
-                  <a:lnTo>
-                    <a:pt x="5944669" y="2951141"/>
-                  </a:lnTo>
-                  <a:lnTo>
-                    <a:pt x="6016292" y="2957075"/>
-                  </a:lnTo>
-                  <a:lnTo>
-                    <a:pt x="6087914" y="2962943"/>
-                  </a:lnTo>
-                  <a:lnTo>
-                    <a:pt x="6159537" y="2968746"/>
-                  </a:lnTo>
-                  <a:lnTo>
-                    <a:pt x="6231159" y="2974483"/>
-                  </a:lnTo>
-                  <a:lnTo>
-                    <a:pt x="6302782" y="2980157"/>
-                  </a:lnTo>
-                  <a:lnTo>
-                    <a:pt x="6374404" y="2985768"/>
-                  </a:lnTo>
-                  <a:lnTo>
-                    <a:pt x="6446027" y="2991316"/>
-                  </a:lnTo>
-                  <a:lnTo>
-                    <a:pt x="6517649" y="2996802"/>
-                  </a:lnTo>
-                  <a:lnTo>
-                    <a:pt x="6589272" y="3002228"/>
-                  </a:lnTo>
-                  <a:lnTo>
-                    <a:pt x="6660894" y="3007592"/>
-                  </a:lnTo>
-                  <a:lnTo>
-                    <a:pt x="6732517" y="3012897"/>
-                  </a:lnTo>
-                  <a:lnTo>
-                    <a:pt x="6804139" y="3018143"/>
-                  </a:lnTo>
-                  <a:lnTo>
-                    <a:pt x="6875762" y="3023331"/>
-                  </a:lnTo>
-                  <a:lnTo>
-                    <a:pt x="6947385" y="3028460"/>
-                  </a:lnTo>
-                  <a:lnTo>
-                    <a:pt x="7019007" y="3033533"/>
-                  </a:lnTo>
-                  <a:lnTo>
-                    <a:pt x="7090630" y="3038549"/>
-                  </a:lnTo>
-                  <a:lnTo>
-                    <a:pt x="7090630" y="3427676"/>
-                  </a:lnTo>
-                  <a:lnTo>
-                    <a:pt x="7019007" y="3424889"/>
-                  </a:lnTo>
-                  <a:lnTo>
-                    <a:pt x="6947385" y="3421964"/>
-                  </a:lnTo>
-                  <a:lnTo>
-                    <a:pt x="6875762" y="3418893"/>
-                  </a:lnTo>
-                  <a:lnTo>
-                    <a:pt x="6804139" y="3415669"/>
-                  </a:lnTo>
-                  <a:lnTo>
-                    <a:pt x="6732517" y="3412285"/>
-                  </a:lnTo>
-                  <a:lnTo>
-                    <a:pt x="6660894" y="3408733"/>
-                  </a:lnTo>
-                  <a:lnTo>
-                    <a:pt x="6589272" y="3405005"/>
-                  </a:lnTo>
-                  <a:lnTo>
-                    <a:pt x="6517649" y="3401091"/>
-                  </a:lnTo>
-                  <a:lnTo>
-                    <a:pt x="6446027" y="3396983"/>
-                  </a:lnTo>
-                  <a:lnTo>
-                    <a:pt x="6374404" y="3392670"/>
-                  </a:lnTo>
-                  <a:lnTo>
-                    <a:pt x="6302782" y="3388143"/>
-                  </a:lnTo>
-                  <a:lnTo>
-                    <a:pt x="6231159" y="3383391"/>
-                  </a:lnTo>
-                  <a:lnTo>
-                    <a:pt x="6159537" y="3378403"/>
-                  </a:lnTo>
-                  <a:lnTo>
-                    <a:pt x="6087914" y="3373167"/>
-                  </a:lnTo>
-                  <a:lnTo>
-                    <a:pt x="6016292" y="3367671"/>
-                  </a:lnTo>
-                  <a:lnTo>
-                    <a:pt x="5944669" y="3361901"/>
-                  </a:lnTo>
-                  <a:lnTo>
-                    <a:pt x="5873047" y="3355845"/>
-                  </a:lnTo>
-                  <a:lnTo>
-                    <a:pt x="5801424" y="3349488"/>
-                  </a:lnTo>
-                  <a:lnTo>
-                    <a:pt x="5729802" y="3342814"/>
-                  </a:lnTo>
-                  <a:lnTo>
-                    <a:pt x="5658179" y="3335809"/>
-                  </a:lnTo>
-                  <a:lnTo>
-                    <a:pt x="5586557" y="3328456"/>
-                  </a:lnTo>
-                  <a:lnTo>
-                    <a:pt x="5514934" y="3320738"/>
-                  </a:lnTo>
-                  <a:lnTo>
-                    <a:pt x="5443311" y="3312635"/>
-                  </a:lnTo>
-                  <a:lnTo>
-                    <a:pt x="5371689" y="3304130"/>
-                  </a:lnTo>
-                  <a:lnTo>
-                    <a:pt x="5300066" y="3295203"/>
-                  </a:lnTo>
-                  <a:lnTo>
-                    <a:pt x="5228444" y="3285831"/>
-                  </a:lnTo>
-                  <a:lnTo>
-                    <a:pt x="5156821" y="3275994"/>
-                  </a:lnTo>
-                  <a:lnTo>
-                    <a:pt x="5085199" y="3265668"/>
-                  </a:lnTo>
-                  <a:lnTo>
-                    <a:pt x="5013576" y="3254828"/>
-                  </a:lnTo>
-                  <a:lnTo>
-                    <a:pt x="4941954" y="3243450"/>
-                  </a:lnTo>
-                  <a:lnTo>
-                    <a:pt x="4870331" y="3231506"/>
-                  </a:lnTo>
-                  <a:lnTo>
-                    <a:pt x="4798709" y="3218968"/>
-                  </a:lnTo>
-                  <a:lnTo>
-                    <a:pt x="4727086" y="3205808"/>
-                  </a:lnTo>
-                  <a:lnTo>
-                    <a:pt x="4655464" y="3191993"/>
-                  </a:lnTo>
-                  <a:lnTo>
-                    <a:pt x="4583841" y="3177491"/>
-                  </a:lnTo>
-                  <a:lnTo>
-                    <a:pt x="4512219" y="3162269"/>
-                  </a:lnTo>
-                  <a:lnTo>
-                    <a:pt x="4440596" y="3146290"/>
-                  </a:lnTo>
-                  <a:lnTo>
-                    <a:pt x="4368974" y="3129517"/>
-                  </a:lnTo>
-                  <a:lnTo>
-                    <a:pt x="4297351" y="3111910"/>
-                  </a:lnTo>
-                  <a:lnTo>
-                    <a:pt x="4225729" y="3093428"/>
-                  </a:lnTo>
-                  <a:lnTo>
-                    <a:pt x="4154106" y="3074027"/>
-                  </a:lnTo>
-                  <a:lnTo>
-                    <a:pt x="4082483" y="3053662"/>
-                  </a:lnTo>
-                  <a:lnTo>
-                    <a:pt x="4010861" y="3032285"/>
-                  </a:lnTo>
-                  <a:lnTo>
-                    <a:pt x="3939238" y="3009845"/>
-                  </a:lnTo>
-                  <a:lnTo>
-                    <a:pt x="3867616" y="2986290"/>
-                  </a:lnTo>
-                  <a:lnTo>
-                    <a:pt x="3795993" y="2961564"/>
-                  </a:lnTo>
-                  <a:lnTo>
-                    <a:pt x="3724371" y="2935609"/>
-                  </a:lnTo>
-                  <a:lnTo>
-                    <a:pt x="3652748" y="2908364"/>
-                  </a:lnTo>
-                  <a:lnTo>
-                    <a:pt x="3581126" y="2879765"/>
-                  </a:lnTo>
-                  <a:lnTo>
-                    <a:pt x="3509503" y="2849745"/>
-                  </a:lnTo>
-                  <a:lnTo>
-                    <a:pt x="3437881" y="2818232"/>
-                  </a:lnTo>
-                  <a:lnTo>
-                    <a:pt x="3366258" y="2785152"/>
-                  </a:lnTo>
-                  <a:lnTo>
-                    <a:pt x="3294636" y="2750429"/>
-                  </a:lnTo>
-                  <a:lnTo>
-                    <a:pt x="3223013" y="2713980"/>
-                  </a:lnTo>
-                  <a:lnTo>
-                    <a:pt x="3151391" y="2675719"/>
-                  </a:lnTo>
-                  <a:lnTo>
-                    <a:pt x="3079768" y="2649995"/>
-                  </a:lnTo>
-                  <a:lnTo>
-                    <a:pt x="3008146" y="2640601"/>
-                  </a:lnTo>
-                  <a:lnTo>
-                    <a:pt x="2936523" y="2631101"/>
-                  </a:lnTo>
-                  <a:lnTo>
-                    <a:pt x="2864901" y="2621495"/>
-                  </a:lnTo>
-                  <a:lnTo>
-                    <a:pt x="2793278" y="2611780"/>
-                  </a:lnTo>
-                  <a:lnTo>
-                    <a:pt x="2721655" y="2601955"/>
-                  </a:lnTo>
-                  <a:lnTo>
-                    <a:pt x="2650033" y="2592020"/>
-                  </a:lnTo>
-                  <a:lnTo>
-                    <a:pt x="2578410" y="2581973"/>
-                  </a:lnTo>
-                  <a:lnTo>
-                    <a:pt x="2506788" y="2571813"/>
-                  </a:lnTo>
-                  <a:lnTo>
-                    <a:pt x="2435165" y="2561539"/>
-                  </a:lnTo>
-                  <a:lnTo>
-                    <a:pt x="2363543" y="2551148"/>
-                  </a:lnTo>
-                  <a:lnTo>
-                    <a:pt x="2291920" y="2540641"/>
-                  </a:lnTo>
-                  <a:lnTo>
-                    <a:pt x="2220298" y="2530015"/>
-                  </a:lnTo>
-                  <a:lnTo>
-                    <a:pt x="2148675" y="2519269"/>
-                  </a:lnTo>
-                  <a:lnTo>
-                    <a:pt x="2077053" y="2508403"/>
-                  </a:lnTo>
-                  <a:lnTo>
-                    <a:pt x="2005430" y="2497413"/>
-                  </a:lnTo>
-                  <a:lnTo>
-                    <a:pt x="1933808" y="2486301"/>
-                  </a:lnTo>
-                  <a:lnTo>
-                    <a:pt x="1862185" y="2475062"/>
-                  </a:lnTo>
-                  <a:lnTo>
-                    <a:pt x="1790563" y="2463698"/>
-                  </a:lnTo>
-                  <a:lnTo>
-                    <a:pt x="1718940" y="2452205"/>
-                  </a:lnTo>
-                  <a:lnTo>
-                    <a:pt x="1647318" y="2440583"/>
-                  </a:lnTo>
-                  <a:lnTo>
-                    <a:pt x="1575695" y="2428830"/>
-                  </a:lnTo>
-                  <a:lnTo>
-                    <a:pt x="1504073" y="2416944"/>
-                  </a:lnTo>
-                  <a:lnTo>
-                    <a:pt x="1432450" y="2404924"/>
-                  </a:lnTo>
-                  <a:lnTo>
-                    <a:pt x="1360827" y="2392769"/>
-                  </a:lnTo>
-                  <a:lnTo>
-                    <a:pt x="1289205" y="2380477"/>
-                  </a:lnTo>
-                  <a:lnTo>
-                    <a:pt x="1217582" y="2368047"/>
-                  </a:lnTo>
-                  <a:lnTo>
-                    <a:pt x="1145960" y="2355477"/>
-                  </a:lnTo>
-                  <a:lnTo>
-                    <a:pt x="1074337" y="2342765"/>
-                  </a:lnTo>
-                  <a:lnTo>
-                    <a:pt x="1002715" y="2329909"/>
-                  </a:lnTo>
-                  <a:lnTo>
-                    <a:pt x="931092" y="2316909"/>
-                  </a:lnTo>
-                  <a:lnTo>
-                    <a:pt x="859470" y="2303762"/>
-                  </a:lnTo>
-                  <a:lnTo>
-                    <a:pt x="787847" y="2290468"/>
-                  </a:lnTo>
-                  <a:lnTo>
-                    <a:pt x="716225" y="2277023"/>
-                  </a:lnTo>
-                  <a:lnTo>
-                    <a:pt x="644602" y="2263427"/>
-                  </a:lnTo>
-                  <a:lnTo>
-                    <a:pt x="572980" y="2249678"/>
-                  </a:lnTo>
-                  <a:lnTo>
-                    <a:pt x="501357" y="2235774"/>
-                  </a:lnTo>
-                  <a:lnTo>
-                    <a:pt x="429735" y="2221713"/>
-                  </a:lnTo>
-                  <a:lnTo>
-                    <a:pt x="358112" y="2207494"/>
-                  </a:lnTo>
-                  <a:lnTo>
-                    <a:pt x="286490" y="2193115"/>
-                  </a:lnTo>
-                  <a:lnTo>
-                    <a:pt x="214867" y="2178573"/>
-                  </a:lnTo>
-                  <a:lnTo>
-                    <a:pt x="143245" y="2163868"/>
-                  </a:lnTo>
-                  <a:lnTo>
-                    <a:pt x="71622" y="2148997"/>
-                  </a:lnTo>
-                  <a:lnTo>
-                    <a:pt x="0" y="2133958"/>
+                    <a:pt x="0" y="0"/>
+                  </a:lnTo>
+                  <a:lnTo>
+                    <a:pt x="0" y="0"/>
+                  </a:lnTo>
+                </a:path>
+              </a:pathLst>
+            </a:custGeom>
+            <a:ln w="13550" cap="flat">
+              <a:solidFill>
+                <a:srgbClr val="EBEBEB">
+                  <a:alpha val="100000"/>
+                </a:srgbClr>
+              </a:solidFill>
+              <a:prstDash val="solid"/>
+              <a:round/>
+            </a:ln>
+          </p:spPr>
+          <p:txBody>
+            <a:bodyPr/>
+            <a:lstStyle/>
+            <a:p/>
+          </p:txBody>
+        </p:sp>
+        <p:sp>
+          <p:nvSpPr>
+            <p:cNvPr id="23" name="pg23"/>
+            <p:cNvSpPr/>
+            <p:nvPr/>
+          </p:nvSpPr>
+          <p:spPr>
+            <a:xfrm>
+              <a:off x="1235312" y="2143092"/>
+              <a:ext cx="6964104" cy="1236967"/>
+            </a:xfrm>
+            <a:custGeom>
+              <a:avLst/>
+              <a:pathLst>
+                <a:path w="6964104" h="1236967">
+                  <a:moveTo>
+                    <a:pt x="976303" y="0"/>
+                  </a:moveTo>
+                  <a:lnTo>
+                    <a:pt x="984822" y="7522"/>
+                  </a:lnTo>
+                  <a:lnTo>
+                    <a:pt x="1055167" y="66696"/>
+                  </a:lnTo>
+                  <a:lnTo>
+                    <a:pt x="1125511" y="123068"/>
+                  </a:lnTo>
+                  <a:lnTo>
+                    <a:pt x="1195856" y="176770"/>
+                  </a:lnTo>
+                  <a:lnTo>
+                    <a:pt x="1266200" y="227930"/>
+                  </a:lnTo>
+                  <a:lnTo>
+                    <a:pt x="1336545" y="276667"/>
+                  </a:lnTo>
+                  <a:lnTo>
+                    <a:pt x="1406889" y="323096"/>
+                  </a:lnTo>
+                  <a:lnTo>
+                    <a:pt x="1477234" y="367327"/>
+                  </a:lnTo>
+                  <a:lnTo>
+                    <a:pt x="1547578" y="409464"/>
+                  </a:lnTo>
+                  <a:lnTo>
+                    <a:pt x="1617923" y="449605"/>
+                  </a:lnTo>
+                  <a:lnTo>
+                    <a:pt x="1688267" y="487846"/>
+                  </a:lnTo>
+                  <a:lnTo>
+                    <a:pt x="1758612" y="524276"/>
+                  </a:lnTo>
+                  <a:lnTo>
+                    <a:pt x="1828956" y="558980"/>
+                  </a:lnTo>
+                  <a:lnTo>
+                    <a:pt x="1899301" y="592042"/>
+                  </a:lnTo>
+                  <a:lnTo>
+                    <a:pt x="1969645" y="623538"/>
+                  </a:lnTo>
+                  <a:lnTo>
+                    <a:pt x="2039990" y="653543"/>
+                  </a:lnTo>
+                  <a:lnTo>
+                    <a:pt x="2110334" y="682127"/>
+                  </a:lnTo>
+                  <a:lnTo>
+                    <a:pt x="2180679" y="709357"/>
+                  </a:lnTo>
+                  <a:lnTo>
+                    <a:pt x="2251023" y="735298"/>
+                  </a:lnTo>
+                  <a:lnTo>
+                    <a:pt x="2321368" y="760011"/>
+                  </a:lnTo>
+                  <a:lnTo>
+                    <a:pt x="2391712" y="783553"/>
+                  </a:lnTo>
+                  <a:lnTo>
+                    <a:pt x="2462057" y="805981"/>
+                  </a:lnTo>
+                  <a:lnTo>
+                    <a:pt x="2532401" y="827347"/>
+                  </a:lnTo>
+                  <a:lnTo>
+                    <a:pt x="2602746" y="847701"/>
+                  </a:lnTo>
+                  <a:lnTo>
+                    <a:pt x="2673090" y="867091"/>
+                  </a:lnTo>
+                  <a:lnTo>
+                    <a:pt x="2743435" y="885564"/>
+                  </a:lnTo>
+                  <a:lnTo>
+                    <a:pt x="2813779" y="903161"/>
+                  </a:lnTo>
+                  <a:lnTo>
+                    <a:pt x="2884124" y="919925"/>
+                  </a:lnTo>
+                  <a:lnTo>
+                    <a:pt x="2954468" y="935896"/>
+                  </a:lnTo>
+                  <a:lnTo>
+                    <a:pt x="3024813" y="951110"/>
+                  </a:lnTo>
+                  <a:lnTo>
+                    <a:pt x="3095157" y="959673"/>
+                  </a:lnTo>
+                  <a:lnTo>
+                    <a:pt x="3165502" y="962988"/>
+                  </a:lnTo>
+                  <a:lnTo>
+                    <a:pt x="3235846" y="966265"/>
+                  </a:lnTo>
+                  <a:lnTo>
+                    <a:pt x="3306191" y="969507"/>
+                  </a:lnTo>
+                  <a:lnTo>
+                    <a:pt x="3376535" y="972712"/>
+                  </a:lnTo>
+                  <a:lnTo>
+                    <a:pt x="3446880" y="975882"/>
+                  </a:lnTo>
+                  <a:lnTo>
+                    <a:pt x="3517224" y="979016"/>
+                  </a:lnTo>
+                  <a:lnTo>
+                    <a:pt x="3587569" y="982115"/>
+                  </a:lnTo>
+                  <a:lnTo>
+                    <a:pt x="3657913" y="985180"/>
+                  </a:lnTo>
+                  <a:lnTo>
+                    <a:pt x="3728257" y="988211"/>
+                  </a:lnTo>
+                  <a:lnTo>
+                    <a:pt x="3798602" y="991208"/>
+                  </a:lnTo>
+                  <a:lnTo>
+                    <a:pt x="3868946" y="994171"/>
+                  </a:lnTo>
+                  <a:lnTo>
+                    <a:pt x="3939291" y="997102"/>
+                  </a:lnTo>
+                  <a:lnTo>
+                    <a:pt x="4009635" y="1000000"/>
+                  </a:lnTo>
+                  <a:lnTo>
+                    <a:pt x="4079980" y="1002865"/>
+                  </a:lnTo>
+                  <a:lnTo>
+                    <a:pt x="4150324" y="1005699"/>
+                  </a:lnTo>
+                  <a:lnTo>
+                    <a:pt x="4220669" y="1008501"/>
+                  </a:lnTo>
+                  <a:lnTo>
+                    <a:pt x="4291013" y="1011272"/>
+                  </a:lnTo>
+                  <a:lnTo>
+                    <a:pt x="4361358" y="1014012"/>
+                  </a:lnTo>
+                  <a:lnTo>
+                    <a:pt x="4431702" y="1016721"/>
+                  </a:lnTo>
+                  <a:lnTo>
+                    <a:pt x="4502047" y="1019401"/>
+                  </a:lnTo>
+                  <a:lnTo>
+                    <a:pt x="4572391" y="1022050"/>
+                  </a:lnTo>
+                  <a:lnTo>
+                    <a:pt x="4642736" y="1024670"/>
+                  </a:lnTo>
+                  <a:lnTo>
+                    <a:pt x="4713080" y="1027261"/>
+                  </a:lnTo>
+                  <a:lnTo>
+                    <a:pt x="4783425" y="1029823"/>
+                  </a:lnTo>
+                  <a:lnTo>
+                    <a:pt x="4853769" y="1032356"/>
+                  </a:lnTo>
+                  <a:lnTo>
+                    <a:pt x="4924114" y="1034861"/>
+                  </a:lnTo>
+                  <a:lnTo>
+                    <a:pt x="4994458" y="1037338"/>
+                  </a:lnTo>
+                  <a:lnTo>
+                    <a:pt x="5064803" y="1039788"/>
+                  </a:lnTo>
+                  <a:lnTo>
+                    <a:pt x="5135147" y="1042210"/>
+                  </a:lnTo>
+                  <a:lnTo>
+                    <a:pt x="5205492" y="1044605"/>
+                  </a:lnTo>
+                  <a:lnTo>
+                    <a:pt x="5275836" y="1046974"/>
+                  </a:lnTo>
+                  <a:lnTo>
+                    <a:pt x="5346181" y="1049316"/>
+                  </a:lnTo>
+                  <a:lnTo>
+                    <a:pt x="5416525" y="1051632"/>
+                  </a:lnTo>
+                  <a:lnTo>
+                    <a:pt x="5486870" y="1053923"/>
+                  </a:lnTo>
+                  <a:lnTo>
+                    <a:pt x="5557214" y="1056187"/>
+                  </a:lnTo>
+                  <a:lnTo>
+                    <a:pt x="5627559" y="1058427"/>
+                  </a:lnTo>
+                  <a:lnTo>
+                    <a:pt x="5697903" y="1060642"/>
+                  </a:lnTo>
+                  <a:lnTo>
+                    <a:pt x="5768248" y="1062832"/>
+                  </a:lnTo>
+                  <a:lnTo>
+                    <a:pt x="5838592" y="1064997"/>
+                  </a:lnTo>
+                  <a:lnTo>
+                    <a:pt x="5908937" y="1067139"/>
+                  </a:lnTo>
+                  <a:lnTo>
+                    <a:pt x="5979281" y="1069256"/>
+                  </a:lnTo>
+                  <a:lnTo>
+                    <a:pt x="6049626" y="1071350"/>
+                  </a:lnTo>
+                  <a:lnTo>
+                    <a:pt x="6119970" y="1073421"/>
+                  </a:lnTo>
+                  <a:lnTo>
+                    <a:pt x="6190315" y="1075468"/>
+                  </a:lnTo>
+                  <a:lnTo>
+                    <a:pt x="6260659" y="1077493"/>
+                  </a:lnTo>
+                  <a:lnTo>
+                    <a:pt x="6331004" y="1079495"/>
+                  </a:lnTo>
+                  <a:lnTo>
+                    <a:pt x="6401348" y="1081475"/>
+                  </a:lnTo>
+                  <a:lnTo>
+                    <a:pt x="6471693" y="1083433"/>
+                  </a:lnTo>
+                  <a:lnTo>
+                    <a:pt x="6542037" y="1085369"/>
+                  </a:lnTo>
+                  <a:lnTo>
+                    <a:pt x="6612382" y="1087283"/>
+                  </a:lnTo>
+                  <a:lnTo>
+                    <a:pt x="6682726" y="1089177"/>
+                  </a:lnTo>
+                  <a:lnTo>
+                    <a:pt x="6753071" y="1091049"/>
+                  </a:lnTo>
+                  <a:lnTo>
+                    <a:pt x="6823415" y="1092900"/>
+                  </a:lnTo>
+                  <a:lnTo>
+                    <a:pt x="6893760" y="1094730"/>
+                  </a:lnTo>
+                  <a:lnTo>
+                    <a:pt x="6964104" y="1096540"/>
+                  </a:lnTo>
+                  <a:lnTo>
+                    <a:pt x="6964104" y="1236967"/>
+                  </a:lnTo>
+                  <a:lnTo>
+                    <a:pt x="6893760" y="1235962"/>
+                  </a:lnTo>
+                  <a:lnTo>
+                    <a:pt x="6823415" y="1234906"/>
+                  </a:lnTo>
+                  <a:lnTo>
+                    <a:pt x="6753071" y="1233798"/>
+                  </a:lnTo>
+                  <a:lnTo>
+                    <a:pt x="6682726" y="1232634"/>
+                  </a:lnTo>
+                  <a:lnTo>
+                    <a:pt x="6612382" y="1231413"/>
+                  </a:lnTo>
+                  <a:lnTo>
+                    <a:pt x="6542037" y="1230131"/>
+                  </a:lnTo>
+                  <a:lnTo>
+                    <a:pt x="6471693" y="1228786"/>
+                  </a:lnTo>
+                  <a:lnTo>
+                    <a:pt x="6401348" y="1227373"/>
+                  </a:lnTo>
+                  <a:lnTo>
+                    <a:pt x="6331004" y="1225891"/>
+                  </a:lnTo>
+                  <a:lnTo>
+                    <a:pt x="6260659" y="1224335"/>
+                  </a:lnTo>
+                  <a:lnTo>
+                    <a:pt x="6190315" y="1222701"/>
+                  </a:lnTo>
+                  <a:lnTo>
+                    <a:pt x="6119970" y="1220986"/>
+                  </a:lnTo>
+                  <a:lnTo>
+                    <a:pt x="6049626" y="1219186"/>
+                  </a:lnTo>
+                  <a:lnTo>
+                    <a:pt x="5979281" y="1217296"/>
+                  </a:lnTo>
+                  <a:lnTo>
+                    <a:pt x="5908937" y="1215313"/>
+                  </a:lnTo>
+                  <a:lnTo>
+                    <a:pt x="5838592" y="1213231"/>
+                  </a:lnTo>
+                  <a:lnTo>
+                    <a:pt x="5768248" y="1211045"/>
+                  </a:lnTo>
+                  <a:lnTo>
+                    <a:pt x="5697903" y="1208751"/>
+                  </a:lnTo>
+                  <a:lnTo>
+                    <a:pt x="5627559" y="1206343"/>
+                  </a:lnTo>
+                  <a:lnTo>
+                    <a:pt x="5557214" y="1203815"/>
+                  </a:lnTo>
+                  <a:lnTo>
+                    <a:pt x="5486870" y="1201161"/>
+                  </a:lnTo>
+                  <a:lnTo>
+                    <a:pt x="5416525" y="1198376"/>
+                  </a:lnTo>
+                  <a:lnTo>
+                    <a:pt x="5346181" y="1195452"/>
+                  </a:lnTo>
+                  <a:lnTo>
+                    <a:pt x="5275836" y="1192383"/>
+                  </a:lnTo>
+                  <a:lnTo>
+                    <a:pt x="5205492" y="1189161"/>
+                  </a:lnTo>
+                  <a:lnTo>
+                    <a:pt x="5135147" y="1185779"/>
+                  </a:lnTo>
+                  <a:lnTo>
+                    <a:pt x="5064803" y="1182229"/>
+                  </a:lnTo>
+                  <a:lnTo>
+                    <a:pt x="4994458" y="1178502"/>
+                  </a:lnTo>
+                  <a:lnTo>
+                    <a:pt x="4924114" y="1174591"/>
+                  </a:lnTo>
+                  <a:lnTo>
+                    <a:pt x="4853769" y="1170484"/>
+                  </a:lnTo>
+                  <a:lnTo>
+                    <a:pt x="4783425" y="1166174"/>
+                  </a:lnTo>
+                  <a:lnTo>
+                    <a:pt x="4713080" y="1161650"/>
+                  </a:lnTo>
+                  <a:lnTo>
+                    <a:pt x="4642736" y="1156900"/>
+                  </a:lnTo>
+                  <a:lnTo>
+                    <a:pt x="4572391" y="1151915"/>
+                  </a:lnTo>
+                  <a:lnTo>
+                    <a:pt x="4502047" y="1146681"/>
+                  </a:lnTo>
+                  <a:lnTo>
+                    <a:pt x="4431702" y="1141188"/>
+                  </a:lnTo>
+                  <a:lnTo>
+                    <a:pt x="4361358" y="1135422"/>
+                  </a:lnTo>
+                  <a:lnTo>
+                    <a:pt x="4291013" y="1129369"/>
+                  </a:lnTo>
+                  <a:lnTo>
+                    <a:pt x="4220669" y="1123015"/>
+                  </a:lnTo>
+                  <a:lnTo>
+                    <a:pt x="4150324" y="1116345"/>
+                  </a:lnTo>
+                  <a:lnTo>
+                    <a:pt x="4079980" y="1109344"/>
+                  </a:lnTo>
+                  <a:lnTo>
+                    <a:pt x="4009635" y="1101995"/>
+                  </a:lnTo>
+                  <a:lnTo>
+                    <a:pt x="3939291" y="1094280"/>
+                  </a:lnTo>
+                  <a:lnTo>
+                    <a:pt x="3868946" y="1086182"/>
+                  </a:lnTo>
+                  <a:lnTo>
+                    <a:pt x="3798602" y="1077682"/>
+                  </a:lnTo>
+                  <a:lnTo>
+                    <a:pt x="3728257" y="1068759"/>
+                  </a:lnTo>
+                  <a:lnTo>
+                    <a:pt x="3657913" y="1059392"/>
+                  </a:lnTo>
+                  <a:lnTo>
+                    <a:pt x="3587569" y="1049560"/>
+                  </a:lnTo>
+                  <a:lnTo>
+                    <a:pt x="3517224" y="1039239"/>
+                  </a:lnTo>
+                  <a:lnTo>
+                    <a:pt x="3446880" y="1028405"/>
+                  </a:lnTo>
+                  <a:lnTo>
+                    <a:pt x="3376535" y="1017033"/>
+                  </a:lnTo>
+                  <a:lnTo>
+                    <a:pt x="3306191" y="1005096"/>
+                  </a:lnTo>
+                  <a:lnTo>
+                    <a:pt x="3235846" y="992565"/>
+                  </a:lnTo>
+                  <a:lnTo>
+                    <a:pt x="3165502" y="979411"/>
+                  </a:lnTo>
+                  <a:lnTo>
+                    <a:pt x="3095157" y="965604"/>
+                  </a:lnTo>
+                  <a:lnTo>
+                    <a:pt x="3024813" y="956320"/>
+                  </a:lnTo>
+                  <a:lnTo>
+                    <a:pt x="2954468" y="952930"/>
+                  </a:lnTo>
+                  <a:lnTo>
+                    <a:pt x="2884124" y="949502"/>
+                  </a:lnTo>
+                  <a:lnTo>
+                    <a:pt x="2813779" y="946035"/>
+                  </a:lnTo>
+                  <a:lnTo>
+                    <a:pt x="2743435" y="942530"/>
+                  </a:lnTo>
+                  <a:lnTo>
+                    <a:pt x="2673090" y="938984"/>
+                  </a:lnTo>
+                  <a:lnTo>
+                    <a:pt x="2602746" y="935399"/>
+                  </a:lnTo>
+                  <a:lnTo>
+                    <a:pt x="2532401" y="931773"/>
+                  </a:lnTo>
+                  <a:lnTo>
+                    <a:pt x="2462057" y="928107"/>
+                  </a:lnTo>
+                  <a:lnTo>
+                    <a:pt x="2391712" y="924399"/>
+                  </a:lnTo>
+                  <a:lnTo>
+                    <a:pt x="2321368" y="920649"/>
+                  </a:lnTo>
+                  <a:lnTo>
+                    <a:pt x="2251023" y="916857"/>
+                  </a:lnTo>
+                  <a:lnTo>
+                    <a:pt x="2180679" y="913022"/>
+                  </a:lnTo>
+                  <a:lnTo>
+                    <a:pt x="2110334" y="909145"/>
+                  </a:lnTo>
+                  <a:lnTo>
+                    <a:pt x="2039990" y="905223"/>
+                  </a:lnTo>
+                  <a:lnTo>
+                    <a:pt x="1969645" y="901257"/>
+                  </a:lnTo>
+                  <a:lnTo>
+                    <a:pt x="1899301" y="897247"/>
+                  </a:lnTo>
+                  <a:lnTo>
+                    <a:pt x="1828956" y="893191"/>
+                  </a:lnTo>
+                  <a:lnTo>
+                    <a:pt x="1758612" y="889090"/>
+                  </a:lnTo>
+                  <a:lnTo>
+                    <a:pt x="1688267" y="884943"/>
+                  </a:lnTo>
+                  <a:lnTo>
+                    <a:pt x="1617923" y="880749"/>
+                  </a:lnTo>
+                  <a:lnTo>
+                    <a:pt x="1547578" y="876507"/>
+                  </a:lnTo>
+                  <a:lnTo>
+                    <a:pt x="1477234" y="872218"/>
+                  </a:lnTo>
+                  <a:lnTo>
+                    <a:pt x="1406889" y="867880"/>
+                  </a:lnTo>
+                  <a:lnTo>
+                    <a:pt x="1336545" y="863494"/>
+                  </a:lnTo>
+                  <a:lnTo>
+                    <a:pt x="1266200" y="859058"/>
+                  </a:lnTo>
+                  <a:lnTo>
+                    <a:pt x="1195856" y="854572"/>
+                  </a:lnTo>
+                  <a:lnTo>
+                    <a:pt x="1125511" y="850036"/>
+                  </a:lnTo>
+                  <a:lnTo>
+                    <a:pt x="1055167" y="845448"/>
+                  </a:lnTo>
+                  <a:lnTo>
+                    <a:pt x="984822" y="840809"/>
+                  </a:lnTo>
+                  <a:lnTo>
+                    <a:pt x="914478" y="836118"/>
+                  </a:lnTo>
+                  <a:lnTo>
+                    <a:pt x="844133" y="831373"/>
+                  </a:lnTo>
+                  <a:lnTo>
+                    <a:pt x="773789" y="826576"/>
+                  </a:lnTo>
+                  <a:lnTo>
+                    <a:pt x="703444" y="821724"/>
+                  </a:lnTo>
+                  <a:lnTo>
+                    <a:pt x="633100" y="816817"/>
+                  </a:lnTo>
+                  <a:lnTo>
+                    <a:pt x="562755" y="811856"/>
+                  </a:lnTo>
+                  <a:lnTo>
+                    <a:pt x="492411" y="806838"/>
+                  </a:lnTo>
+                  <a:lnTo>
+                    <a:pt x="422066" y="801764"/>
+                  </a:lnTo>
+                  <a:lnTo>
+                    <a:pt x="351722" y="796632"/>
+                  </a:lnTo>
+                  <a:lnTo>
+                    <a:pt x="281377" y="791443"/>
+                  </a:lnTo>
+                  <a:lnTo>
+                    <a:pt x="211033" y="786195"/>
+                  </a:lnTo>
+                  <a:lnTo>
+                    <a:pt x="140688" y="780889"/>
+                  </a:lnTo>
+                  <a:lnTo>
+                    <a:pt x="70344" y="775522"/>
+                  </a:lnTo>
+                  <a:lnTo>
+                    <a:pt x="0" y="770095"/>
                   </a:lnTo>
                   <a:close/>
                 </a:path>
@@ -3631,604 +3666,279 @@
         </p:sp>
         <p:sp>
           <p:nvSpPr>
-            <p:cNvPr id="23" name="pl23"/>
-            <p:cNvSpPr/>
-            <p:nvPr/>
-          </p:nvSpPr>
-          <p:spPr>
-            <a:xfrm>
-              <a:off x="2166090" y="2073503"/>
-              <a:ext cx="6096588" cy="3038549"/>
-            </a:xfrm>
-            <a:custGeom>
-              <a:avLst/>
-              <a:pathLst>
-                <a:path w="6096588" h="3038549">
-                  <a:moveTo>
-                    <a:pt x="0" y="0"/>
-                  </a:moveTo>
-                  <a:lnTo>
-                    <a:pt x="8674" y="20845"/>
-                  </a:lnTo>
-                  <a:lnTo>
-                    <a:pt x="80296" y="184817"/>
-                  </a:lnTo>
-                  <a:lnTo>
-                    <a:pt x="151919" y="341025"/>
-                  </a:lnTo>
-                  <a:lnTo>
-                    <a:pt x="223541" y="489836"/>
-                  </a:lnTo>
-                  <a:lnTo>
-                    <a:pt x="295164" y="631601"/>
-                  </a:lnTo>
-                  <a:lnTo>
-                    <a:pt x="366786" y="766654"/>
-                  </a:lnTo>
-                  <a:lnTo>
-                    <a:pt x="438409" y="895311"/>
-                  </a:lnTo>
-                  <a:lnTo>
-                    <a:pt x="510031" y="1017876"/>
-                  </a:lnTo>
-                  <a:lnTo>
-                    <a:pt x="581654" y="1134638"/>
-                  </a:lnTo>
-                  <a:lnTo>
-                    <a:pt x="653276" y="1245871"/>
-                  </a:lnTo>
-                  <a:lnTo>
-                    <a:pt x="724899" y="1351837"/>
-                  </a:lnTo>
-                  <a:lnTo>
-                    <a:pt x="796521" y="1452785"/>
-                  </a:lnTo>
-                  <a:lnTo>
-                    <a:pt x="868144" y="1548953"/>
-                  </a:lnTo>
-                  <a:lnTo>
-                    <a:pt x="939766" y="1640568"/>
-                  </a:lnTo>
-                  <a:lnTo>
-                    <a:pt x="1011389" y="1727844"/>
-                  </a:lnTo>
-                  <a:lnTo>
-                    <a:pt x="1083011" y="1810988"/>
-                  </a:lnTo>
-                  <a:lnTo>
-                    <a:pt x="1154634" y="1890195"/>
-                  </a:lnTo>
-                  <a:lnTo>
-                    <a:pt x="1226257" y="1965652"/>
-                  </a:lnTo>
-                  <a:lnTo>
-                    <a:pt x="1297879" y="2037535"/>
-                  </a:lnTo>
-                  <a:lnTo>
-                    <a:pt x="1369502" y="2106015"/>
-                  </a:lnTo>
-                  <a:lnTo>
-                    <a:pt x="1441124" y="2171252"/>
-                  </a:lnTo>
-                  <a:lnTo>
-                    <a:pt x="1512747" y="2233400"/>
-                  </a:lnTo>
-                  <a:lnTo>
-                    <a:pt x="1584369" y="2292605"/>
-                  </a:lnTo>
-                  <a:lnTo>
-                    <a:pt x="1655992" y="2349007"/>
-                  </a:lnTo>
-                  <a:lnTo>
-                    <a:pt x="1727614" y="2402738"/>
-                  </a:lnTo>
-                  <a:lnTo>
-                    <a:pt x="1799237" y="2453925"/>
-                  </a:lnTo>
-                  <a:lnTo>
-                    <a:pt x="1870859" y="2502688"/>
-                  </a:lnTo>
-                  <a:lnTo>
-                    <a:pt x="1942482" y="2549143"/>
-                  </a:lnTo>
-                  <a:lnTo>
-                    <a:pt x="2014104" y="2593397"/>
-                  </a:lnTo>
-                  <a:lnTo>
-                    <a:pt x="2085727" y="2635556"/>
-                  </a:lnTo>
-                  <a:lnTo>
-                    <a:pt x="2157349" y="2659284"/>
-                  </a:lnTo>
-                  <a:lnTo>
-                    <a:pt x="2228972" y="2668469"/>
-                  </a:lnTo>
-                  <a:lnTo>
-                    <a:pt x="2300594" y="2677553"/>
-                  </a:lnTo>
-                  <a:lnTo>
-                    <a:pt x="2372217" y="2686535"/>
-                  </a:lnTo>
-                  <a:lnTo>
-                    <a:pt x="2443839" y="2695417"/>
-                  </a:lnTo>
-                  <a:lnTo>
-                    <a:pt x="2515462" y="2704200"/>
-                  </a:lnTo>
-                  <a:lnTo>
-                    <a:pt x="2587085" y="2712885"/>
-                  </a:lnTo>
-                  <a:lnTo>
-                    <a:pt x="2658707" y="2721474"/>
-                  </a:lnTo>
-                  <a:lnTo>
-                    <a:pt x="2730330" y="2729966"/>
-                  </a:lnTo>
-                  <a:lnTo>
-                    <a:pt x="2801952" y="2738364"/>
-                  </a:lnTo>
-                  <a:lnTo>
-                    <a:pt x="2873575" y="2746669"/>
-                  </a:lnTo>
-                  <a:lnTo>
-                    <a:pt x="2945197" y="2754881"/>
-                  </a:lnTo>
-                  <a:lnTo>
-                    <a:pt x="3016820" y="2763002"/>
-                  </a:lnTo>
-                  <a:lnTo>
-                    <a:pt x="3088442" y="2771032"/>
-                  </a:lnTo>
-                  <a:lnTo>
-                    <a:pt x="3160065" y="2778972"/>
-                  </a:lnTo>
-                  <a:lnTo>
-                    <a:pt x="3231687" y="2786824"/>
-                  </a:lnTo>
-                  <a:lnTo>
-                    <a:pt x="3303310" y="2794589"/>
-                  </a:lnTo>
-                  <a:lnTo>
-                    <a:pt x="3374932" y="2802267"/>
-                  </a:lnTo>
-                  <a:lnTo>
-                    <a:pt x="3446555" y="2809860"/>
-                  </a:lnTo>
-                  <a:lnTo>
-                    <a:pt x="3518177" y="2817368"/>
-                  </a:lnTo>
-                  <a:lnTo>
-                    <a:pt x="3589800" y="2824792"/>
-                  </a:lnTo>
-                  <a:lnTo>
-                    <a:pt x="3661422" y="2832134"/>
-                  </a:lnTo>
-                  <a:lnTo>
-                    <a:pt x="3733045" y="2839394"/>
-                  </a:lnTo>
-                  <a:lnTo>
-                    <a:pt x="3804667" y="2846573"/>
-                  </a:lnTo>
-                  <a:lnTo>
-                    <a:pt x="3876290" y="2853672"/>
-                  </a:lnTo>
-                  <a:lnTo>
-                    <a:pt x="3947913" y="2860691"/>
-                  </a:lnTo>
-                  <a:lnTo>
-                    <a:pt x="4019535" y="2867633"/>
-                  </a:lnTo>
-                  <a:lnTo>
-                    <a:pt x="4091158" y="2874498"/>
-                  </a:lnTo>
-                  <a:lnTo>
-                    <a:pt x="4162780" y="2881285"/>
-                  </a:lnTo>
-                  <a:lnTo>
-                    <a:pt x="4234403" y="2887998"/>
-                  </a:lnTo>
-                  <a:lnTo>
-                    <a:pt x="4306025" y="2894635"/>
-                  </a:lnTo>
-                  <a:lnTo>
-                    <a:pt x="4377648" y="2901199"/>
-                  </a:lnTo>
-                  <a:lnTo>
-                    <a:pt x="4449270" y="2907689"/>
-                  </a:lnTo>
-                  <a:lnTo>
-                    <a:pt x="4520893" y="2914107"/>
-                  </a:lnTo>
-                  <a:lnTo>
-                    <a:pt x="4592515" y="2920454"/>
-                  </a:lnTo>
-                  <a:lnTo>
-                    <a:pt x="4664138" y="2926729"/>
-                  </a:lnTo>
-                  <a:lnTo>
-                    <a:pt x="4735760" y="2932935"/>
-                  </a:lnTo>
-                  <a:lnTo>
-                    <a:pt x="4807383" y="2939072"/>
-                  </a:lnTo>
-                  <a:lnTo>
-                    <a:pt x="4879005" y="2945141"/>
-                  </a:lnTo>
-                  <a:lnTo>
-                    <a:pt x="4950628" y="2951141"/>
-                  </a:lnTo>
-                  <a:lnTo>
-                    <a:pt x="5022250" y="2957075"/>
-                  </a:lnTo>
-                  <a:lnTo>
-                    <a:pt x="5093873" y="2962943"/>
-                  </a:lnTo>
-                  <a:lnTo>
-                    <a:pt x="5165495" y="2968746"/>
-                  </a:lnTo>
-                  <a:lnTo>
-                    <a:pt x="5237118" y="2974483"/>
-                  </a:lnTo>
-                  <a:lnTo>
-                    <a:pt x="5308741" y="2980157"/>
-                  </a:lnTo>
-                  <a:lnTo>
-                    <a:pt x="5380363" y="2985768"/>
-                  </a:lnTo>
-                  <a:lnTo>
-                    <a:pt x="5451986" y="2991316"/>
-                  </a:lnTo>
-                  <a:lnTo>
-                    <a:pt x="5523608" y="2996802"/>
-                  </a:lnTo>
-                  <a:lnTo>
-                    <a:pt x="5595231" y="3002228"/>
-                  </a:lnTo>
-                  <a:lnTo>
-                    <a:pt x="5666853" y="3007592"/>
-                  </a:lnTo>
-                  <a:lnTo>
-                    <a:pt x="5738476" y="3012897"/>
-                  </a:lnTo>
-                  <a:lnTo>
-                    <a:pt x="5810098" y="3018143"/>
-                  </a:lnTo>
-                  <a:lnTo>
-                    <a:pt x="5881721" y="3023331"/>
-                  </a:lnTo>
-                  <a:lnTo>
-                    <a:pt x="5953343" y="3028460"/>
-                  </a:lnTo>
-                  <a:lnTo>
-                    <a:pt x="6024966" y="3033533"/>
-                  </a:lnTo>
-                  <a:lnTo>
-                    <a:pt x="6096588" y="3038549"/>
-                  </a:lnTo>
-                </a:path>
-              </a:pathLst>
-            </a:custGeom>
-          </p:spPr>
-          <p:txBody>
-            <a:bodyPr/>
-            <a:lstStyle/>
-            <a:p/>
-          </p:txBody>
-        </p:sp>
-        <p:sp>
-          <p:nvSpPr>
             <p:cNvPr id="24" name="pl24"/>
             <p:cNvSpPr/>
             <p:nvPr/>
           </p:nvSpPr>
           <p:spPr>
             <a:xfrm>
-              <a:off x="1172049" y="4207462"/>
-              <a:ext cx="7090630" cy="1293717"/>
+              <a:off x="2211615" y="2143092"/>
+              <a:ext cx="5987800" cy="1096540"/>
             </a:xfrm>
             <a:custGeom>
               <a:avLst/>
               <a:pathLst>
-                <a:path w="7090630" h="1293717">
+                <a:path w="5987800" h="1096540">
                   <a:moveTo>
-                    <a:pt x="7090630" y="1293717"/>
+                    <a:pt x="0" y="0"/>
                   </a:moveTo>
                   <a:lnTo>
-                    <a:pt x="7019007" y="1290930"/>
-                  </a:lnTo>
-                  <a:lnTo>
-                    <a:pt x="6947385" y="1288005"/>
-                  </a:lnTo>
-                  <a:lnTo>
-                    <a:pt x="6875762" y="1284934"/>
-                  </a:lnTo>
-                  <a:lnTo>
-                    <a:pt x="6804139" y="1281710"/>
-                  </a:lnTo>
-                  <a:lnTo>
-                    <a:pt x="6732517" y="1278326"/>
-                  </a:lnTo>
-                  <a:lnTo>
-                    <a:pt x="6660894" y="1274774"/>
-                  </a:lnTo>
-                  <a:lnTo>
-                    <a:pt x="6589272" y="1271046"/>
-                  </a:lnTo>
-                  <a:lnTo>
-                    <a:pt x="6517649" y="1267132"/>
-                  </a:lnTo>
-                  <a:lnTo>
-                    <a:pt x="6446027" y="1263024"/>
-                  </a:lnTo>
-                  <a:lnTo>
-                    <a:pt x="6374404" y="1258711"/>
-                  </a:lnTo>
-                  <a:lnTo>
-                    <a:pt x="6302782" y="1254184"/>
-                  </a:lnTo>
-                  <a:lnTo>
-                    <a:pt x="6231159" y="1249432"/>
-                  </a:lnTo>
-                  <a:lnTo>
-                    <a:pt x="6159537" y="1244444"/>
-                  </a:lnTo>
-                  <a:lnTo>
-                    <a:pt x="6087914" y="1239208"/>
-                  </a:lnTo>
-                  <a:lnTo>
-                    <a:pt x="6016292" y="1233712"/>
-                  </a:lnTo>
-                  <a:lnTo>
-                    <a:pt x="5944669" y="1227942"/>
-                  </a:lnTo>
-                  <a:lnTo>
-                    <a:pt x="5873047" y="1221886"/>
-                  </a:lnTo>
-                  <a:lnTo>
-                    <a:pt x="5801424" y="1215529"/>
-                  </a:lnTo>
-                  <a:lnTo>
-                    <a:pt x="5729802" y="1208855"/>
-                  </a:lnTo>
-                  <a:lnTo>
-                    <a:pt x="5658179" y="1201850"/>
-                  </a:lnTo>
-                  <a:lnTo>
-                    <a:pt x="5586557" y="1194497"/>
-                  </a:lnTo>
-                  <a:lnTo>
-                    <a:pt x="5514934" y="1186779"/>
-                  </a:lnTo>
-                  <a:lnTo>
-                    <a:pt x="5443311" y="1178676"/>
-                  </a:lnTo>
-                  <a:lnTo>
-                    <a:pt x="5371689" y="1170171"/>
-                  </a:lnTo>
-                  <a:lnTo>
-                    <a:pt x="5300066" y="1161244"/>
-                  </a:lnTo>
-                  <a:lnTo>
-                    <a:pt x="5228444" y="1151872"/>
-                  </a:lnTo>
-                  <a:lnTo>
-                    <a:pt x="5156821" y="1142035"/>
-                  </a:lnTo>
-                  <a:lnTo>
-                    <a:pt x="5085199" y="1131709"/>
-                  </a:lnTo>
-                  <a:lnTo>
-                    <a:pt x="5013576" y="1120869"/>
-                  </a:lnTo>
-                  <a:lnTo>
-                    <a:pt x="4941954" y="1109491"/>
-                  </a:lnTo>
-                  <a:lnTo>
-                    <a:pt x="4870331" y="1097547"/>
-                  </a:lnTo>
-                  <a:lnTo>
-                    <a:pt x="4798709" y="1085009"/>
-                  </a:lnTo>
-                  <a:lnTo>
-                    <a:pt x="4727086" y="1071849"/>
-                  </a:lnTo>
-                  <a:lnTo>
-                    <a:pt x="4655464" y="1058034"/>
-                  </a:lnTo>
-                  <a:lnTo>
-                    <a:pt x="4583841" y="1043532"/>
-                  </a:lnTo>
-                  <a:lnTo>
-                    <a:pt x="4512219" y="1028310"/>
-                  </a:lnTo>
-                  <a:lnTo>
-                    <a:pt x="4440596" y="1012331"/>
-                  </a:lnTo>
-                  <a:lnTo>
-                    <a:pt x="4368974" y="995558"/>
-                  </a:lnTo>
-                  <a:lnTo>
-                    <a:pt x="4297351" y="977951"/>
-                  </a:lnTo>
-                  <a:lnTo>
-                    <a:pt x="4225729" y="959469"/>
-                  </a:lnTo>
-                  <a:lnTo>
-                    <a:pt x="4154106" y="940068"/>
-                  </a:lnTo>
-                  <a:lnTo>
-                    <a:pt x="4082483" y="919703"/>
-                  </a:lnTo>
-                  <a:lnTo>
-                    <a:pt x="4010861" y="898326"/>
-                  </a:lnTo>
-                  <a:lnTo>
-                    <a:pt x="3939238" y="875886"/>
-                  </a:lnTo>
-                  <a:lnTo>
-                    <a:pt x="3867616" y="852331"/>
-                  </a:lnTo>
-                  <a:lnTo>
-                    <a:pt x="3795993" y="827605"/>
-                  </a:lnTo>
-                  <a:lnTo>
-                    <a:pt x="3724371" y="801650"/>
-                  </a:lnTo>
-                  <a:lnTo>
-                    <a:pt x="3652748" y="774405"/>
-                  </a:lnTo>
-                  <a:lnTo>
-                    <a:pt x="3581126" y="745806"/>
-                  </a:lnTo>
-                  <a:lnTo>
-                    <a:pt x="3509503" y="715786"/>
-                  </a:lnTo>
-                  <a:lnTo>
-                    <a:pt x="3437881" y="684273"/>
-                  </a:lnTo>
-                  <a:lnTo>
-                    <a:pt x="3366258" y="651194"/>
-                  </a:lnTo>
-                  <a:lnTo>
-                    <a:pt x="3294636" y="616470"/>
-                  </a:lnTo>
-                  <a:lnTo>
-                    <a:pt x="3223013" y="580021"/>
-                  </a:lnTo>
-                  <a:lnTo>
-                    <a:pt x="3151391" y="541760"/>
-                  </a:lnTo>
-                  <a:lnTo>
-                    <a:pt x="3079768" y="516036"/>
-                  </a:lnTo>
-                  <a:lnTo>
-                    <a:pt x="3008146" y="506642"/>
-                  </a:lnTo>
-                  <a:lnTo>
-                    <a:pt x="2936523" y="497142"/>
-                  </a:lnTo>
-                  <a:lnTo>
-                    <a:pt x="2864901" y="487536"/>
-                  </a:lnTo>
-                  <a:lnTo>
-                    <a:pt x="2793278" y="477821"/>
-                  </a:lnTo>
-                  <a:lnTo>
-                    <a:pt x="2721655" y="467996"/>
-                  </a:lnTo>
-                  <a:lnTo>
-                    <a:pt x="2650033" y="458061"/>
-                  </a:lnTo>
-                  <a:lnTo>
-                    <a:pt x="2578410" y="448014"/>
-                  </a:lnTo>
-                  <a:lnTo>
-                    <a:pt x="2506788" y="437854"/>
-                  </a:lnTo>
-                  <a:lnTo>
-                    <a:pt x="2435165" y="427580"/>
-                  </a:lnTo>
-                  <a:lnTo>
-                    <a:pt x="2363543" y="417189"/>
-                  </a:lnTo>
-                  <a:lnTo>
-                    <a:pt x="2291920" y="406682"/>
-                  </a:lnTo>
-                  <a:lnTo>
-                    <a:pt x="2220298" y="396056"/>
-                  </a:lnTo>
-                  <a:lnTo>
-                    <a:pt x="2148675" y="385310"/>
-                  </a:lnTo>
-                  <a:lnTo>
-                    <a:pt x="2077053" y="374444"/>
-                  </a:lnTo>
-                  <a:lnTo>
-                    <a:pt x="2005430" y="363454"/>
-                  </a:lnTo>
-                  <a:lnTo>
-                    <a:pt x="1933808" y="352342"/>
-                  </a:lnTo>
-                  <a:lnTo>
-                    <a:pt x="1862185" y="341103"/>
-                  </a:lnTo>
-                  <a:lnTo>
-                    <a:pt x="1790563" y="329739"/>
-                  </a:lnTo>
-                  <a:lnTo>
-                    <a:pt x="1718940" y="318246"/>
-                  </a:lnTo>
-                  <a:lnTo>
-                    <a:pt x="1647318" y="306624"/>
-                  </a:lnTo>
-                  <a:lnTo>
-                    <a:pt x="1575695" y="294871"/>
-                  </a:lnTo>
-                  <a:lnTo>
-                    <a:pt x="1504073" y="282985"/>
-                  </a:lnTo>
-                  <a:lnTo>
-                    <a:pt x="1432450" y="270965"/>
-                  </a:lnTo>
-                  <a:lnTo>
-                    <a:pt x="1360827" y="258810"/>
-                  </a:lnTo>
-                  <a:lnTo>
-                    <a:pt x="1289205" y="246518"/>
-                  </a:lnTo>
-                  <a:lnTo>
-                    <a:pt x="1217582" y="234088"/>
-                  </a:lnTo>
-                  <a:lnTo>
-                    <a:pt x="1145960" y="221518"/>
-                  </a:lnTo>
-                  <a:lnTo>
-                    <a:pt x="1074337" y="208806"/>
-                  </a:lnTo>
-                  <a:lnTo>
-                    <a:pt x="1002715" y="195950"/>
-                  </a:lnTo>
-                  <a:lnTo>
-                    <a:pt x="931092" y="182950"/>
-                  </a:lnTo>
-                  <a:lnTo>
-                    <a:pt x="859470" y="169803"/>
-                  </a:lnTo>
-                  <a:lnTo>
-                    <a:pt x="787847" y="156509"/>
-                  </a:lnTo>
-                  <a:lnTo>
-                    <a:pt x="716225" y="143064"/>
-                  </a:lnTo>
-                  <a:lnTo>
-                    <a:pt x="644602" y="129468"/>
-                  </a:lnTo>
-                  <a:lnTo>
-                    <a:pt x="572980" y="115719"/>
-                  </a:lnTo>
-                  <a:lnTo>
-                    <a:pt x="501357" y="101815"/>
-                  </a:lnTo>
-                  <a:lnTo>
-                    <a:pt x="429735" y="87754"/>
-                  </a:lnTo>
-                  <a:lnTo>
-                    <a:pt x="358112" y="73535"/>
-                  </a:lnTo>
-                  <a:lnTo>
-                    <a:pt x="286490" y="59156"/>
-                  </a:lnTo>
-                  <a:lnTo>
-                    <a:pt x="214867" y="44614"/>
-                  </a:lnTo>
-                  <a:lnTo>
-                    <a:pt x="143245" y="29909"/>
-                  </a:lnTo>
-                  <a:lnTo>
-                    <a:pt x="71622" y="15038"/>
-                  </a:lnTo>
-                  <a:lnTo>
-                    <a:pt x="0" y="0"/>
+                    <a:pt x="8519" y="7522"/>
+                  </a:lnTo>
+                  <a:lnTo>
+                    <a:pt x="78863" y="66696"/>
+                  </a:lnTo>
+                  <a:lnTo>
+                    <a:pt x="149208" y="123068"/>
+                  </a:lnTo>
+                  <a:lnTo>
+                    <a:pt x="219552" y="176770"/>
+                  </a:lnTo>
+                  <a:lnTo>
+                    <a:pt x="289897" y="227930"/>
+                  </a:lnTo>
+                  <a:lnTo>
+                    <a:pt x="360241" y="276667"/>
+                  </a:lnTo>
+                  <a:lnTo>
+                    <a:pt x="430586" y="323096"/>
+                  </a:lnTo>
+                  <a:lnTo>
+                    <a:pt x="500930" y="367327"/>
+                  </a:lnTo>
+                  <a:lnTo>
+                    <a:pt x="571275" y="409464"/>
+                  </a:lnTo>
+                  <a:lnTo>
+                    <a:pt x="641619" y="449605"/>
+                  </a:lnTo>
+                  <a:lnTo>
+                    <a:pt x="711964" y="487846"/>
+                  </a:lnTo>
+                  <a:lnTo>
+                    <a:pt x="782308" y="524276"/>
+                  </a:lnTo>
+                  <a:lnTo>
+                    <a:pt x="852653" y="558980"/>
+                  </a:lnTo>
+                  <a:lnTo>
+                    <a:pt x="922997" y="592042"/>
+                  </a:lnTo>
+                  <a:lnTo>
+                    <a:pt x="993342" y="623538"/>
+                  </a:lnTo>
+                  <a:lnTo>
+                    <a:pt x="1063686" y="653543"/>
+                  </a:lnTo>
+                  <a:lnTo>
+                    <a:pt x="1134031" y="682127"/>
+                  </a:lnTo>
+                  <a:lnTo>
+                    <a:pt x="1204375" y="709357"/>
+                  </a:lnTo>
+                  <a:lnTo>
+                    <a:pt x="1274720" y="735298"/>
+                  </a:lnTo>
+                  <a:lnTo>
+                    <a:pt x="1345064" y="760011"/>
+                  </a:lnTo>
+                  <a:lnTo>
+                    <a:pt x="1415409" y="783553"/>
+                  </a:lnTo>
+                  <a:lnTo>
+                    <a:pt x="1485753" y="805981"/>
+                  </a:lnTo>
+                  <a:lnTo>
+                    <a:pt x="1556098" y="827347"/>
+                  </a:lnTo>
+                  <a:lnTo>
+                    <a:pt x="1626442" y="847701"/>
+                  </a:lnTo>
+                  <a:lnTo>
+                    <a:pt x="1696787" y="867091"/>
+                  </a:lnTo>
+                  <a:lnTo>
+                    <a:pt x="1767131" y="885564"/>
+                  </a:lnTo>
+                  <a:lnTo>
+                    <a:pt x="1837476" y="903161"/>
+                  </a:lnTo>
+                  <a:lnTo>
+                    <a:pt x="1907820" y="919925"/>
+                  </a:lnTo>
+                  <a:lnTo>
+                    <a:pt x="1978165" y="935896"/>
+                  </a:lnTo>
+                  <a:lnTo>
+                    <a:pt x="2048509" y="951110"/>
+                  </a:lnTo>
+                  <a:lnTo>
+                    <a:pt x="2118854" y="959673"/>
+                  </a:lnTo>
+                  <a:lnTo>
+                    <a:pt x="2189198" y="962988"/>
+                  </a:lnTo>
+                  <a:lnTo>
+                    <a:pt x="2259542" y="966265"/>
+                  </a:lnTo>
+                  <a:lnTo>
+                    <a:pt x="2329887" y="969507"/>
+                  </a:lnTo>
+                  <a:lnTo>
+                    <a:pt x="2400231" y="972712"/>
+                  </a:lnTo>
+                  <a:lnTo>
+                    <a:pt x="2470576" y="975882"/>
+                  </a:lnTo>
+                  <a:lnTo>
+                    <a:pt x="2540920" y="979016"/>
+                  </a:lnTo>
+                  <a:lnTo>
+                    <a:pt x="2611265" y="982115"/>
+                  </a:lnTo>
+                  <a:lnTo>
+                    <a:pt x="2681609" y="985180"/>
+                  </a:lnTo>
+                  <a:lnTo>
+                    <a:pt x="2751954" y="988211"/>
+                  </a:lnTo>
+                  <a:lnTo>
+                    <a:pt x="2822298" y="991208"/>
+                  </a:lnTo>
+                  <a:lnTo>
+                    <a:pt x="2892643" y="994171"/>
+                  </a:lnTo>
+                  <a:lnTo>
+                    <a:pt x="2962987" y="997102"/>
+                  </a:lnTo>
+                  <a:lnTo>
+                    <a:pt x="3033332" y="1000000"/>
+                  </a:lnTo>
+                  <a:lnTo>
+                    <a:pt x="3103676" y="1002865"/>
+                  </a:lnTo>
+                  <a:lnTo>
+                    <a:pt x="3174021" y="1005699"/>
+                  </a:lnTo>
+                  <a:lnTo>
+                    <a:pt x="3244365" y="1008501"/>
+                  </a:lnTo>
+                  <a:lnTo>
+                    <a:pt x="3314710" y="1011272"/>
+                  </a:lnTo>
+                  <a:lnTo>
+                    <a:pt x="3385054" y="1014012"/>
+                  </a:lnTo>
+                  <a:lnTo>
+                    <a:pt x="3455399" y="1016721"/>
+                  </a:lnTo>
+                  <a:lnTo>
+                    <a:pt x="3525743" y="1019401"/>
+                  </a:lnTo>
+                  <a:lnTo>
+                    <a:pt x="3596088" y="1022050"/>
+                  </a:lnTo>
+                  <a:lnTo>
+                    <a:pt x="3666432" y="1024670"/>
+                  </a:lnTo>
+                  <a:lnTo>
+                    <a:pt x="3736777" y="1027261"/>
+                  </a:lnTo>
+                  <a:lnTo>
+                    <a:pt x="3807121" y="1029823"/>
+                  </a:lnTo>
+                  <a:lnTo>
+                    <a:pt x="3877466" y="1032356"/>
+                  </a:lnTo>
+                  <a:lnTo>
+                    <a:pt x="3947810" y="1034861"/>
+                  </a:lnTo>
+                  <a:lnTo>
+                    <a:pt x="4018155" y="1037338"/>
+                  </a:lnTo>
+                  <a:lnTo>
+                    <a:pt x="4088499" y="1039788"/>
+                  </a:lnTo>
+                  <a:lnTo>
+                    <a:pt x="4158844" y="1042210"/>
+                  </a:lnTo>
+                  <a:lnTo>
+                    <a:pt x="4229188" y="1044605"/>
+                  </a:lnTo>
+                  <a:lnTo>
+                    <a:pt x="4299533" y="1046974"/>
+                  </a:lnTo>
+                  <a:lnTo>
+                    <a:pt x="4369877" y="1049316"/>
+                  </a:lnTo>
+                  <a:lnTo>
+                    <a:pt x="4440222" y="1051632"/>
+                  </a:lnTo>
+                  <a:lnTo>
+                    <a:pt x="4510566" y="1053923"/>
+                  </a:lnTo>
+                  <a:lnTo>
+                    <a:pt x="4580911" y="1056187"/>
+                  </a:lnTo>
+                  <a:lnTo>
+                    <a:pt x="4651255" y="1058427"/>
+                  </a:lnTo>
+                  <a:lnTo>
+                    <a:pt x="4721600" y="1060642"/>
+                  </a:lnTo>
+                  <a:lnTo>
+                    <a:pt x="4791944" y="1062832"/>
+                  </a:lnTo>
+                  <a:lnTo>
+                    <a:pt x="4862289" y="1064997"/>
+                  </a:lnTo>
+                  <a:lnTo>
+                    <a:pt x="4932633" y="1067139"/>
+                  </a:lnTo>
+                  <a:lnTo>
+                    <a:pt x="5002978" y="1069256"/>
+                  </a:lnTo>
+                  <a:lnTo>
+                    <a:pt x="5073322" y="1071350"/>
+                  </a:lnTo>
+                  <a:lnTo>
+                    <a:pt x="5143667" y="1073421"/>
+                  </a:lnTo>
+                  <a:lnTo>
+                    <a:pt x="5214011" y="1075468"/>
+                  </a:lnTo>
+                  <a:lnTo>
+                    <a:pt x="5284356" y="1077493"/>
+                  </a:lnTo>
+                  <a:lnTo>
+                    <a:pt x="5354700" y="1079495"/>
+                  </a:lnTo>
+                  <a:lnTo>
+                    <a:pt x="5425045" y="1081475"/>
+                  </a:lnTo>
+                  <a:lnTo>
+                    <a:pt x="5495389" y="1083433"/>
+                  </a:lnTo>
+                  <a:lnTo>
+                    <a:pt x="5565734" y="1085369"/>
+                  </a:lnTo>
+                  <a:lnTo>
+                    <a:pt x="5636078" y="1087283"/>
+                  </a:lnTo>
+                  <a:lnTo>
+                    <a:pt x="5706423" y="1089177"/>
+                  </a:lnTo>
+                  <a:lnTo>
+                    <a:pt x="5776767" y="1091049"/>
+                  </a:lnTo>
+                  <a:lnTo>
+                    <a:pt x="5847112" y="1092900"/>
+                  </a:lnTo>
+                  <a:lnTo>
+                    <a:pt x="5917456" y="1094730"/>
+                  </a:lnTo>
+                  <a:lnTo>
+                    <a:pt x="5987800" y="1096540"/>
                   </a:lnTo>
                 </a:path>
               </a:pathLst>
@@ -4248,312 +3958,637 @@
           </p:nvSpPr>
           <p:spPr>
             <a:xfrm>
-              <a:off x="1172049" y="2521103"/>
-              <a:ext cx="7090630" cy="2878151"/>
+              <a:off x="1235312" y="2913187"/>
+              <a:ext cx="6964104" cy="466872"/>
             </a:xfrm>
             <a:custGeom>
               <a:avLst/>
               <a:pathLst>
-                <a:path w="7090630" h="2878151">
+                <a:path w="6964104" h="466872">
+                  <a:moveTo>
+                    <a:pt x="6964104" y="466872"/>
+                  </a:moveTo>
+                  <a:lnTo>
+                    <a:pt x="6893760" y="465866"/>
+                  </a:lnTo>
+                  <a:lnTo>
+                    <a:pt x="6823415" y="464810"/>
+                  </a:lnTo>
+                  <a:lnTo>
+                    <a:pt x="6753071" y="463702"/>
+                  </a:lnTo>
+                  <a:lnTo>
+                    <a:pt x="6682726" y="462539"/>
+                  </a:lnTo>
+                  <a:lnTo>
+                    <a:pt x="6612382" y="461318"/>
+                  </a:lnTo>
+                  <a:lnTo>
+                    <a:pt x="6542037" y="460036"/>
+                  </a:lnTo>
+                  <a:lnTo>
+                    <a:pt x="6471693" y="458690"/>
+                  </a:lnTo>
+                  <a:lnTo>
+                    <a:pt x="6401348" y="457278"/>
+                  </a:lnTo>
+                  <a:lnTo>
+                    <a:pt x="6331004" y="455795"/>
+                  </a:lnTo>
+                  <a:lnTo>
+                    <a:pt x="6260659" y="454239"/>
+                  </a:lnTo>
+                  <a:lnTo>
+                    <a:pt x="6190315" y="452605"/>
+                  </a:lnTo>
+                  <a:lnTo>
+                    <a:pt x="6119970" y="450890"/>
+                  </a:lnTo>
+                  <a:lnTo>
+                    <a:pt x="6049626" y="449090"/>
+                  </a:lnTo>
+                  <a:lnTo>
+                    <a:pt x="5979281" y="447201"/>
+                  </a:lnTo>
+                  <a:lnTo>
+                    <a:pt x="5908937" y="445217"/>
+                  </a:lnTo>
+                  <a:lnTo>
+                    <a:pt x="5838592" y="443135"/>
+                  </a:lnTo>
+                  <a:lnTo>
+                    <a:pt x="5768248" y="440950"/>
+                  </a:lnTo>
+                  <a:lnTo>
+                    <a:pt x="5697903" y="438655"/>
+                  </a:lnTo>
+                  <a:lnTo>
+                    <a:pt x="5627559" y="436247"/>
+                  </a:lnTo>
+                  <a:lnTo>
+                    <a:pt x="5557214" y="433719"/>
+                  </a:lnTo>
+                  <a:lnTo>
+                    <a:pt x="5486870" y="431066"/>
+                  </a:lnTo>
+                  <a:lnTo>
+                    <a:pt x="5416525" y="428280"/>
+                  </a:lnTo>
+                  <a:lnTo>
+                    <a:pt x="5346181" y="425356"/>
+                  </a:lnTo>
+                  <a:lnTo>
+                    <a:pt x="5275836" y="422287"/>
+                  </a:lnTo>
+                  <a:lnTo>
+                    <a:pt x="5205492" y="419065"/>
+                  </a:lnTo>
+                  <a:lnTo>
+                    <a:pt x="5135147" y="415683"/>
+                  </a:lnTo>
+                  <a:lnTo>
+                    <a:pt x="5064803" y="412133"/>
+                  </a:lnTo>
+                  <a:lnTo>
+                    <a:pt x="4994458" y="408407"/>
+                  </a:lnTo>
+                  <a:lnTo>
+                    <a:pt x="4924114" y="404495"/>
+                  </a:lnTo>
+                  <a:lnTo>
+                    <a:pt x="4853769" y="400389"/>
+                  </a:lnTo>
+                  <a:lnTo>
+                    <a:pt x="4783425" y="396078"/>
+                  </a:lnTo>
+                  <a:lnTo>
+                    <a:pt x="4713080" y="391554"/>
+                  </a:lnTo>
+                  <a:lnTo>
+                    <a:pt x="4642736" y="386805"/>
+                  </a:lnTo>
+                  <a:lnTo>
+                    <a:pt x="4572391" y="381819"/>
+                  </a:lnTo>
+                  <a:lnTo>
+                    <a:pt x="4502047" y="376586"/>
+                  </a:lnTo>
+                  <a:lnTo>
+                    <a:pt x="4431702" y="371093"/>
+                  </a:lnTo>
+                  <a:lnTo>
+                    <a:pt x="4361358" y="365326"/>
+                  </a:lnTo>
+                  <a:lnTo>
+                    <a:pt x="4291013" y="359273"/>
+                  </a:lnTo>
+                  <a:lnTo>
+                    <a:pt x="4220669" y="352919"/>
+                  </a:lnTo>
+                  <a:lnTo>
+                    <a:pt x="4150324" y="346249"/>
+                  </a:lnTo>
+                  <a:lnTo>
+                    <a:pt x="4079980" y="339248"/>
+                  </a:lnTo>
+                  <a:lnTo>
+                    <a:pt x="4009635" y="331899"/>
+                  </a:lnTo>
+                  <a:lnTo>
+                    <a:pt x="3939291" y="324184"/>
+                  </a:lnTo>
+                  <a:lnTo>
+                    <a:pt x="3868946" y="316086"/>
+                  </a:lnTo>
+                  <a:lnTo>
+                    <a:pt x="3798602" y="307586"/>
+                  </a:lnTo>
+                  <a:lnTo>
+                    <a:pt x="3728257" y="298663"/>
+                  </a:lnTo>
+                  <a:lnTo>
+                    <a:pt x="3657913" y="289296"/>
+                  </a:lnTo>
+                  <a:lnTo>
+                    <a:pt x="3587569" y="279464"/>
+                  </a:lnTo>
+                  <a:lnTo>
+                    <a:pt x="3517224" y="269144"/>
+                  </a:lnTo>
+                  <a:lnTo>
+                    <a:pt x="3446880" y="258310"/>
+                  </a:lnTo>
+                  <a:lnTo>
+                    <a:pt x="3376535" y="246938"/>
+                  </a:lnTo>
+                  <a:lnTo>
+                    <a:pt x="3306191" y="235000"/>
+                  </a:lnTo>
+                  <a:lnTo>
+                    <a:pt x="3235846" y="222469"/>
+                  </a:lnTo>
+                  <a:lnTo>
+                    <a:pt x="3165502" y="209316"/>
+                  </a:lnTo>
+                  <a:lnTo>
+                    <a:pt x="3095157" y="195508"/>
+                  </a:lnTo>
+                  <a:lnTo>
+                    <a:pt x="3024813" y="186225"/>
+                  </a:lnTo>
+                  <a:lnTo>
+                    <a:pt x="2954468" y="182835"/>
+                  </a:lnTo>
+                  <a:lnTo>
+                    <a:pt x="2884124" y="179407"/>
+                  </a:lnTo>
+                  <a:lnTo>
+                    <a:pt x="2813779" y="175940"/>
+                  </a:lnTo>
+                  <a:lnTo>
+                    <a:pt x="2743435" y="172434"/>
+                  </a:lnTo>
+                  <a:lnTo>
+                    <a:pt x="2673090" y="168889"/>
+                  </a:lnTo>
+                  <a:lnTo>
+                    <a:pt x="2602746" y="165303"/>
+                  </a:lnTo>
+                  <a:lnTo>
+                    <a:pt x="2532401" y="161678"/>
+                  </a:lnTo>
+                  <a:lnTo>
+                    <a:pt x="2462057" y="158011"/>
+                  </a:lnTo>
+                  <a:lnTo>
+                    <a:pt x="2391712" y="154303"/>
+                  </a:lnTo>
+                  <a:lnTo>
+                    <a:pt x="2321368" y="150553"/>
+                  </a:lnTo>
+                  <a:lnTo>
+                    <a:pt x="2251023" y="146762"/>
+                  </a:lnTo>
+                  <a:lnTo>
+                    <a:pt x="2180679" y="142927"/>
+                  </a:lnTo>
+                  <a:lnTo>
+                    <a:pt x="2110334" y="139049"/>
+                  </a:lnTo>
+                  <a:lnTo>
+                    <a:pt x="2039990" y="135128"/>
+                  </a:lnTo>
+                  <a:lnTo>
+                    <a:pt x="1969645" y="131162"/>
+                  </a:lnTo>
+                  <a:lnTo>
+                    <a:pt x="1899301" y="127151"/>
+                  </a:lnTo>
+                  <a:lnTo>
+                    <a:pt x="1828956" y="123096"/>
+                  </a:lnTo>
+                  <a:lnTo>
+                    <a:pt x="1758612" y="118995"/>
+                  </a:lnTo>
+                  <a:lnTo>
+                    <a:pt x="1688267" y="114847"/>
+                  </a:lnTo>
+                  <a:lnTo>
+                    <a:pt x="1617923" y="110653"/>
+                  </a:lnTo>
+                  <a:lnTo>
+                    <a:pt x="1547578" y="106412"/>
+                  </a:lnTo>
+                  <a:lnTo>
+                    <a:pt x="1477234" y="102122"/>
+                  </a:lnTo>
+                  <a:lnTo>
+                    <a:pt x="1406889" y="97785"/>
+                  </a:lnTo>
+                  <a:lnTo>
+                    <a:pt x="1336545" y="93398"/>
+                  </a:lnTo>
+                  <a:lnTo>
+                    <a:pt x="1266200" y="88962"/>
+                  </a:lnTo>
+                  <a:lnTo>
+                    <a:pt x="1195856" y="84477"/>
+                  </a:lnTo>
+                  <a:lnTo>
+                    <a:pt x="1125511" y="79940"/>
+                  </a:lnTo>
+                  <a:lnTo>
+                    <a:pt x="1055167" y="75353"/>
+                  </a:lnTo>
+                  <a:lnTo>
+                    <a:pt x="984822" y="70714"/>
+                  </a:lnTo>
+                  <a:lnTo>
+                    <a:pt x="914478" y="66022"/>
+                  </a:lnTo>
+                  <a:lnTo>
+                    <a:pt x="844133" y="61278"/>
+                  </a:lnTo>
+                  <a:lnTo>
+                    <a:pt x="773789" y="56480"/>
+                  </a:lnTo>
+                  <a:lnTo>
+                    <a:pt x="703444" y="51628"/>
+                  </a:lnTo>
+                  <a:lnTo>
+                    <a:pt x="633100" y="46722"/>
+                  </a:lnTo>
+                  <a:lnTo>
+                    <a:pt x="562755" y="41760"/>
+                  </a:lnTo>
+                  <a:lnTo>
+                    <a:pt x="492411" y="36742"/>
+                  </a:lnTo>
+                  <a:lnTo>
+                    <a:pt x="422066" y="31668"/>
+                  </a:lnTo>
+                  <a:lnTo>
+                    <a:pt x="351722" y="26537"/>
+                  </a:lnTo>
+                  <a:lnTo>
+                    <a:pt x="281377" y="21348"/>
+                  </a:lnTo>
+                  <a:lnTo>
+                    <a:pt x="211033" y="16100"/>
+                  </a:lnTo>
+                  <a:lnTo>
+                    <a:pt x="140688" y="10793"/>
+                  </a:lnTo>
+                  <a:lnTo>
+                    <a:pt x="70344" y="5427"/>
+                  </a:lnTo>
+                  <a:lnTo>
+                    <a:pt x="0" y="0"/>
+                  </a:lnTo>
+                </a:path>
+              </a:pathLst>
+            </a:custGeom>
+          </p:spPr>
+          <p:txBody>
+            <a:bodyPr/>
+            <a:lstStyle/>
+            <a:p/>
+          </p:txBody>
+        </p:sp>
+        <p:sp>
+          <p:nvSpPr>
+            <p:cNvPr id="26" name="pl26"/>
+            <p:cNvSpPr/>
+            <p:nvPr/>
+          </p:nvSpPr>
+          <p:spPr>
+            <a:xfrm>
+              <a:off x="1235312" y="2304620"/>
+              <a:ext cx="6964104" cy="1038657"/>
+            </a:xfrm>
+            <a:custGeom>
+              <a:avLst/>
+              <a:pathLst>
+                <a:path w="6964104" h="1038657">
                   <a:moveTo>
                     <a:pt x="0" y="0"/>
                   </a:moveTo>
                   <a:lnTo>
-                    <a:pt x="71622" y="89308"/>
-                  </a:lnTo>
-                  <a:lnTo>
-                    <a:pt x="143245" y="175989"/>
-                  </a:lnTo>
-                  <a:lnTo>
-                    <a:pt x="214867" y="260121"/>
-                  </a:lnTo>
-                  <a:lnTo>
-                    <a:pt x="286490" y="341778"/>
-                  </a:lnTo>
-                  <a:lnTo>
-                    <a:pt x="358112" y="421033"/>
-                  </a:lnTo>
-                  <a:lnTo>
-                    <a:pt x="429735" y="497957"/>
-                  </a:lnTo>
-                  <a:lnTo>
-                    <a:pt x="501357" y="572618"/>
-                  </a:lnTo>
-                  <a:lnTo>
-                    <a:pt x="572980" y="645083"/>
-                  </a:lnTo>
-                  <a:lnTo>
-                    <a:pt x="644602" y="715416"/>
-                  </a:lnTo>
-                  <a:lnTo>
-                    <a:pt x="716225" y="783681"/>
-                  </a:lnTo>
-                  <a:lnTo>
-                    <a:pt x="787847" y="849937"/>
-                  </a:lnTo>
-                  <a:lnTo>
-                    <a:pt x="859470" y="914245"/>
-                  </a:lnTo>
-                  <a:lnTo>
-                    <a:pt x="931092" y="976660"/>
-                  </a:lnTo>
-                  <a:lnTo>
-                    <a:pt x="1002715" y="1037240"/>
-                  </a:lnTo>
-                  <a:lnTo>
-                    <a:pt x="1074337" y="1096038"/>
-                  </a:lnTo>
-                  <a:lnTo>
-                    <a:pt x="1145960" y="1153107"/>
-                  </a:lnTo>
-                  <a:lnTo>
-                    <a:pt x="1217582" y="1208497"/>
-                  </a:lnTo>
-                  <a:lnTo>
-                    <a:pt x="1289205" y="1262257"/>
-                  </a:lnTo>
-                  <a:lnTo>
-                    <a:pt x="1360827" y="1314436"/>
-                  </a:lnTo>
-                  <a:lnTo>
-                    <a:pt x="1432450" y="1365080"/>
-                  </a:lnTo>
-                  <a:lnTo>
-                    <a:pt x="1504073" y="1414235"/>
-                  </a:lnTo>
-                  <a:lnTo>
-                    <a:pt x="1575695" y="1461943"/>
-                  </a:lnTo>
-                  <a:lnTo>
-                    <a:pt x="1647318" y="1508249"/>
-                  </a:lnTo>
-                  <a:lnTo>
-                    <a:pt x="1718940" y="1553192"/>
-                  </a:lnTo>
-                  <a:lnTo>
-                    <a:pt x="1790563" y="1596813"/>
-                  </a:lnTo>
-                  <a:lnTo>
-                    <a:pt x="1862185" y="1639151"/>
-                  </a:lnTo>
-                  <a:lnTo>
-                    <a:pt x="1933808" y="1680244"/>
-                  </a:lnTo>
-                  <a:lnTo>
-                    <a:pt x="2005430" y="1720128"/>
-                  </a:lnTo>
-                  <a:lnTo>
-                    <a:pt x="2077053" y="1758839"/>
-                  </a:lnTo>
-                  <a:lnTo>
-                    <a:pt x="2148675" y="1796411"/>
-                  </a:lnTo>
-                  <a:lnTo>
-                    <a:pt x="2220298" y="1832878"/>
-                  </a:lnTo>
-                  <a:lnTo>
-                    <a:pt x="2291920" y="1868272"/>
-                  </a:lnTo>
-                  <a:lnTo>
-                    <a:pt x="2363543" y="1902625"/>
-                  </a:lnTo>
-                  <a:lnTo>
-                    <a:pt x="2435165" y="1935968"/>
-                  </a:lnTo>
-                  <a:lnTo>
-                    <a:pt x="2506788" y="1968330"/>
-                  </a:lnTo>
-                  <a:lnTo>
-                    <a:pt x="2578410" y="1999739"/>
-                  </a:lnTo>
-                  <a:lnTo>
-                    <a:pt x="2650033" y="2030225"/>
-                  </a:lnTo>
-                  <a:lnTo>
-                    <a:pt x="2721655" y="2059815"/>
-                  </a:lnTo>
-                  <a:lnTo>
-                    <a:pt x="2793278" y="2088534"/>
-                  </a:lnTo>
-                  <a:lnTo>
-                    <a:pt x="2864901" y="2116408"/>
-                  </a:lnTo>
-                  <a:lnTo>
-                    <a:pt x="2936523" y="2143462"/>
-                  </a:lnTo>
-                  <a:lnTo>
-                    <a:pt x="3008146" y="2169720"/>
-                  </a:lnTo>
-                  <a:lnTo>
-                    <a:pt x="3079768" y="2195206"/>
-                  </a:lnTo>
-                  <a:lnTo>
-                    <a:pt x="3151391" y="2219943"/>
-                  </a:lnTo>
-                  <a:lnTo>
-                    <a:pt x="3223013" y="2243951"/>
-                  </a:lnTo>
-                  <a:lnTo>
-                    <a:pt x="3294636" y="2267254"/>
-                  </a:lnTo>
-                  <a:lnTo>
-                    <a:pt x="3366258" y="2289871"/>
-                  </a:lnTo>
-                  <a:lnTo>
-                    <a:pt x="3437881" y="2311822"/>
-                  </a:lnTo>
-                  <a:lnTo>
-                    <a:pt x="3509503" y="2333128"/>
-                  </a:lnTo>
-                  <a:lnTo>
-                    <a:pt x="3581126" y="2353808"/>
-                  </a:lnTo>
-                  <a:lnTo>
-                    <a:pt x="3652748" y="2373879"/>
-                  </a:lnTo>
-                  <a:lnTo>
-                    <a:pt x="3724371" y="2393359"/>
-                  </a:lnTo>
-                  <a:lnTo>
-                    <a:pt x="3795993" y="2412267"/>
-                  </a:lnTo>
-                  <a:lnTo>
-                    <a:pt x="3867616" y="2430619"/>
-                  </a:lnTo>
-                  <a:lnTo>
-                    <a:pt x="3939238" y="2448430"/>
-                  </a:lnTo>
-                  <a:lnTo>
-                    <a:pt x="4010861" y="2465718"/>
-                  </a:lnTo>
-                  <a:lnTo>
-                    <a:pt x="4082483" y="2482497"/>
-                  </a:lnTo>
-                  <a:lnTo>
-                    <a:pt x="4154106" y="2498783"/>
-                  </a:lnTo>
-                  <a:lnTo>
-                    <a:pt x="4225729" y="2514589"/>
-                  </a:lnTo>
-                  <a:lnTo>
-                    <a:pt x="4297351" y="2529931"/>
-                  </a:lnTo>
-                  <a:lnTo>
-                    <a:pt x="4368974" y="2544821"/>
-                  </a:lnTo>
-                  <a:lnTo>
-                    <a:pt x="4440596" y="2559274"/>
-                  </a:lnTo>
-                  <a:lnTo>
-                    <a:pt x="4512219" y="2573301"/>
-                  </a:lnTo>
-                  <a:lnTo>
-                    <a:pt x="4583841" y="2586916"/>
-                  </a:lnTo>
-                  <a:lnTo>
-                    <a:pt x="4655464" y="2600130"/>
-                  </a:lnTo>
-                  <a:lnTo>
-                    <a:pt x="4727086" y="2612955"/>
-                  </a:lnTo>
-                  <a:lnTo>
-                    <a:pt x="4798709" y="2625403"/>
-                  </a:lnTo>
-                  <a:lnTo>
-                    <a:pt x="4870331" y="2637485"/>
-                  </a:lnTo>
-                  <a:lnTo>
-                    <a:pt x="4941954" y="2649212"/>
-                  </a:lnTo>
-                  <a:lnTo>
-                    <a:pt x="5013576" y="2660594"/>
-                  </a:lnTo>
-                  <a:lnTo>
-                    <a:pt x="5085199" y="2671641"/>
-                  </a:lnTo>
-                  <a:lnTo>
-                    <a:pt x="5156821" y="2682363"/>
-                  </a:lnTo>
-                  <a:lnTo>
-                    <a:pt x="5228444" y="2692769"/>
-                  </a:lnTo>
-                  <a:lnTo>
-                    <a:pt x="5300066" y="2702870"/>
-                  </a:lnTo>
-                  <a:lnTo>
-                    <a:pt x="5371689" y="2712673"/>
-                  </a:lnTo>
-                  <a:lnTo>
-                    <a:pt x="5443311" y="2722188"/>
-                  </a:lnTo>
-                  <a:lnTo>
-                    <a:pt x="5514934" y="2731423"/>
-                  </a:lnTo>
-                  <a:lnTo>
-                    <a:pt x="5586557" y="2740387"/>
-                  </a:lnTo>
-                  <a:lnTo>
-                    <a:pt x="5658179" y="2749086"/>
-                  </a:lnTo>
-                  <a:lnTo>
-                    <a:pt x="5729802" y="2757530"/>
-                  </a:lnTo>
-                  <a:lnTo>
-                    <a:pt x="5801424" y="2765726"/>
-                  </a:lnTo>
-                  <a:lnTo>
-                    <a:pt x="5873047" y="2773680"/>
-                  </a:lnTo>
-                  <a:lnTo>
-                    <a:pt x="5944669" y="2781401"/>
-                  </a:lnTo>
-                  <a:lnTo>
-                    <a:pt x="6016292" y="2788894"/>
-                  </a:lnTo>
-                  <a:lnTo>
-                    <a:pt x="6087914" y="2796167"/>
-                  </a:lnTo>
-                  <a:lnTo>
-                    <a:pt x="6159537" y="2803226"/>
-                  </a:lnTo>
-                  <a:lnTo>
-                    <a:pt x="6231159" y="2810077"/>
-                  </a:lnTo>
-                  <a:lnTo>
-                    <a:pt x="6302782" y="2816727"/>
-                  </a:lnTo>
-                  <a:lnTo>
-                    <a:pt x="6374404" y="2823181"/>
-                  </a:lnTo>
-                  <a:lnTo>
-                    <a:pt x="6446027" y="2829446"/>
-                  </a:lnTo>
-                  <a:lnTo>
-                    <a:pt x="6517649" y="2835526"/>
-                  </a:lnTo>
-                  <a:lnTo>
-                    <a:pt x="6589272" y="2841427"/>
-                  </a:lnTo>
-                  <a:lnTo>
-                    <a:pt x="6660894" y="2847155"/>
-                  </a:lnTo>
-                  <a:lnTo>
-                    <a:pt x="6732517" y="2852714"/>
-                  </a:lnTo>
-                  <a:lnTo>
-                    <a:pt x="6804139" y="2858110"/>
-                  </a:lnTo>
-                  <a:lnTo>
-                    <a:pt x="6875762" y="2863347"/>
-                  </a:lnTo>
-                  <a:lnTo>
-                    <a:pt x="6947385" y="2868430"/>
-                  </a:lnTo>
-                  <a:lnTo>
-                    <a:pt x="7019007" y="2873363"/>
-                  </a:lnTo>
-                  <a:lnTo>
-                    <a:pt x="7090630" y="2878151"/>
+                    <a:pt x="70344" y="32229"/>
+                  </a:lnTo>
+                  <a:lnTo>
+                    <a:pt x="140688" y="63510"/>
+                  </a:lnTo>
+                  <a:lnTo>
+                    <a:pt x="211033" y="93871"/>
+                  </a:lnTo>
+                  <a:lnTo>
+                    <a:pt x="281377" y="123339"/>
+                  </a:lnTo>
+                  <a:lnTo>
+                    <a:pt x="351722" y="151941"/>
+                  </a:lnTo>
+                  <a:lnTo>
+                    <a:pt x="422066" y="179701"/>
+                  </a:lnTo>
+                  <a:lnTo>
+                    <a:pt x="492411" y="206644"/>
+                  </a:lnTo>
+                  <a:lnTo>
+                    <a:pt x="562755" y="232795"/>
+                  </a:lnTo>
+                  <a:lnTo>
+                    <a:pt x="633100" y="258177"/>
+                  </a:lnTo>
+                  <a:lnTo>
+                    <a:pt x="703444" y="282812"/>
+                  </a:lnTo>
+                  <a:lnTo>
+                    <a:pt x="773789" y="306722"/>
+                  </a:lnTo>
+                  <a:lnTo>
+                    <a:pt x="844133" y="329929"/>
+                  </a:lnTo>
+                  <a:lnTo>
+                    <a:pt x="914478" y="352453"/>
+                  </a:lnTo>
+                  <a:lnTo>
+                    <a:pt x="984822" y="374315"/>
+                  </a:lnTo>
+                  <a:lnTo>
+                    <a:pt x="1055167" y="395534"/>
+                  </a:lnTo>
+                  <a:lnTo>
+                    <a:pt x="1125511" y="416129"/>
+                  </a:lnTo>
+                  <a:lnTo>
+                    <a:pt x="1195856" y="436118"/>
+                  </a:lnTo>
+                  <a:lnTo>
+                    <a:pt x="1266200" y="455519"/>
+                  </a:lnTo>
+                  <a:lnTo>
+                    <a:pt x="1336545" y="474349"/>
+                  </a:lnTo>
+                  <a:lnTo>
+                    <a:pt x="1406889" y="492625"/>
+                  </a:lnTo>
+                  <a:lnTo>
+                    <a:pt x="1477234" y="510364"/>
+                  </a:lnTo>
+                  <a:lnTo>
+                    <a:pt x="1547578" y="527581"/>
+                  </a:lnTo>
+                  <a:lnTo>
+                    <a:pt x="1617923" y="544291"/>
+                  </a:lnTo>
+                  <a:lnTo>
+                    <a:pt x="1688267" y="560510"/>
+                  </a:lnTo>
+                  <a:lnTo>
+                    <a:pt x="1758612" y="576252"/>
+                  </a:lnTo>
+                  <a:lnTo>
+                    <a:pt x="1828956" y="591531"/>
+                  </a:lnTo>
+                  <a:lnTo>
+                    <a:pt x="1899301" y="606360"/>
+                  </a:lnTo>
+                  <a:lnTo>
+                    <a:pt x="1969645" y="620753"/>
+                  </a:lnTo>
+                  <a:lnTo>
+                    <a:pt x="2039990" y="634723"/>
+                  </a:lnTo>
+                  <a:lnTo>
+                    <a:pt x="2110334" y="648282"/>
+                  </a:lnTo>
+                  <a:lnTo>
+                    <a:pt x="2180679" y="661442"/>
+                  </a:lnTo>
+                  <a:lnTo>
+                    <a:pt x="2251023" y="674215"/>
+                  </a:lnTo>
+                  <a:lnTo>
+                    <a:pt x="2321368" y="686612"/>
+                  </a:lnTo>
+                  <a:lnTo>
+                    <a:pt x="2391712" y="698645"/>
+                  </a:lnTo>
+                  <a:lnTo>
+                    <a:pt x="2462057" y="710324"/>
+                  </a:lnTo>
+                  <a:lnTo>
+                    <a:pt x="2532401" y="721659"/>
+                  </a:lnTo>
+                  <a:lnTo>
+                    <a:pt x="2602746" y="732660"/>
+                  </a:lnTo>
+                  <a:lnTo>
+                    <a:pt x="2673090" y="743338"/>
+                  </a:lnTo>
+                  <a:lnTo>
+                    <a:pt x="2743435" y="753702"/>
+                  </a:lnTo>
+                  <a:lnTo>
+                    <a:pt x="2813779" y="763761"/>
+                  </a:lnTo>
+                  <a:lnTo>
+                    <a:pt x="2884124" y="773525"/>
+                  </a:lnTo>
+                  <a:lnTo>
+                    <a:pt x="2954468" y="783001"/>
+                  </a:lnTo>
+                  <a:lnTo>
+                    <a:pt x="3024813" y="792198"/>
+                  </a:lnTo>
+                  <a:lnTo>
+                    <a:pt x="3095157" y="801125"/>
+                  </a:lnTo>
+                  <a:lnTo>
+                    <a:pt x="3165502" y="809789"/>
+                  </a:lnTo>
+                  <a:lnTo>
+                    <a:pt x="3235846" y="818198"/>
+                  </a:lnTo>
+                  <a:lnTo>
+                    <a:pt x="3306191" y="826360"/>
+                  </a:lnTo>
+                  <a:lnTo>
+                    <a:pt x="3376535" y="834282"/>
+                  </a:lnTo>
+                  <a:lnTo>
+                    <a:pt x="3446880" y="841971"/>
+                  </a:lnTo>
+                  <a:lnTo>
+                    <a:pt x="3517224" y="849434"/>
+                  </a:lnTo>
+                  <a:lnTo>
+                    <a:pt x="3587569" y="856677"/>
+                  </a:lnTo>
+                  <a:lnTo>
+                    <a:pt x="3657913" y="863707"/>
+                  </a:lnTo>
+                  <a:lnTo>
+                    <a:pt x="3728257" y="870530"/>
+                  </a:lnTo>
+                  <a:lnTo>
+                    <a:pt x="3798602" y="877153"/>
+                  </a:lnTo>
+                  <a:lnTo>
+                    <a:pt x="3868946" y="883581"/>
+                  </a:lnTo>
+                  <a:lnTo>
+                    <a:pt x="3939291" y="889819"/>
+                  </a:lnTo>
+                  <a:lnTo>
+                    <a:pt x="4009635" y="895874"/>
+                  </a:lnTo>
+                  <a:lnTo>
+                    <a:pt x="4079980" y="901752"/>
+                  </a:lnTo>
+                  <a:lnTo>
+                    <a:pt x="4150324" y="907456"/>
+                  </a:lnTo>
+                  <a:lnTo>
+                    <a:pt x="4220669" y="912992"/>
+                  </a:lnTo>
+                  <a:lnTo>
+                    <a:pt x="4291013" y="918366"/>
+                  </a:lnTo>
+                  <a:lnTo>
+                    <a:pt x="4361358" y="923581"/>
+                  </a:lnTo>
+                  <a:lnTo>
+                    <a:pt x="4431702" y="928643"/>
+                  </a:lnTo>
+                  <a:lnTo>
+                    <a:pt x="4502047" y="933557"/>
+                  </a:lnTo>
+                  <a:lnTo>
+                    <a:pt x="4572391" y="938325"/>
+                  </a:lnTo>
+                  <a:lnTo>
+                    <a:pt x="4642736" y="942954"/>
+                  </a:lnTo>
+                  <a:lnTo>
+                    <a:pt x="4713080" y="947446"/>
+                  </a:lnTo>
+                  <a:lnTo>
+                    <a:pt x="4783425" y="951806"/>
+                  </a:lnTo>
+                  <a:lnTo>
+                    <a:pt x="4853769" y="956038"/>
+                  </a:lnTo>
+                  <a:lnTo>
+                    <a:pt x="4924114" y="960145"/>
+                  </a:lnTo>
+                  <a:lnTo>
+                    <a:pt x="4994458" y="964132"/>
+                  </a:lnTo>
+                  <a:lnTo>
+                    <a:pt x="5064803" y="968001"/>
+                  </a:lnTo>
+                  <a:lnTo>
+                    <a:pt x="5135147" y="971757"/>
+                  </a:lnTo>
+                  <a:lnTo>
+                    <a:pt x="5205492" y="975402"/>
+                  </a:lnTo>
+                  <a:lnTo>
+                    <a:pt x="5275836" y="978940"/>
+                  </a:lnTo>
+                  <a:lnTo>
+                    <a:pt x="5346181" y="982373"/>
+                  </a:lnTo>
+                  <a:lnTo>
+                    <a:pt x="5416525" y="985706"/>
+                  </a:lnTo>
+                  <a:lnTo>
+                    <a:pt x="5486870" y="988941"/>
+                  </a:lnTo>
+                  <a:lnTo>
+                    <a:pt x="5557214" y="992080"/>
+                  </a:lnTo>
+                  <a:lnTo>
+                    <a:pt x="5627559" y="995127"/>
+                  </a:lnTo>
+                  <a:lnTo>
+                    <a:pt x="5697903" y="998085"/>
+                  </a:lnTo>
+                  <a:lnTo>
+                    <a:pt x="5768248" y="1000956"/>
+                  </a:lnTo>
+                  <a:lnTo>
+                    <a:pt x="5838592" y="1003742"/>
+                  </a:lnTo>
+                  <a:lnTo>
+                    <a:pt x="5908937" y="1006446"/>
+                  </a:lnTo>
+                  <a:lnTo>
+                    <a:pt x="5979281" y="1009071"/>
+                  </a:lnTo>
+                  <a:lnTo>
+                    <a:pt x="6049626" y="1011618"/>
+                  </a:lnTo>
+                  <a:lnTo>
+                    <a:pt x="6119970" y="1014090"/>
+                  </a:lnTo>
+                  <a:lnTo>
+                    <a:pt x="6190315" y="1016490"/>
+                  </a:lnTo>
+                  <a:lnTo>
+                    <a:pt x="6260659" y="1018819"/>
+                  </a:lnTo>
+                  <a:lnTo>
+                    <a:pt x="6331004" y="1021080"/>
+                  </a:lnTo>
+                  <a:lnTo>
+                    <a:pt x="6401348" y="1023274"/>
+                  </a:lnTo>
+                  <a:lnTo>
+                    <a:pt x="6471693" y="1025404"/>
+                  </a:lnTo>
+                  <a:lnTo>
+                    <a:pt x="6542037" y="1027471"/>
+                  </a:lnTo>
+                  <a:lnTo>
+                    <a:pt x="6612382" y="1029477"/>
+                  </a:lnTo>
+                  <a:lnTo>
+                    <a:pt x="6682726" y="1031424"/>
+                  </a:lnTo>
+                  <a:lnTo>
+                    <a:pt x="6753071" y="1033314"/>
+                  </a:lnTo>
+                  <a:lnTo>
+                    <a:pt x="6823415" y="1035148"/>
+                  </a:lnTo>
+                  <a:lnTo>
+                    <a:pt x="6893760" y="1036929"/>
+                  </a:lnTo>
+                  <a:lnTo>
+                    <a:pt x="6964104" y="1038657"/>
                   </a:lnTo>
                 </a:path>
               </a:pathLst>
@@ -4576,27 +4611,27 @@
         </p:sp>
         <p:sp>
           <p:nvSpPr>
-            <p:cNvPr id="26" name="pl26"/>
+            <p:cNvPr id="27" name="pl27"/>
             <p:cNvSpPr/>
             <p:nvPr/>
           </p:nvSpPr>
           <p:spPr>
             <a:xfrm>
-              <a:off x="817517" y="4727786"/>
-              <a:ext cx="7799693" cy="0"/>
+              <a:off x="887106" y="3100960"/>
+              <a:ext cx="7660515" cy="0"/>
             </a:xfrm>
             <a:custGeom>
               <a:avLst/>
               <a:pathLst>
-                <a:path w="7799693" h="0">
+                <a:path w="7660515" h="0">
                   <a:moveTo>
                     <a:pt x="0" y="0"/>
                   </a:moveTo>
                   <a:lnTo>
-                    <a:pt x="7799693" y="0"/>
-                  </a:lnTo>
-                  <a:lnTo>
-                    <a:pt x="7799693" y="0"/>
+                    <a:pt x="7660515" y="0"/>
+                  </a:lnTo>
+                  <a:lnTo>
+                    <a:pt x="7660515" y="0"/>
                   </a:lnTo>
                 </a:path>
               </a:pathLst>
@@ -4619,21 +4654,21 @@
         </p:sp>
         <p:sp>
           <p:nvSpPr>
-            <p:cNvPr id="27" name="pl27"/>
+            <p:cNvPr id="28" name="pl28"/>
             <p:cNvSpPr/>
             <p:nvPr/>
           </p:nvSpPr>
           <p:spPr>
             <a:xfrm>
-              <a:off x="4284781" y="2073503"/>
-              <a:ext cx="0" cy="3649639"/>
+              <a:off x="4292500" y="2143092"/>
+              <a:ext cx="0" cy="1317069"/>
             </a:xfrm>
             <a:custGeom>
               <a:avLst/>
               <a:pathLst>
-                <a:path w="0" h="3649639">
+                <a:path w="0" h="1317069">
                   <a:moveTo>
-                    <a:pt x="0" y="3649639"/>
+                    <a:pt x="0" y="1317069"/>
                   </a:moveTo>
                   <a:lnTo>
                     <a:pt x="0" y="0"/>
@@ -4662,21 +4697,21 @@
         </p:sp>
         <p:sp>
           <p:nvSpPr>
-            <p:cNvPr id="28" name="pl28"/>
+            <p:cNvPr id="29" name="pl29"/>
             <p:cNvSpPr/>
             <p:nvPr/>
           </p:nvSpPr>
           <p:spPr>
             <a:xfrm>
-              <a:off x="3095906" y="2073503"/>
-              <a:ext cx="0" cy="3649639"/>
+              <a:off x="3124839" y="2143092"/>
+              <a:ext cx="0" cy="1317069"/>
             </a:xfrm>
             <a:custGeom>
               <a:avLst/>
               <a:pathLst>
-                <a:path w="0" h="3649639">
+                <a:path w="0" h="1317069">
                   <a:moveTo>
-                    <a:pt x="0" y="3649639"/>
+                    <a:pt x="0" y="1317069"/>
                   </a:moveTo>
                   <a:lnTo>
                     <a:pt x="0" y="0"/>
@@ -4705,21 +4740,21 @@
         </p:sp>
         <p:sp>
           <p:nvSpPr>
-            <p:cNvPr id="29" name="pl29"/>
+            <p:cNvPr id="30" name="pl30"/>
             <p:cNvSpPr/>
             <p:nvPr/>
           </p:nvSpPr>
           <p:spPr>
             <a:xfrm>
-              <a:off x="5522967" y="2073503"/>
-              <a:ext cx="0" cy="3649639"/>
+              <a:off x="5508592" y="2143092"/>
+              <a:ext cx="0" cy="1317069"/>
             </a:xfrm>
             <a:custGeom>
               <a:avLst/>
               <a:pathLst>
-                <a:path w="0" h="3649639">
+                <a:path w="0" h="1317069">
                   <a:moveTo>
-                    <a:pt x="0" y="3649639"/>
+                    <a:pt x="0" y="1317069"/>
                   </a:moveTo>
                   <a:lnTo>
                     <a:pt x="0" y="0"/>
@@ -4748,13 +4783,13 @@
         </p:sp>
         <p:sp>
           <p:nvSpPr>
-            <p:cNvPr id="30" name="tx30"/>
+            <p:cNvPr id="31" name="tx31"/>
             <p:cNvSpPr/>
             <p:nvPr/>
           </p:nvSpPr>
           <p:spPr>
             <a:xfrm>
-              <a:off x="692708" y="5517199"/>
+              <a:off x="762297" y="3360243"/>
               <a:ext cx="62179" cy="80101"/>
             </a:xfrm>
             <a:prstGeom prst="rect">
@@ -4794,13 +4829,13 @@
         </p:sp>
         <p:sp>
           <p:nvSpPr>
-            <p:cNvPr id="31" name="tx31"/>
+            <p:cNvPr id="32" name="tx32"/>
             <p:cNvSpPr/>
             <p:nvPr/>
           </p:nvSpPr>
           <p:spPr>
             <a:xfrm>
-              <a:off x="692708" y="4687735"/>
+              <a:off x="762297" y="3060909"/>
               <a:ext cx="62179" cy="80101"/>
             </a:xfrm>
             <a:prstGeom prst="rect">
@@ -4840,13 +4875,13 @@
         </p:sp>
         <p:sp>
           <p:nvSpPr>
-            <p:cNvPr id="32" name="tx32"/>
+            <p:cNvPr id="33" name="tx33"/>
             <p:cNvSpPr/>
             <p:nvPr/>
           </p:nvSpPr>
           <p:spPr>
             <a:xfrm>
-              <a:off x="692708" y="3858272"/>
+              <a:off x="762297" y="2761575"/>
               <a:ext cx="62179" cy="80101"/>
             </a:xfrm>
             <a:prstGeom prst="rect">
@@ -4886,13 +4921,13 @@
         </p:sp>
         <p:sp>
           <p:nvSpPr>
-            <p:cNvPr id="33" name="tx33"/>
+            <p:cNvPr id="34" name="tx34"/>
             <p:cNvSpPr/>
             <p:nvPr/>
           </p:nvSpPr>
           <p:spPr>
             <a:xfrm>
-              <a:off x="692708" y="3028808"/>
+              <a:off x="762297" y="2462242"/>
               <a:ext cx="62179" cy="80101"/>
             </a:xfrm>
             <a:prstGeom prst="rect">
@@ -4932,13 +4967,13 @@
         </p:sp>
         <p:sp>
           <p:nvSpPr>
-            <p:cNvPr id="34" name="tx34"/>
+            <p:cNvPr id="35" name="tx35"/>
             <p:cNvSpPr/>
             <p:nvPr/>
           </p:nvSpPr>
           <p:spPr>
             <a:xfrm>
-              <a:off x="692708" y="2199345"/>
+              <a:off x="762297" y="2162908"/>
               <a:ext cx="62179" cy="80101"/>
             </a:xfrm>
             <a:prstGeom prst="rect">
@@ -4978,13 +5013,13 @@
         </p:sp>
         <p:sp>
           <p:nvSpPr>
-            <p:cNvPr id="35" name="tx35"/>
+            <p:cNvPr id="36" name="tx36"/>
             <p:cNvSpPr/>
             <p:nvPr/>
           </p:nvSpPr>
           <p:spPr>
             <a:xfrm>
-              <a:off x="2152181" y="5785772"/>
+              <a:off x="2196512" y="3522791"/>
               <a:ext cx="161574" cy="80101"/>
             </a:xfrm>
             <a:prstGeom prst="rect">
@@ -5024,13 +5059,13 @@
         </p:sp>
         <p:sp>
           <p:nvSpPr>
-            <p:cNvPr id="36" name="tx36"/>
+            <p:cNvPr id="37" name="tx37"/>
             <p:cNvSpPr/>
             <p:nvPr/>
           </p:nvSpPr>
           <p:spPr>
             <a:xfrm>
-              <a:off x="3884104" y="5785772"/>
+              <a:off x="3897531" y="3522791"/>
               <a:ext cx="161574" cy="80101"/>
             </a:xfrm>
             <a:prstGeom prst="rect">
@@ -5070,13 +5105,13 @@
         </p:sp>
         <p:sp>
           <p:nvSpPr>
-            <p:cNvPr id="37" name="tx37"/>
+            <p:cNvPr id="38" name="tx38"/>
             <p:cNvSpPr/>
             <p:nvPr/>
           </p:nvSpPr>
           <p:spPr>
             <a:xfrm>
-              <a:off x="5665725" y="5785772"/>
+              <a:off x="5648248" y="3522791"/>
               <a:ext cx="62179" cy="80101"/>
             </a:xfrm>
             <a:prstGeom prst="rect">
@@ -5116,13 +5151,13 @@
         </p:sp>
         <p:sp>
           <p:nvSpPr>
-            <p:cNvPr id="38" name="tx38"/>
+            <p:cNvPr id="39" name="tx39"/>
             <p:cNvSpPr/>
             <p:nvPr/>
           </p:nvSpPr>
           <p:spPr>
             <a:xfrm>
-              <a:off x="7366559" y="5785772"/>
+              <a:off x="7318177" y="3522791"/>
               <a:ext cx="124358" cy="80101"/>
             </a:xfrm>
             <a:prstGeom prst="rect">
@@ -5162,13 +5197,13 @@
         </p:sp>
         <p:sp>
           <p:nvSpPr>
-            <p:cNvPr id="39" name="tx39"/>
+            <p:cNvPr id="40" name="tx40"/>
             <p:cNvSpPr/>
             <p:nvPr/>
           </p:nvSpPr>
           <p:spPr>
             <a:xfrm>
-              <a:off x="1561815" y="5925448"/>
+              <a:off x="1561815" y="3662467"/>
               <a:ext cx="6311097" cy="100218"/>
             </a:xfrm>
             <a:prstGeom prst="rect">
@@ -5208,13 +5243,13 @@
         </p:sp>
         <p:sp>
           <p:nvSpPr>
-            <p:cNvPr id="40" name="tx40"/>
+            <p:cNvPr id="41" name="tx41"/>
             <p:cNvSpPr/>
             <p:nvPr/>
           </p:nvSpPr>
           <p:spPr>
             <a:xfrm rot="-5400000">
-              <a:off x="68446" y="3848213"/>
+              <a:off x="138035" y="2751517"/>
               <a:ext cx="1016904" cy="100218"/>
             </a:xfrm>
             <a:prstGeom prst="rect">
@@ -5254,13 +5289,13 @@
         </p:sp>
         <p:sp>
           <p:nvSpPr>
-            <p:cNvPr id="41" name="tx41"/>
+            <p:cNvPr id="42" name="tx42"/>
             <p:cNvSpPr/>
             <p:nvPr/>
           </p:nvSpPr>
           <p:spPr>
             <a:xfrm>
-              <a:off x="817517" y="1896563"/>
+              <a:off x="887106" y="1966152"/>
               <a:ext cx="6959864" cy="82021"/>
             </a:xfrm>
             <a:prstGeom prst="rect">
@@ -5300,13 +5335,3711 @@
         </p:sp>
         <p:sp>
           <p:nvSpPr>
-            <p:cNvPr id="42" name="tx42"/>
+            <p:cNvPr id="43" name="tx43"/>
             <p:cNvSpPr/>
             <p:nvPr/>
           </p:nvSpPr>
           <p:spPr>
             <a:xfrm>
-              <a:off x="817517" y="1669789"/>
+              <a:off x="887106" y="1739378"/>
+              <a:ext cx="3901470" cy="120152"/>
+            </a:xfrm>
+            <a:prstGeom prst="rect">
+              <a:avLst/>
+            </a:prstGeom>
+            <a:noFill/>
+          </p:spPr>
+          <p:txBody>
+            <a:bodyPr lIns="0" rIns="0" tIns="0" bIns="0" anchorCtr="1" anchor="ctr" wrap="none"/>
+            <a:lstStyle/>
+            <a:p>
+              <a:pPr algn="l" marL="0" marR="0" indent="0">
+                <a:lnSpc>
+                  <a:spcPts val="1320"/>
+                </a:lnSpc>
+                <a:spcBef>
+                  <a:spcPts val="0"/>
+                </a:spcBef>
+                <a:spcAft>
+                  <a:spcPts val="0"/>
+                </a:spcAft>
+              </a:pPr>
+              <a:r>
+                <a:rPr sz="1320">
+                  <a:solidFill>
+                    <a:srgbClr val="000000">
+                      <a:alpha val="100000"/>
+                    </a:srgbClr>
+                  </a:solidFill>
+                  <a:latin typeface="Helvetica"/>
+                  <a:cs typeface="Helvetica"/>
+                </a:rPr>
+                <a:t>Thrombocytopenia Grade 3 (Sensitivity, Carboplatin)</a:t>
+              </a:r>
+            </a:p>
+          </p:txBody>
+        </p:sp>
+        <p:sp>
+          <p:nvSpPr>
+            <p:cNvPr id="44" name="pl44"/>
+            <p:cNvSpPr/>
+            <p:nvPr/>
+          </p:nvSpPr>
+          <p:spPr>
+            <a:xfrm>
+              <a:off x="887106" y="5444019"/>
+              <a:ext cx="7660515" cy="0"/>
+            </a:xfrm>
+            <a:custGeom>
+              <a:avLst/>
+              <a:pathLst>
+                <a:path w="7660515" h="0">
+                  <a:moveTo>
+                    <a:pt x="0" y="0"/>
+                  </a:moveTo>
+                  <a:lnTo>
+                    <a:pt x="7660515" y="0"/>
+                  </a:lnTo>
+                  <a:lnTo>
+                    <a:pt x="7660515" y="0"/>
+                  </a:lnTo>
+                </a:path>
+              </a:pathLst>
+            </a:custGeom>
+            <a:ln w="6775" cap="flat">
+              <a:solidFill>
+                <a:srgbClr val="EBEBEB">
+                  <a:alpha val="100000"/>
+                </a:srgbClr>
+              </a:solidFill>
+              <a:prstDash val="solid"/>
+              <a:round/>
+            </a:ln>
+          </p:spPr>
+          <p:txBody>
+            <a:bodyPr/>
+            <a:lstStyle/>
+            <a:p/>
+          </p:txBody>
+        </p:sp>
+        <p:sp>
+          <p:nvSpPr>
+            <p:cNvPr id="45" name="pl45"/>
+            <p:cNvSpPr/>
+            <p:nvPr/>
+          </p:nvSpPr>
+          <p:spPr>
+            <a:xfrm>
+              <a:off x="887106" y="5144686"/>
+              <a:ext cx="7660515" cy="0"/>
+            </a:xfrm>
+            <a:custGeom>
+              <a:avLst/>
+              <a:pathLst>
+                <a:path w="7660515" h="0">
+                  <a:moveTo>
+                    <a:pt x="0" y="0"/>
+                  </a:moveTo>
+                  <a:lnTo>
+                    <a:pt x="7660515" y="0"/>
+                  </a:lnTo>
+                  <a:lnTo>
+                    <a:pt x="7660515" y="0"/>
+                  </a:lnTo>
+                </a:path>
+              </a:pathLst>
+            </a:custGeom>
+            <a:ln w="6775" cap="flat">
+              <a:solidFill>
+                <a:srgbClr val="EBEBEB">
+                  <a:alpha val="100000"/>
+                </a:srgbClr>
+              </a:solidFill>
+              <a:prstDash val="solid"/>
+              <a:round/>
+            </a:ln>
+          </p:spPr>
+          <p:txBody>
+            <a:bodyPr/>
+            <a:lstStyle/>
+            <a:p/>
+          </p:txBody>
+        </p:sp>
+        <p:sp>
+          <p:nvSpPr>
+            <p:cNvPr id="46" name="pl46"/>
+            <p:cNvSpPr/>
+            <p:nvPr/>
+          </p:nvSpPr>
+          <p:spPr>
+            <a:xfrm>
+              <a:off x="887106" y="4845352"/>
+              <a:ext cx="7660515" cy="0"/>
+            </a:xfrm>
+            <a:custGeom>
+              <a:avLst/>
+              <a:pathLst>
+                <a:path w="7660515" h="0">
+                  <a:moveTo>
+                    <a:pt x="0" y="0"/>
+                  </a:moveTo>
+                  <a:lnTo>
+                    <a:pt x="7660515" y="0"/>
+                  </a:lnTo>
+                  <a:lnTo>
+                    <a:pt x="7660515" y="0"/>
+                  </a:lnTo>
+                </a:path>
+              </a:pathLst>
+            </a:custGeom>
+            <a:ln w="6775" cap="flat">
+              <a:solidFill>
+                <a:srgbClr val="EBEBEB">
+                  <a:alpha val="100000"/>
+                </a:srgbClr>
+              </a:solidFill>
+              <a:prstDash val="solid"/>
+              <a:round/>
+            </a:ln>
+          </p:spPr>
+          <p:txBody>
+            <a:bodyPr/>
+            <a:lstStyle/>
+            <a:p/>
+          </p:txBody>
+        </p:sp>
+        <p:sp>
+          <p:nvSpPr>
+            <p:cNvPr id="47" name="pl47"/>
+            <p:cNvSpPr/>
+            <p:nvPr/>
+          </p:nvSpPr>
+          <p:spPr>
+            <a:xfrm>
+              <a:off x="887106" y="4546018"/>
+              <a:ext cx="7660515" cy="0"/>
+            </a:xfrm>
+            <a:custGeom>
+              <a:avLst/>
+              <a:pathLst>
+                <a:path w="7660515" h="0">
+                  <a:moveTo>
+                    <a:pt x="0" y="0"/>
+                  </a:moveTo>
+                  <a:lnTo>
+                    <a:pt x="7660515" y="0"/>
+                  </a:lnTo>
+                  <a:lnTo>
+                    <a:pt x="7660515" y="0"/>
+                  </a:lnTo>
+                </a:path>
+              </a:pathLst>
+            </a:custGeom>
+            <a:ln w="6775" cap="flat">
+              <a:solidFill>
+                <a:srgbClr val="EBEBEB">
+                  <a:alpha val="100000"/>
+                </a:srgbClr>
+              </a:solidFill>
+              <a:prstDash val="solid"/>
+              <a:round/>
+            </a:ln>
+          </p:spPr>
+          <p:txBody>
+            <a:bodyPr/>
+            <a:lstStyle/>
+            <a:p/>
+          </p:txBody>
+        </p:sp>
+        <p:sp>
+          <p:nvSpPr>
+            <p:cNvPr id="48" name="pl48"/>
+            <p:cNvSpPr/>
+            <p:nvPr/>
+          </p:nvSpPr>
+          <p:spPr>
+            <a:xfrm>
+              <a:off x="1001535" y="4336484"/>
+              <a:ext cx="0" cy="1317069"/>
+            </a:xfrm>
+            <a:custGeom>
+              <a:avLst/>
+              <a:pathLst>
+                <a:path w="0" h="1317069">
+                  <a:moveTo>
+                    <a:pt x="0" y="1317069"/>
+                  </a:moveTo>
+                  <a:lnTo>
+                    <a:pt x="0" y="0"/>
+                  </a:lnTo>
+                  <a:lnTo>
+                    <a:pt x="0" y="0"/>
+                  </a:lnTo>
+                </a:path>
+              </a:pathLst>
+            </a:custGeom>
+            <a:ln w="6775" cap="flat">
+              <a:solidFill>
+                <a:srgbClr val="EBEBEB">
+                  <a:alpha val="100000"/>
+                </a:srgbClr>
+              </a:solidFill>
+              <a:prstDash val="solid"/>
+              <a:round/>
+            </a:ln>
+          </p:spPr>
+          <p:txBody>
+            <a:bodyPr/>
+            <a:lstStyle/>
+            <a:p/>
+          </p:txBody>
+        </p:sp>
+        <p:sp>
+          <p:nvSpPr>
+            <p:cNvPr id="49" name="pl49"/>
+            <p:cNvSpPr/>
+            <p:nvPr/>
+          </p:nvSpPr>
+          <p:spPr>
+            <a:xfrm>
+              <a:off x="1852045" y="4336484"/>
+              <a:ext cx="0" cy="1317069"/>
+            </a:xfrm>
+            <a:custGeom>
+              <a:avLst/>
+              <a:pathLst>
+                <a:path w="0" h="1317069">
+                  <a:moveTo>
+                    <a:pt x="0" y="1317069"/>
+                  </a:moveTo>
+                  <a:lnTo>
+                    <a:pt x="0" y="0"/>
+                  </a:lnTo>
+                  <a:lnTo>
+                    <a:pt x="0" y="0"/>
+                  </a:lnTo>
+                </a:path>
+              </a:pathLst>
+            </a:custGeom>
+            <a:ln w="6775" cap="flat">
+              <a:solidFill>
+                <a:srgbClr val="EBEBEB">
+                  <a:alpha val="100000"/>
+                </a:srgbClr>
+              </a:solidFill>
+              <a:prstDash val="solid"/>
+              <a:round/>
+            </a:ln>
+          </p:spPr>
+          <p:txBody>
+            <a:bodyPr/>
+            <a:lstStyle/>
+            <a:p/>
+          </p:txBody>
+        </p:sp>
+        <p:sp>
+          <p:nvSpPr>
+            <p:cNvPr id="50" name="pl50"/>
+            <p:cNvSpPr/>
+            <p:nvPr/>
+          </p:nvSpPr>
+          <p:spPr>
+            <a:xfrm>
+              <a:off x="2702554" y="4336484"/>
+              <a:ext cx="0" cy="1317069"/>
+            </a:xfrm>
+            <a:custGeom>
+              <a:avLst/>
+              <a:pathLst>
+                <a:path w="0" h="1317069">
+                  <a:moveTo>
+                    <a:pt x="0" y="1317069"/>
+                  </a:moveTo>
+                  <a:lnTo>
+                    <a:pt x="0" y="0"/>
+                  </a:lnTo>
+                  <a:lnTo>
+                    <a:pt x="0" y="0"/>
+                  </a:lnTo>
+                </a:path>
+              </a:pathLst>
+            </a:custGeom>
+            <a:ln w="6775" cap="flat">
+              <a:solidFill>
+                <a:srgbClr val="EBEBEB">
+                  <a:alpha val="100000"/>
+                </a:srgbClr>
+              </a:solidFill>
+              <a:prstDash val="solid"/>
+              <a:round/>
+            </a:ln>
+          </p:spPr>
+          <p:txBody>
+            <a:bodyPr/>
+            <a:lstStyle/>
+            <a:p/>
+          </p:txBody>
+        </p:sp>
+        <p:sp>
+          <p:nvSpPr>
+            <p:cNvPr id="51" name="pl51"/>
+            <p:cNvSpPr/>
+            <p:nvPr/>
+          </p:nvSpPr>
+          <p:spPr>
+            <a:xfrm>
+              <a:off x="3553064" y="4336484"/>
+              <a:ext cx="0" cy="1317069"/>
+            </a:xfrm>
+            <a:custGeom>
+              <a:avLst/>
+              <a:pathLst>
+                <a:path w="0" h="1317069">
+                  <a:moveTo>
+                    <a:pt x="0" y="1317069"/>
+                  </a:moveTo>
+                  <a:lnTo>
+                    <a:pt x="0" y="0"/>
+                  </a:lnTo>
+                  <a:lnTo>
+                    <a:pt x="0" y="0"/>
+                  </a:lnTo>
+                </a:path>
+              </a:pathLst>
+            </a:custGeom>
+            <a:ln w="6775" cap="flat">
+              <a:solidFill>
+                <a:srgbClr val="EBEBEB">
+                  <a:alpha val="100000"/>
+                </a:srgbClr>
+              </a:solidFill>
+              <a:prstDash val="solid"/>
+              <a:round/>
+            </a:ln>
+          </p:spPr>
+          <p:txBody>
+            <a:bodyPr/>
+            <a:lstStyle/>
+            <a:p/>
+          </p:txBody>
+        </p:sp>
+        <p:sp>
+          <p:nvSpPr>
+            <p:cNvPr id="52" name="pl52"/>
+            <p:cNvSpPr/>
+            <p:nvPr/>
+          </p:nvSpPr>
+          <p:spPr>
+            <a:xfrm>
+              <a:off x="4403573" y="4336484"/>
+              <a:ext cx="0" cy="1317069"/>
+            </a:xfrm>
+            <a:custGeom>
+              <a:avLst/>
+              <a:pathLst>
+                <a:path w="0" h="1317069">
+                  <a:moveTo>
+                    <a:pt x="0" y="1317069"/>
+                  </a:moveTo>
+                  <a:lnTo>
+                    <a:pt x="0" y="0"/>
+                  </a:lnTo>
+                  <a:lnTo>
+                    <a:pt x="0" y="0"/>
+                  </a:lnTo>
+                </a:path>
+              </a:pathLst>
+            </a:custGeom>
+            <a:ln w="6775" cap="flat">
+              <a:solidFill>
+                <a:srgbClr val="EBEBEB">
+                  <a:alpha val="100000"/>
+                </a:srgbClr>
+              </a:solidFill>
+              <a:prstDash val="solid"/>
+              <a:round/>
+            </a:ln>
+          </p:spPr>
+          <p:txBody>
+            <a:bodyPr/>
+            <a:lstStyle/>
+            <a:p/>
+          </p:txBody>
+        </p:sp>
+        <p:sp>
+          <p:nvSpPr>
+            <p:cNvPr id="53" name="pl53"/>
+            <p:cNvSpPr/>
+            <p:nvPr/>
+          </p:nvSpPr>
+          <p:spPr>
+            <a:xfrm>
+              <a:off x="5254082" y="4336484"/>
+              <a:ext cx="0" cy="1317069"/>
+            </a:xfrm>
+            <a:custGeom>
+              <a:avLst/>
+              <a:pathLst>
+                <a:path w="0" h="1317069">
+                  <a:moveTo>
+                    <a:pt x="0" y="1317069"/>
+                  </a:moveTo>
+                  <a:lnTo>
+                    <a:pt x="0" y="0"/>
+                  </a:lnTo>
+                  <a:lnTo>
+                    <a:pt x="0" y="0"/>
+                  </a:lnTo>
+                </a:path>
+              </a:pathLst>
+            </a:custGeom>
+            <a:ln w="6775" cap="flat">
+              <a:solidFill>
+                <a:srgbClr val="EBEBEB">
+                  <a:alpha val="100000"/>
+                </a:srgbClr>
+              </a:solidFill>
+              <a:prstDash val="solid"/>
+              <a:round/>
+            </a:ln>
+          </p:spPr>
+          <p:txBody>
+            <a:bodyPr/>
+            <a:lstStyle/>
+            <a:p/>
+          </p:txBody>
+        </p:sp>
+        <p:sp>
+          <p:nvSpPr>
+            <p:cNvPr id="54" name="pl54"/>
+            <p:cNvSpPr/>
+            <p:nvPr/>
+          </p:nvSpPr>
+          <p:spPr>
+            <a:xfrm>
+              <a:off x="6104592" y="4336484"/>
+              <a:ext cx="0" cy="1317069"/>
+            </a:xfrm>
+            <a:custGeom>
+              <a:avLst/>
+              <a:pathLst>
+                <a:path w="0" h="1317069">
+                  <a:moveTo>
+                    <a:pt x="0" y="1317069"/>
+                  </a:moveTo>
+                  <a:lnTo>
+                    <a:pt x="0" y="0"/>
+                  </a:lnTo>
+                  <a:lnTo>
+                    <a:pt x="0" y="0"/>
+                  </a:lnTo>
+                </a:path>
+              </a:pathLst>
+            </a:custGeom>
+            <a:ln w="6775" cap="flat">
+              <a:solidFill>
+                <a:srgbClr val="EBEBEB">
+                  <a:alpha val="100000"/>
+                </a:srgbClr>
+              </a:solidFill>
+              <a:prstDash val="solid"/>
+              <a:round/>
+            </a:ln>
+          </p:spPr>
+          <p:txBody>
+            <a:bodyPr/>
+            <a:lstStyle/>
+            <a:p/>
+          </p:txBody>
+        </p:sp>
+        <p:sp>
+          <p:nvSpPr>
+            <p:cNvPr id="55" name="pl55"/>
+            <p:cNvSpPr/>
+            <p:nvPr/>
+          </p:nvSpPr>
+          <p:spPr>
+            <a:xfrm>
+              <a:off x="6955101" y="4336484"/>
+              <a:ext cx="0" cy="1317069"/>
+            </a:xfrm>
+            <a:custGeom>
+              <a:avLst/>
+              <a:pathLst>
+                <a:path w="0" h="1317069">
+                  <a:moveTo>
+                    <a:pt x="0" y="1317069"/>
+                  </a:moveTo>
+                  <a:lnTo>
+                    <a:pt x="0" y="0"/>
+                  </a:lnTo>
+                  <a:lnTo>
+                    <a:pt x="0" y="0"/>
+                  </a:lnTo>
+                </a:path>
+              </a:pathLst>
+            </a:custGeom>
+            <a:ln w="6775" cap="flat">
+              <a:solidFill>
+                <a:srgbClr val="EBEBEB">
+                  <a:alpha val="100000"/>
+                </a:srgbClr>
+              </a:solidFill>
+              <a:prstDash val="solid"/>
+              <a:round/>
+            </a:ln>
+          </p:spPr>
+          <p:txBody>
+            <a:bodyPr/>
+            <a:lstStyle/>
+            <a:p/>
+          </p:txBody>
+        </p:sp>
+        <p:sp>
+          <p:nvSpPr>
+            <p:cNvPr id="56" name="pl56"/>
+            <p:cNvSpPr/>
+            <p:nvPr/>
+          </p:nvSpPr>
+          <p:spPr>
+            <a:xfrm>
+              <a:off x="7805611" y="4336484"/>
+              <a:ext cx="0" cy="1317069"/>
+            </a:xfrm>
+            <a:custGeom>
+              <a:avLst/>
+              <a:pathLst>
+                <a:path w="0" h="1317069">
+                  <a:moveTo>
+                    <a:pt x="0" y="1317069"/>
+                  </a:moveTo>
+                  <a:lnTo>
+                    <a:pt x="0" y="0"/>
+                  </a:lnTo>
+                  <a:lnTo>
+                    <a:pt x="0" y="0"/>
+                  </a:lnTo>
+                </a:path>
+              </a:pathLst>
+            </a:custGeom>
+            <a:ln w="6775" cap="flat">
+              <a:solidFill>
+                <a:srgbClr val="EBEBEB">
+                  <a:alpha val="100000"/>
+                </a:srgbClr>
+              </a:solidFill>
+              <a:prstDash val="solid"/>
+              <a:round/>
+            </a:ln>
+          </p:spPr>
+          <p:txBody>
+            <a:bodyPr/>
+            <a:lstStyle/>
+            <a:p/>
+          </p:txBody>
+        </p:sp>
+        <p:sp>
+          <p:nvSpPr>
+            <p:cNvPr id="57" name="pl57"/>
+            <p:cNvSpPr/>
+            <p:nvPr/>
+          </p:nvSpPr>
+          <p:spPr>
+            <a:xfrm>
+              <a:off x="887106" y="5593686"/>
+              <a:ext cx="7660515" cy="0"/>
+            </a:xfrm>
+            <a:custGeom>
+              <a:avLst/>
+              <a:pathLst>
+                <a:path w="7660515" h="0">
+                  <a:moveTo>
+                    <a:pt x="0" y="0"/>
+                  </a:moveTo>
+                  <a:lnTo>
+                    <a:pt x="7660515" y="0"/>
+                  </a:lnTo>
+                  <a:lnTo>
+                    <a:pt x="7660515" y="0"/>
+                  </a:lnTo>
+                </a:path>
+              </a:pathLst>
+            </a:custGeom>
+            <a:ln w="13550" cap="flat">
+              <a:solidFill>
+                <a:srgbClr val="EBEBEB">
+                  <a:alpha val="100000"/>
+                </a:srgbClr>
+              </a:solidFill>
+              <a:prstDash val="solid"/>
+              <a:round/>
+            </a:ln>
+          </p:spPr>
+          <p:txBody>
+            <a:bodyPr/>
+            <a:lstStyle/>
+            <a:p/>
+          </p:txBody>
+        </p:sp>
+        <p:sp>
+          <p:nvSpPr>
+            <p:cNvPr id="58" name="pl58"/>
+            <p:cNvSpPr/>
+            <p:nvPr/>
+          </p:nvSpPr>
+          <p:spPr>
+            <a:xfrm>
+              <a:off x="887106" y="5294352"/>
+              <a:ext cx="7660515" cy="0"/>
+            </a:xfrm>
+            <a:custGeom>
+              <a:avLst/>
+              <a:pathLst>
+                <a:path w="7660515" h="0">
+                  <a:moveTo>
+                    <a:pt x="0" y="0"/>
+                  </a:moveTo>
+                  <a:lnTo>
+                    <a:pt x="7660515" y="0"/>
+                  </a:lnTo>
+                  <a:lnTo>
+                    <a:pt x="7660515" y="0"/>
+                  </a:lnTo>
+                </a:path>
+              </a:pathLst>
+            </a:custGeom>
+            <a:ln w="13550" cap="flat">
+              <a:solidFill>
+                <a:srgbClr val="EBEBEB">
+                  <a:alpha val="100000"/>
+                </a:srgbClr>
+              </a:solidFill>
+              <a:prstDash val="solid"/>
+              <a:round/>
+            </a:ln>
+          </p:spPr>
+          <p:txBody>
+            <a:bodyPr/>
+            <a:lstStyle/>
+            <a:p/>
+          </p:txBody>
+        </p:sp>
+        <p:sp>
+          <p:nvSpPr>
+            <p:cNvPr id="59" name="pl59"/>
+            <p:cNvSpPr/>
+            <p:nvPr/>
+          </p:nvSpPr>
+          <p:spPr>
+            <a:xfrm>
+              <a:off x="887106" y="4995019"/>
+              <a:ext cx="7660515" cy="0"/>
+            </a:xfrm>
+            <a:custGeom>
+              <a:avLst/>
+              <a:pathLst>
+                <a:path w="7660515" h="0">
+                  <a:moveTo>
+                    <a:pt x="0" y="0"/>
+                  </a:moveTo>
+                  <a:lnTo>
+                    <a:pt x="7660515" y="0"/>
+                  </a:lnTo>
+                  <a:lnTo>
+                    <a:pt x="7660515" y="0"/>
+                  </a:lnTo>
+                </a:path>
+              </a:pathLst>
+            </a:custGeom>
+            <a:ln w="13550" cap="flat">
+              <a:solidFill>
+                <a:srgbClr val="EBEBEB">
+                  <a:alpha val="100000"/>
+                </a:srgbClr>
+              </a:solidFill>
+              <a:prstDash val="solid"/>
+              <a:round/>
+            </a:ln>
+          </p:spPr>
+          <p:txBody>
+            <a:bodyPr/>
+            <a:lstStyle/>
+            <a:p/>
+          </p:txBody>
+        </p:sp>
+        <p:sp>
+          <p:nvSpPr>
+            <p:cNvPr id="60" name="pl60"/>
+            <p:cNvSpPr/>
+            <p:nvPr/>
+          </p:nvSpPr>
+          <p:spPr>
+            <a:xfrm>
+              <a:off x="887106" y="4695685"/>
+              <a:ext cx="7660515" cy="0"/>
+            </a:xfrm>
+            <a:custGeom>
+              <a:avLst/>
+              <a:pathLst>
+                <a:path w="7660515" h="0">
+                  <a:moveTo>
+                    <a:pt x="0" y="0"/>
+                  </a:moveTo>
+                  <a:lnTo>
+                    <a:pt x="7660515" y="0"/>
+                  </a:lnTo>
+                  <a:lnTo>
+                    <a:pt x="7660515" y="0"/>
+                  </a:lnTo>
+                </a:path>
+              </a:pathLst>
+            </a:custGeom>
+            <a:ln w="13550" cap="flat">
+              <a:solidFill>
+                <a:srgbClr val="EBEBEB">
+                  <a:alpha val="100000"/>
+                </a:srgbClr>
+              </a:solidFill>
+              <a:prstDash val="solid"/>
+              <a:round/>
+            </a:ln>
+          </p:spPr>
+          <p:txBody>
+            <a:bodyPr/>
+            <a:lstStyle/>
+            <a:p/>
+          </p:txBody>
+        </p:sp>
+        <p:sp>
+          <p:nvSpPr>
+            <p:cNvPr id="61" name="pl61"/>
+            <p:cNvSpPr/>
+            <p:nvPr/>
+          </p:nvSpPr>
+          <p:spPr>
+            <a:xfrm>
+              <a:off x="887106" y="4396351"/>
+              <a:ext cx="7660515" cy="0"/>
+            </a:xfrm>
+            <a:custGeom>
+              <a:avLst/>
+              <a:pathLst>
+                <a:path w="7660515" h="0">
+                  <a:moveTo>
+                    <a:pt x="0" y="0"/>
+                  </a:moveTo>
+                  <a:lnTo>
+                    <a:pt x="7660515" y="0"/>
+                  </a:lnTo>
+                  <a:lnTo>
+                    <a:pt x="7660515" y="0"/>
+                  </a:lnTo>
+                </a:path>
+              </a:pathLst>
+            </a:custGeom>
+            <a:ln w="13550" cap="flat">
+              <a:solidFill>
+                <a:srgbClr val="EBEBEB">
+                  <a:alpha val="100000"/>
+                </a:srgbClr>
+              </a:solidFill>
+              <a:prstDash val="solid"/>
+              <a:round/>
+            </a:ln>
+          </p:spPr>
+          <p:txBody>
+            <a:bodyPr/>
+            <a:lstStyle/>
+            <a:p/>
+          </p:txBody>
+        </p:sp>
+        <p:sp>
+          <p:nvSpPr>
+            <p:cNvPr id="62" name="pl62"/>
+            <p:cNvSpPr/>
+            <p:nvPr/>
+          </p:nvSpPr>
+          <p:spPr>
+            <a:xfrm>
+              <a:off x="1426790" y="4336484"/>
+              <a:ext cx="0" cy="1317069"/>
+            </a:xfrm>
+            <a:custGeom>
+              <a:avLst/>
+              <a:pathLst>
+                <a:path w="0" h="1317069">
+                  <a:moveTo>
+                    <a:pt x="0" y="1317069"/>
+                  </a:moveTo>
+                  <a:lnTo>
+                    <a:pt x="0" y="0"/>
+                  </a:lnTo>
+                  <a:lnTo>
+                    <a:pt x="0" y="0"/>
+                  </a:lnTo>
+                </a:path>
+              </a:pathLst>
+            </a:custGeom>
+            <a:ln w="13550" cap="flat">
+              <a:solidFill>
+                <a:srgbClr val="EBEBEB">
+                  <a:alpha val="100000"/>
+                </a:srgbClr>
+              </a:solidFill>
+              <a:prstDash val="solid"/>
+              <a:round/>
+            </a:ln>
+          </p:spPr>
+          <p:txBody>
+            <a:bodyPr/>
+            <a:lstStyle/>
+            <a:p/>
+          </p:txBody>
+        </p:sp>
+        <p:sp>
+          <p:nvSpPr>
+            <p:cNvPr id="63" name="pl63"/>
+            <p:cNvSpPr/>
+            <p:nvPr/>
+          </p:nvSpPr>
+          <p:spPr>
+            <a:xfrm>
+              <a:off x="2277299" y="4336484"/>
+              <a:ext cx="0" cy="1317069"/>
+            </a:xfrm>
+            <a:custGeom>
+              <a:avLst/>
+              <a:pathLst>
+                <a:path w="0" h="1317069">
+                  <a:moveTo>
+                    <a:pt x="0" y="1317069"/>
+                  </a:moveTo>
+                  <a:lnTo>
+                    <a:pt x="0" y="0"/>
+                  </a:lnTo>
+                  <a:lnTo>
+                    <a:pt x="0" y="0"/>
+                  </a:lnTo>
+                </a:path>
+              </a:pathLst>
+            </a:custGeom>
+            <a:ln w="13550" cap="flat">
+              <a:solidFill>
+                <a:srgbClr val="EBEBEB">
+                  <a:alpha val="100000"/>
+                </a:srgbClr>
+              </a:solidFill>
+              <a:prstDash val="solid"/>
+              <a:round/>
+            </a:ln>
+          </p:spPr>
+          <p:txBody>
+            <a:bodyPr/>
+            <a:lstStyle/>
+            <a:p/>
+          </p:txBody>
+        </p:sp>
+        <p:sp>
+          <p:nvSpPr>
+            <p:cNvPr id="64" name="pl64"/>
+            <p:cNvSpPr/>
+            <p:nvPr/>
+          </p:nvSpPr>
+          <p:spPr>
+            <a:xfrm>
+              <a:off x="3127809" y="4336484"/>
+              <a:ext cx="0" cy="1317069"/>
+            </a:xfrm>
+            <a:custGeom>
+              <a:avLst/>
+              <a:pathLst>
+                <a:path w="0" h="1317069">
+                  <a:moveTo>
+                    <a:pt x="0" y="1317069"/>
+                  </a:moveTo>
+                  <a:lnTo>
+                    <a:pt x="0" y="0"/>
+                  </a:lnTo>
+                  <a:lnTo>
+                    <a:pt x="0" y="0"/>
+                  </a:lnTo>
+                </a:path>
+              </a:pathLst>
+            </a:custGeom>
+            <a:ln w="13550" cap="flat">
+              <a:solidFill>
+                <a:srgbClr val="EBEBEB">
+                  <a:alpha val="100000"/>
+                </a:srgbClr>
+              </a:solidFill>
+              <a:prstDash val="solid"/>
+              <a:round/>
+            </a:ln>
+          </p:spPr>
+          <p:txBody>
+            <a:bodyPr/>
+            <a:lstStyle/>
+            <a:p/>
+          </p:txBody>
+        </p:sp>
+        <p:sp>
+          <p:nvSpPr>
+            <p:cNvPr id="65" name="pl65"/>
+            <p:cNvSpPr/>
+            <p:nvPr/>
+          </p:nvSpPr>
+          <p:spPr>
+            <a:xfrm>
+              <a:off x="3978318" y="4336484"/>
+              <a:ext cx="0" cy="1317069"/>
+            </a:xfrm>
+            <a:custGeom>
+              <a:avLst/>
+              <a:pathLst>
+                <a:path w="0" h="1317069">
+                  <a:moveTo>
+                    <a:pt x="0" y="1317069"/>
+                  </a:moveTo>
+                  <a:lnTo>
+                    <a:pt x="0" y="0"/>
+                  </a:lnTo>
+                  <a:lnTo>
+                    <a:pt x="0" y="0"/>
+                  </a:lnTo>
+                </a:path>
+              </a:pathLst>
+            </a:custGeom>
+            <a:ln w="13550" cap="flat">
+              <a:solidFill>
+                <a:srgbClr val="EBEBEB">
+                  <a:alpha val="100000"/>
+                </a:srgbClr>
+              </a:solidFill>
+              <a:prstDash val="solid"/>
+              <a:round/>
+            </a:ln>
+          </p:spPr>
+          <p:txBody>
+            <a:bodyPr/>
+            <a:lstStyle/>
+            <a:p/>
+          </p:txBody>
+        </p:sp>
+        <p:sp>
+          <p:nvSpPr>
+            <p:cNvPr id="66" name="pl66"/>
+            <p:cNvSpPr/>
+            <p:nvPr/>
+          </p:nvSpPr>
+          <p:spPr>
+            <a:xfrm>
+              <a:off x="4828828" y="4336484"/>
+              <a:ext cx="0" cy="1317069"/>
+            </a:xfrm>
+            <a:custGeom>
+              <a:avLst/>
+              <a:pathLst>
+                <a:path w="0" h="1317069">
+                  <a:moveTo>
+                    <a:pt x="0" y="1317069"/>
+                  </a:moveTo>
+                  <a:lnTo>
+                    <a:pt x="0" y="0"/>
+                  </a:lnTo>
+                  <a:lnTo>
+                    <a:pt x="0" y="0"/>
+                  </a:lnTo>
+                </a:path>
+              </a:pathLst>
+            </a:custGeom>
+            <a:ln w="13550" cap="flat">
+              <a:solidFill>
+                <a:srgbClr val="EBEBEB">
+                  <a:alpha val="100000"/>
+                </a:srgbClr>
+              </a:solidFill>
+              <a:prstDash val="solid"/>
+              <a:round/>
+            </a:ln>
+          </p:spPr>
+          <p:txBody>
+            <a:bodyPr/>
+            <a:lstStyle/>
+            <a:p/>
+          </p:txBody>
+        </p:sp>
+        <p:sp>
+          <p:nvSpPr>
+            <p:cNvPr id="67" name="pl67"/>
+            <p:cNvSpPr/>
+            <p:nvPr/>
+          </p:nvSpPr>
+          <p:spPr>
+            <a:xfrm>
+              <a:off x="5679337" y="4336484"/>
+              <a:ext cx="0" cy="1317069"/>
+            </a:xfrm>
+            <a:custGeom>
+              <a:avLst/>
+              <a:pathLst>
+                <a:path w="0" h="1317069">
+                  <a:moveTo>
+                    <a:pt x="0" y="1317069"/>
+                  </a:moveTo>
+                  <a:lnTo>
+                    <a:pt x="0" y="0"/>
+                  </a:lnTo>
+                  <a:lnTo>
+                    <a:pt x="0" y="0"/>
+                  </a:lnTo>
+                </a:path>
+              </a:pathLst>
+            </a:custGeom>
+            <a:ln w="13550" cap="flat">
+              <a:solidFill>
+                <a:srgbClr val="EBEBEB">
+                  <a:alpha val="100000"/>
+                </a:srgbClr>
+              </a:solidFill>
+              <a:prstDash val="solid"/>
+              <a:round/>
+            </a:ln>
+          </p:spPr>
+          <p:txBody>
+            <a:bodyPr/>
+            <a:lstStyle/>
+            <a:p/>
+          </p:txBody>
+        </p:sp>
+        <p:sp>
+          <p:nvSpPr>
+            <p:cNvPr id="68" name="pl68"/>
+            <p:cNvSpPr/>
+            <p:nvPr/>
+          </p:nvSpPr>
+          <p:spPr>
+            <a:xfrm>
+              <a:off x="6529847" y="4336484"/>
+              <a:ext cx="0" cy="1317069"/>
+            </a:xfrm>
+            <a:custGeom>
+              <a:avLst/>
+              <a:pathLst>
+                <a:path w="0" h="1317069">
+                  <a:moveTo>
+                    <a:pt x="0" y="1317069"/>
+                  </a:moveTo>
+                  <a:lnTo>
+                    <a:pt x="0" y="0"/>
+                  </a:lnTo>
+                  <a:lnTo>
+                    <a:pt x="0" y="0"/>
+                  </a:lnTo>
+                </a:path>
+              </a:pathLst>
+            </a:custGeom>
+            <a:ln w="13550" cap="flat">
+              <a:solidFill>
+                <a:srgbClr val="EBEBEB">
+                  <a:alpha val="100000"/>
+                </a:srgbClr>
+              </a:solidFill>
+              <a:prstDash val="solid"/>
+              <a:round/>
+            </a:ln>
+          </p:spPr>
+          <p:txBody>
+            <a:bodyPr/>
+            <a:lstStyle/>
+            <a:p/>
+          </p:txBody>
+        </p:sp>
+        <p:sp>
+          <p:nvSpPr>
+            <p:cNvPr id="69" name="pl69"/>
+            <p:cNvSpPr/>
+            <p:nvPr/>
+          </p:nvSpPr>
+          <p:spPr>
+            <a:xfrm>
+              <a:off x="7380356" y="4336484"/>
+              <a:ext cx="0" cy="1317069"/>
+            </a:xfrm>
+            <a:custGeom>
+              <a:avLst/>
+              <a:pathLst>
+                <a:path w="0" h="1317069">
+                  <a:moveTo>
+                    <a:pt x="0" y="1317069"/>
+                  </a:moveTo>
+                  <a:lnTo>
+                    <a:pt x="0" y="0"/>
+                  </a:lnTo>
+                  <a:lnTo>
+                    <a:pt x="0" y="0"/>
+                  </a:lnTo>
+                </a:path>
+              </a:pathLst>
+            </a:custGeom>
+            <a:ln w="13550" cap="flat">
+              <a:solidFill>
+                <a:srgbClr val="EBEBEB">
+                  <a:alpha val="100000"/>
+                </a:srgbClr>
+              </a:solidFill>
+              <a:prstDash val="solid"/>
+              <a:round/>
+            </a:ln>
+          </p:spPr>
+          <p:txBody>
+            <a:bodyPr/>
+            <a:lstStyle/>
+            <a:p/>
+          </p:txBody>
+        </p:sp>
+        <p:sp>
+          <p:nvSpPr>
+            <p:cNvPr id="70" name="pl70"/>
+            <p:cNvSpPr/>
+            <p:nvPr/>
+          </p:nvSpPr>
+          <p:spPr>
+            <a:xfrm>
+              <a:off x="8230866" y="4336484"/>
+              <a:ext cx="0" cy="1317069"/>
+            </a:xfrm>
+            <a:custGeom>
+              <a:avLst/>
+              <a:pathLst>
+                <a:path w="0" h="1317069">
+                  <a:moveTo>
+                    <a:pt x="0" y="1317069"/>
+                  </a:moveTo>
+                  <a:lnTo>
+                    <a:pt x="0" y="0"/>
+                  </a:lnTo>
+                  <a:lnTo>
+                    <a:pt x="0" y="0"/>
+                  </a:lnTo>
+                </a:path>
+              </a:pathLst>
+            </a:custGeom>
+            <a:ln w="13550" cap="flat">
+              <a:solidFill>
+                <a:srgbClr val="EBEBEB">
+                  <a:alpha val="100000"/>
+                </a:srgbClr>
+              </a:solidFill>
+              <a:prstDash val="solid"/>
+              <a:round/>
+            </a:ln>
+          </p:spPr>
+          <p:txBody>
+            <a:bodyPr/>
+            <a:lstStyle/>
+            <a:p/>
+          </p:txBody>
+        </p:sp>
+        <p:sp>
+          <p:nvSpPr>
+            <p:cNvPr id="71" name="pg71"/>
+            <p:cNvSpPr/>
+            <p:nvPr/>
+          </p:nvSpPr>
+          <p:spPr>
+            <a:xfrm>
+              <a:off x="1235312" y="4336484"/>
+              <a:ext cx="6964104" cy="1236967"/>
+            </a:xfrm>
+            <a:custGeom>
+              <a:avLst/>
+              <a:pathLst>
+                <a:path w="6964104" h="1236967">
+                  <a:moveTo>
+                    <a:pt x="976303" y="0"/>
+                  </a:moveTo>
+                  <a:lnTo>
+                    <a:pt x="984822" y="7522"/>
+                  </a:lnTo>
+                  <a:lnTo>
+                    <a:pt x="1055167" y="66696"/>
+                  </a:lnTo>
+                  <a:lnTo>
+                    <a:pt x="1125511" y="123068"/>
+                  </a:lnTo>
+                  <a:lnTo>
+                    <a:pt x="1195856" y="176770"/>
+                  </a:lnTo>
+                  <a:lnTo>
+                    <a:pt x="1266200" y="227930"/>
+                  </a:lnTo>
+                  <a:lnTo>
+                    <a:pt x="1336545" y="276667"/>
+                  </a:lnTo>
+                  <a:lnTo>
+                    <a:pt x="1406889" y="323096"/>
+                  </a:lnTo>
+                  <a:lnTo>
+                    <a:pt x="1477234" y="367327"/>
+                  </a:lnTo>
+                  <a:lnTo>
+                    <a:pt x="1547578" y="409464"/>
+                  </a:lnTo>
+                  <a:lnTo>
+                    <a:pt x="1617923" y="449605"/>
+                  </a:lnTo>
+                  <a:lnTo>
+                    <a:pt x="1688267" y="487846"/>
+                  </a:lnTo>
+                  <a:lnTo>
+                    <a:pt x="1758612" y="524276"/>
+                  </a:lnTo>
+                  <a:lnTo>
+                    <a:pt x="1828956" y="558980"/>
+                  </a:lnTo>
+                  <a:lnTo>
+                    <a:pt x="1899301" y="592042"/>
+                  </a:lnTo>
+                  <a:lnTo>
+                    <a:pt x="1969645" y="623538"/>
+                  </a:lnTo>
+                  <a:lnTo>
+                    <a:pt x="2039990" y="653543"/>
+                  </a:lnTo>
+                  <a:lnTo>
+                    <a:pt x="2110334" y="682127"/>
+                  </a:lnTo>
+                  <a:lnTo>
+                    <a:pt x="2180679" y="709357"/>
+                  </a:lnTo>
+                  <a:lnTo>
+                    <a:pt x="2251023" y="735298"/>
+                  </a:lnTo>
+                  <a:lnTo>
+                    <a:pt x="2321368" y="760011"/>
+                  </a:lnTo>
+                  <a:lnTo>
+                    <a:pt x="2391712" y="783553"/>
+                  </a:lnTo>
+                  <a:lnTo>
+                    <a:pt x="2462057" y="805981"/>
+                  </a:lnTo>
+                  <a:lnTo>
+                    <a:pt x="2532401" y="827347"/>
+                  </a:lnTo>
+                  <a:lnTo>
+                    <a:pt x="2602746" y="847701"/>
+                  </a:lnTo>
+                  <a:lnTo>
+                    <a:pt x="2673090" y="867091"/>
+                  </a:lnTo>
+                  <a:lnTo>
+                    <a:pt x="2743435" y="885564"/>
+                  </a:lnTo>
+                  <a:lnTo>
+                    <a:pt x="2813779" y="903161"/>
+                  </a:lnTo>
+                  <a:lnTo>
+                    <a:pt x="2884124" y="919925"/>
+                  </a:lnTo>
+                  <a:lnTo>
+                    <a:pt x="2954468" y="935896"/>
+                  </a:lnTo>
+                  <a:lnTo>
+                    <a:pt x="3024813" y="951110"/>
+                  </a:lnTo>
+                  <a:lnTo>
+                    <a:pt x="3095157" y="959673"/>
+                  </a:lnTo>
+                  <a:lnTo>
+                    <a:pt x="3165502" y="962988"/>
+                  </a:lnTo>
+                  <a:lnTo>
+                    <a:pt x="3235846" y="966265"/>
+                  </a:lnTo>
+                  <a:lnTo>
+                    <a:pt x="3306191" y="969507"/>
+                  </a:lnTo>
+                  <a:lnTo>
+                    <a:pt x="3376535" y="972712"/>
+                  </a:lnTo>
+                  <a:lnTo>
+                    <a:pt x="3446880" y="975882"/>
+                  </a:lnTo>
+                  <a:lnTo>
+                    <a:pt x="3517224" y="979016"/>
+                  </a:lnTo>
+                  <a:lnTo>
+                    <a:pt x="3587569" y="982115"/>
+                  </a:lnTo>
+                  <a:lnTo>
+                    <a:pt x="3657913" y="985180"/>
+                  </a:lnTo>
+                  <a:lnTo>
+                    <a:pt x="3728257" y="988211"/>
+                  </a:lnTo>
+                  <a:lnTo>
+                    <a:pt x="3798602" y="991208"/>
+                  </a:lnTo>
+                  <a:lnTo>
+                    <a:pt x="3868946" y="994171"/>
+                  </a:lnTo>
+                  <a:lnTo>
+                    <a:pt x="3939291" y="997102"/>
+                  </a:lnTo>
+                  <a:lnTo>
+                    <a:pt x="4009635" y="1000000"/>
+                  </a:lnTo>
+                  <a:lnTo>
+                    <a:pt x="4079980" y="1002865"/>
+                  </a:lnTo>
+                  <a:lnTo>
+                    <a:pt x="4150324" y="1005699"/>
+                  </a:lnTo>
+                  <a:lnTo>
+                    <a:pt x="4220669" y="1008501"/>
+                  </a:lnTo>
+                  <a:lnTo>
+                    <a:pt x="4291013" y="1011272"/>
+                  </a:lnTo>
+                  <a:lnTo>
+                    <a:pt x="4361358" y="1014012"/>
+                  </a:lnTo>
+                  <a:lnTo>
+                    <a:pt x="4431702" y="1016721"/>
+                  </a:lnTo>
+                  <a:lnTo>
+                    <a:pt x="4502047" y="1019401"/>
+                  </a:lnTo>
+                  <a:lnTo>
+                    <a:pt x="4572391" y="1022050"/>
+                  </a:lnTo>
+                  <a:lnTo>
+                    <a:pt x="4642736" y="1024670"/>
+                  </a:lnTo>
+                  <a:lnTo>
+                    <a:pt x="4713080" y="1027261"/>
+                  </a:lnTo>
+                  <a:lnTo>
+                    <a:pt x="4783425" y="1029823"/>
+                  </a:lnTo>
+                  <a:lnTo>
+                    <a:pt x="4853769" y="1032356"/>
+                  </a:lnTo>
+                  <a:lnTo>
+                    <a:pt x="4924114" y="1034861"/>
+                  </a:lnTo>
+                  <a:lnTo>
+                    <a:pt x="4994458" y="1037338"/>
+                  </a:lnTo>
+                  <a:lnTo>
+                    <a:pt x="5064803" y="1039788"/>
+                  </a:lnTo>
+                  <a:lnTo>
+                    <a:pt x="5135147" y="1042210"/>
+                  </a:lnTo>
+                  <a:lnTo>
+                    <a:pt x="5205492" y="1044605"/>
+                  </a:lnTo>
+                  <a:lnTo>
+                    <a:pt x="5275836" y="1046974"/>
+                  </a:lnTo>
+                  <a:lnTo>
+                    <a:pt x="5346181" y="1049316"/>
+                  </a:lnTo>
+                  <a:lnTo>
+                    <a:pt x="5416525" y="1051632"/>
+                  </a:lnTo>
+                  <a:lnTo>
+                    <a:pt x="5486870" y="1053923"/>
+                  </a:lnTo>
+                  <a:lnTo>
+                    <a:pt x="5557214" y="1056187"/>
+                  </a:lnTo>
+                  <a:lnTo>
+                    <a:pt x="5627559" y="1058427"/>
+                  </a:lnTo>
+                  <a:lnTo>
+                    <a:pt x="5697903" y="1060642"/>
+                  </a:lnTo>
+                  <a:lnTo>
+                    <a:pt x="5768248" y="1062832"/>
+                  </a:lnTo>
+                  <a:lnTo>
+                    <a:pt x="5838592" y="1064997"/>
+                  </a:lnTo>
+                  <a:lnTo>
+                    <a:pt x="5908937" y="1067139"/>
+                  </a:lnTo>
+                  <a:lnTo>
+                    <a:pt x="5979281" y="1069256"/>
+                  </a:lnTo>
+                  <a:lnTo>
+                    <a:pt x="6049626" y="1071350"/>
+                  </a:lnTo>
+                  <a:lnTo>
+                    <a:pt x="6119970" y="1073421"/>
+                  </a:lnTo>
+                  <a:lnTo>
+                    <a:pt x="6190315" y="1075468"/>
+                  </a:lnTo>
+                  <a:lnTo>
+                    <a:pt x="6260659" y="1077493"/>
+                  </a:lnTo>
+                  <a:lnTo>
+                    <a:pt x="6331004" y="1079495"/>
+                  </a:lnTo>
+                  <a:lnTo>
+                    <a:pt x="6401348" y="1081475"/>
+                  </a:lnTo>
+                  <a:lnTo>
+                    <a:pt x="6471693" y="1083433"/>
+                  </a:lnTo>
+                  <a:lnTo>
+                    <a:pt x="6542037" y="1085369"/>
+                  </a:lnTo>
+                  <a:lnTo>
+                    <a:pt x="6612382" y="1087283"/>
+                  </a:lnTo>
+                  <a:lnTo>
+                    <a:pt x="6682726" y="1089177"/>
+                  </a:lnTo>
+                  <a:lnTo>
+                    <a:pt x="6753071" y="1091049"/>
+                  </a:lnTo>
+                  <a:lnTo>
+                    <a:pt x="6823415" y="1092900"/>
+                  </a:lnTo>
+                  <a:lnTo>
+                    <a:pt x="6893760" y="1094730"/>
+                  </a:lnTo>
+                  <a:lnTo>
+                    <a:pt x="6964104" y="1096540"/>
+                  </a:lnTo>
+                  <a:lnTo>
+                    <a:pt x="6964104" y="1236967"/>
+                  </a:lnTo>
+                  <a:lnTo>
+                    <a:pt x="6893760" y="1235962"/>
+                  </a:lnTo>
+                  <a:lnTo>
+                    <a:pt x="6823415" y="1234906"/>
+                  </a:lnTo>
+                  <a:lnTo>
+                    <a:pt x="6753071" y="1233798"/>
+                  </a:lnTo>
+                  <a:lnTo>
+                    <a:pt x="6682726" y="1232634"/>
+                  </a:lnTo>
+                  <a:lnTo>
+                    <a:pt x="6612382" y="1231413"/>
+                  </a:lnTo>
+                  <a:lnTo>
+                    <a:pt x="6542037" y="1230131"/>
+                  </a:lnTo>
+                  <a:lnTo>
+                    <a:pt x="6471693" y="1228786"/>
+                  </a:lnTo>
+                  <a:lnTo>
+                    <a:pt x="6401348" y="1227373"/>
+                  </a:lnTo>
+                  <a:lnTo>
+                    <a:pt x="6331004" y="1225891"/>
+                  </a:lnTo>
+                  <a:lnTo>
+                    <a:pt x="6260659" y="1224335"/>
+                  </a:lnTo>
+                  <a:lnTo>
+                    <a:pt x="6190315" y="1222701"/>
+                  </a:lnTo>
+                  <a:lnTo>
+                    <a:pt x="6119970" y="1220986"/>
+                  </a:lnTo>
+                  <a:lnTo>
+                    <a:pt x="6049626" y="1219186"/>
+                  </a:lnTo>
+                  <a:lnTo>
+                    <a:pt x="5979281" y="1217296"/>
+                  </a:lnTo>
+                  <a:lnTo>
+                    <a:pt x="5908937" y="1215313"/>
+                  </a:lnTo>
+                  <a:lnTo>
+                    <a:pt x="5838592" y="1213231"/>
+                  </a:lnTo>
+                  <a:lnTo>
+                    <a:pt x="5768248" y="1211045"/>
+                  </a:lnTo>
+                  <a:lnTo>
+                    <a:pt x="5697903" y="1208751"/>
+                  </a:lnTo>
+                  <a:lnTo>
+                    <a:pt x="5627559" y="1206343"/>
+                  </a:lnTo>
+                  <a:lnTo>
+                    <a:pt x="5557214" y="1203815"/>
+                  </a:lnTo>
+                  <a:lnTo>
+                    <a:pt x="5486870" y="1201161"/>
+                  </a:lnTo>
+                  <a:lnTo>
+                    <a:pt x="5416525" y="1198376"/>
+                  </a:lnTo>
+                  <a:lnTo>
+                    <a:pt x="5346181" y="1195452"/>
+                  </a:lnTo>
+                  <a:lnTo>
+                    <a:pt x="5275836" y="1192383"/>
+                  </a:lnTo>
+                  <a:lnTo>
+                    <a:pt x="5205492" y="1189161"/>
+                  </a:lnTo>
+                  <a:lnTo>
+                    <a:pt x="5135147" y="1185779"/>
+                  </a:lnTo>
+                  <a:lnTo>
+                    <a:pt x="5064803" y="1182229"/>
+                  </a:lnTo>
+                  <a:lnTo>
+                    <a:pt x="4994458" y="1178502"/>
+                  </a:lnTo>
+                  <a:lnTo>
+                    <a:pt x="4924114" y="1174591"/>
+                  </a:lnTo>
+                  <a:lnTo>
+                    <a:pt x="4853769" y="1170484"/>
+                  </a:lnTo>
+                  <a:lnTo>
+                    <a:pt x="4783425" y="1166174"/>
+                  </a:lnTo>
+                  <a:lnTo>
+                    <a:pt x="4713080" y="1161650"/>
+                  </a:lnTo>
+                  <a:lnTo>
+                    <a:pt x="4642736" y="1156900"/>
+                  </a:lnTo>
+                  <a:lnTo>
+                    <a:pt x="4572391" y="1151915"/>
+                  </a:lnTo>
+                  <a:lnTo>
+                    <a:pt x="4502047" y="1146681"/>
+                  </a:lnTo>
+                  <a:lnTo>
+                    <a:pt x="4431702" y="1141188"/>
+                  </a:lnTo>
+                  <a:lnTo>
+                    <a:pt x="4361358" y="1135422"/>
+                  </a:lnTo>
+                  <a:lnTo>
+                    <a:pt x="4291013" y="1129369"/>
+                  </a:lnTo>
+                  <a:lnTo>
+                    <a:pt x="4220669" y="1123015"/>
+                  </a:lnTo>
+                  <a:lnTo>
+                    <a:pt x="4150324" y="1116345"/>
+                  </a:lnTo>
+                  <a:lnTo>
+                    <a:pt x="4079980" y="1109344"/>
+                  </a:lnTo>
+                  <a:lnTo>
+                    <a:pt x="4009635" y="1101995"/>
+                  </a:lnTo>
+                  <a:lnTo>
+                    <a:pt x="3939291" y="1094280"/>
+                  </a:lnTo>
+                  <a:lnTo>
+                    <a:pt x="3868946" y="1086182"/>
+                  </a:lnTo>
+                  <a:lnTo>
+                    <a:pt x="3798602" y="1077682"/>
+                  </a:lnTo>
+                  <a:lnTo>
+                    <a:pt x="3728257" y="1068759"/>
+                  </a:lnTo>
+                  <a:lnTo>
+                    <a:pt x="3657913" y="1059392"/>
+                  </a:lnTo>
+                  <a:lnTo>
+                    <a:pt x="3587569" y="1049560"/>
+                  </a:lnTo>
+                  <a:lnTo>
+                    <a:pt x="3517224" y="1039239"/>
+                  </a:lnTo>
+                  <a:lnTo>
+                    <a:pt x="3446880" y="1028405"/>
+                  </a:lnTo>
+                  <a:lnTo>
+                    <a:pt x="3376535" y="1017033"/>
+                  </a:lnTo>
+                  <a:lnTo>
+                    <a:pt x="3306191" y="1005096"/>
+                  </a:lnTo>
+                  <a:lnTo>
+                    <a:pt x="3235846" y="992565"/>
+                  </a:lnTo>
+                  <a:lnTo>
+                    <a:pt x="3165502" y="979411"/>
+                  </a:lnTo>
+                  <a:lnTo>
+                    <a:pt x="3095157" y="965604"/>
+                  </a:lnTo>
+                  <a:lnTo>
+                    <a:pt x="3024813" y="956320"/>
+                  </a:lnTo>
+                  <a:lnTo>
+                    <a:pt x="2954468" y="952930"/>
+                  </a:lnTo>
+                  <a:lnTo>
+                    <a:pt x="2884124" y="949502"/>
+                  </a:lnTo>
+                  <a:lnTo>
+                    <a:pt x="2813779" y="946035"/>
+                  </a:lnTo>
+                  <a:lnTo>
+                    <a:pt x="2743435" y="942530"/>
+                  </a:lnTo>
+                  <a:lnTo>
+                    <a:pt x="2673090" y="938984"/>
+                  </a:lnTo>
+                  <a:lnTo>
+                    <a:pt x="2602746" y="935399"/>
+                  </a:lnTo>
+                  <a:lnTo>
+                    <a:pt x="2532401" y="931773"/>
+                  </a:lnTo>
+                  <a:lnTo>
+                    <a:pt x="2462057" y="928107"/>
+                  </a:lnTo>
+                  <a:lnTo>
+                    <a:pt x="2391712" y="924399"/>
+                  </a:lnTo>
+                  <a:lnTo>
+                    <a:pt x="2321368" y="920649"/>
+                  </a:lnTo>
+                  <a:lnTo>
+                    <a:pt x="2251023" y="916857"/>
+                  </a:lnTo>
+                  <a:lnTo>
+                    <a:pt x="2180679" y="913022"/>
+                  </a:lnTo>
+                  <a:lnTo>
+                    <a:pt x="2110334" y="909145"/>
+                  </a:lnTo>
+                  <a:lnTo>
+                    <a:pt x="2039990" y="905223"/>
+                  </a:lnTo>
+                  <a:lnTo>
+                    <a:pt x="1969645" y="901257"/>
+                  </a:lnTo>
+                  <a:lnTo>
+                    <a:pt x="1899301" y="897247"/>
+                  </a:lnTo>
+                  <a:lnTo>
+                    <a:pt x="1828956" y="893191"/>
+                  </a:lnTo>
+                  <a:lnTo>
+                    <a:pt x="1758612" y="889090"/>
+                  </a:lnTo>
+                  <a:lnTo>
+                    <a:pt x="1688267" y="884943"/>
+                  </a:lnTo>
+                  <a:lnTo>
+                    <a:pt x="1617923" y="880749"/>
+                  </a:lnTo>
+                  <a:lnTo>
+                    <a:pt x="1547578" y="876507"/>
+                  </a:lnTo>
+                  <a:lnTo>
+                    <a:pt x="1477234" y="872218"/>
+                  </a:lnTo>
+                  <a:lnTo>
+                    <a:pt x="1406889" y="867880"/>
+                  </a:lnTo>
+                  <a:lnTo>
+                    <a:pt x="1336545" y="863494"/>
+                  </a:lnTo>
+                  <a:lnTo>
+                    <a:pt x="1266200" y="859058"/>
+                  </a:lnTo>
+                  <a:lnTo>
+                    <a:pt x="1195856" y="854572"/>
+                  </a:lnTo>
+                  <a:lnTo>
+                    <a:pt x="1125511" y="850036"/>
+                  </a:lnTo>
+                  <a:lnTo>
+                    <a:pt x="1055167" y="845448"/>
+                  </a:lnTo>
+                  <a:lnTo>
+                    <a:pt x="984822" y="840809"/>
+                  </a:lnTo>
+                  <a:lnTo>
+                    <a:pt x="914478" y="836118"/>
+                  </a:lnTo>
+                  <a:lnTo>
+                    <a:pt x="844133" y="831373"/>
+                  </a:lnTo>
+                  <a:lnTo>
+                    <a:pt x="773789" y="826576"/>
+                  </a:lnTo>
+                  <a:lnTo>
+                    <a:pt x="703444" y="821724"/>
+                  </a:lnTo>
+                  <a:lnTo>
+                    <a:pt x="633100" y="816817"/>
+                  </a:lnTo>
+                  <a:lnTo>
+                    <a:pt x="562755" y="811856"/>
+                  </a:lnTo>
+                  <a:lnTo>
+                    <a:pt x="492411" y="806838"/>
+                  </a:lnTo>
+                  <a:lnTo>
+                    <a:pt x="422066" y="801764"/>
+                  </a:lnTo>
+                  <a:lnTo>
+                    <a:pt x="351722" y="796632"/>
+                  </a:lnTo>
+                  <a:lnTo>
+                    <a:pt x="281377" y="791443"/>
+                  </a:lnTo>
+                  <a:lnTo>
+                    <a:pt x="211033" y="786195"/>
+                  </a:lnTo>
+                  <a:lnTo>
+                    <a:pt x="140688" y="780889"/>
+                  </a:lnTo>
+                  <a:lnTo>
+                    <a:pt x="70344" y="775522"/>
+                  </a:lnTo>
+                  <a:lnTo>
+                    <a:pt x="0" y="770095"/>
+                  </a:lnTo>
+                  <a:close/>
+                </a:path>
+              </a:pathLst>
+            </a:custGeom>
+            <a:solidFill>
+              <a:srgbClr val="FF8C00">
+                <a:alpha val="20000"/>
+              </a:srgbClr>
+            </a:solidFill>
+          </p:spPr>
+          <p:txBody>
+            <a:bodyPr/>
+            <a:lstStyle/>
+            <a:p/>
+          </p:txBody>
+        </p:sp>
+        <p:sp>
+          <p:nvSpPr>
+            <p:cNvPr id="72" name="pl72"/>
+            <p:cNvSpPr/>
+            <p:nvPr/>
+          </p:nvSpPr>
+          <p:spPr>
+            <a:xfrm>
+              <a:off x="2211615" y="4336484"/>
+              <a:ext cx="5987800" cy="1096540"/>
+            </a:xfrm>
+            <a:custGeom>
+              <a:avLst/>
+              <a:pathLst>
+                <a:path w="5987800" h="1096540">
+                  <a:moveTo>
+                    <a:pt x="0" y="0"/>
+                  </a:moveTo>
+                  <a:lnTo>
+                    <a:pt x="8519" y="7522"/>
+                  </a:lnTo>
+                  <a:lnTo>
+                    <a:pt x="78863" y="66696"/>
+                  </a:lnTo>
+                  <a:lnTo>
+                    <a:pt x="149208" y="123068"/>
+                  </a:lnTo>
+                  <a:lnTo>
+                    <a:pt x="219552" y="176770"/>
+                  </a:lnTo>
+                  <a:lnTo>
+                    <a:pt x="289897" y="227930"/>
+                  </a:lnTo>
+                  <a:lnTo>
+                    <a:pt x="360241" y="276667"/>
+                  </a:lnTo>
+                  <a:lnTo>
+                    <a:pt x="430586" y="323096"/>
+                  </a:lnTo>
+                  <a:lnTo>
+                    <a:pt x="500930" y="367327"/>
+                  </a:lnTo>
+                  <a:lnTo>
+                    <a:pt x="571275" y="409464"/>
+                  </a:lnTo>
+                  <a:lnTo>
+                    <a:pt x="641619" y="449605"/>
+                  </a:lnTo>
+                  <a:lnTo>
+                    <a:pt x="711964" y="487846"/>
+                  </a:lnTo>
+                  <a:lnTo>
+                    <a:pt x="782308" y="524276"/>
+                  </a:lnTo>
+                  <a:lnTo>
+                    <a:pt x="852653" y="558980"/>
+                  </a:lnTo>
+                  <a:lnTo>
+                    <a:pt x="922997" y="592042"/>
+                  </a:lnTo>
+                  <a:lnTo>
+                    <a:pt x="993342" y="623538"/>
+                  </a:lnTo>
+                  <a:lnTo>
+                    <a:pt x="1063686" y="653543"/>
+                  </a:lnTo>
+                  <a:lnTo>
+                    <a:pt x="1134031" y="682127"/>
+                  </a:lnTo>
+                  <a:lnTo>
+                    <a:pt x="1204375" y="709357"/>
+                  </a:lnTo>
+                  <a:lnTo>
+                    <a:pt x="1274720" y="735298"/>
+                  </a:lnTo>
+                  <a:lnTo>
+                    <a:pt x="1345064" y="760011"/>
+                  </a:lnTo>
+                  <a:lnTo>
+                    <a:pt x="1415409" y="783553"/>
+                  </a:lnTo>
+                  <a:lnTo>
+                    <a:pt x="1485753" y="805981"/>
+                  </a:lnTo>
+                  <a:lnTo>
+                    <a:pt x="1556098" y="827347"/>
+                  </a:lnTo>
+                  <a:lnTo>
+                    <a:pt x="1626442" y="847701"/>
+                  </a:lnTo>
+                  <a:lnTo>
+                    <a:pt x="1696787" y="867091"/>
+                  </a:lnTo>
+                  <a:lnTo>
+                    <a:pt x="1767131" y="885564"/>
+                  </a:lnTo>
+                  <a:lnTo>
+                    <a:pt x="1837476" y="903161"/>
+                  </a:lnTo>
+                  <a:lnTo>
+                    <a:pt x="1907820" y="919925"/>
+                  </a:lnTo>
+                  <a:lnTo>
+                    <a:pt x="1978165" y="935896"/>
+                  </a:lnTo>
+                  <a:lnTo>
+                    <a:pt x="2048509" y="951110"/>
+                  </a:lnTo>
+                  <a:lnTo>
+                    <a:pt x="2118854" y="959673"/>
+                  </a:lnTo>
+                  <a:lnTo>
+                    <a:pt x="2189198" y="962988"/>
+                  </a:lnTo>
+                  <a:lnTo>
+                    <a:pt x="2259542" y="966265"/>
+                  </a:lnTo>
+                  <a:lnTo>
+                    <a:pt x="2329887" y="969507"/>
+                  </a:lnTo>
+                  <a:lnTo>
+                    <a:pt x="2400231" y="972712"/>
+                  </a:lnTo>
+                  <a:lnTo>
+                    <a:pt x="2470576" y="975882"/>
+                  </a:lnTo>
+                  <a:lnTo>
+                    <a:pt x="2540920" y="979016"/>
+                  </a:lnTo>
+                  <a:lnTo>
+                    <a:pt x="2611265" y="982115"/>
+                  </a:lnTo>
+                  <a:lnTo>
+                    <a:pt x="2681609" y="985180"/>
+                  </a:lnTo>
+                  <a:lnTo>
+                    <a:pt x="2751954" y="988211"/>
+                  </a:lnTo>
+                  <a:lnTo>
+                    <a:pt x="2822298" y="991208"/>
+                  </a:lnTo>
+                  <a:lnTo>
+                    <a:pt x="2892643" y="994171"/>
+                  </a:lnTo>
+                  <a:lnTo>
+                    <a:pt x="2962987" y="997102"/>
+                  </a:lnTo>
+                  <a:lnTo>
+                    <a:pt x="3033332" y="1000000"/>
+                  </a:lnTo>
+                  <a:lnTo>
+                    <a:pt x="3103676" y="1002865"/>
+                  </a:lnTo>
+                  <a:lnTo>
+                    <a:pt x="3174021" y="1005699"/>
+                  </a:lnTo>
+                  <a:lnTo>
+                    <a:pt x="3244365" y="1008501"/>
+                  </a:lnTo>
+                  <a:lnTo>
+                    <a:pt x="3314710" y="1011272"/>
+                  </a:lnTo>
+                  <a:lnTo>
+                    <a:pt x="3385054" y="1014012"/>
+                  </a:lnTo>
+                  <a:lnTo>
+                    <a:pt x="3455399" y="1016721"/>
+                  </a:lnTo>
+                  <a:lnTo>
+                    <a:pt x="3525743" y="1019401"/>
+                  </a:lnTo>
+                  <a:lnTo>
+                    <a:pt x="3596088" y="1022050"/>
+                  </a:lnTo>
+                  <a:lnTo>
+                    <a:pt x="3666432" y="1024670"/>
+                  </a:lnTo>
+                  <a:lnTo>
+                    <a:pt x="3736777" y="1027261"/>
+                  </a:lnTo>
+                  <a:lnTo>
+                    <a:pt x="3807121" y="1029823"/>
+                  </a:lnTo>
+                  <a:lnTo>
+                    <a:pt x="3877466" y="1032356"/>
+                  </a:lnTo>
+                  <a:lnTo>
+                    <a:pt x="3947810" y="1034861"/>
+                  </a:lnTo>
+                  <a:lnTo>
+                    <a:pt x="4018155" y="1037338"/>
+                  </a:lnTo>
+                  <a:lnTo>
+                    <a:pt x="4088499" y="1039788"/>
+                  </a:lnTo>
+                  <a:lnTo>
+                    <a:pt x="4158844" y="1042210"/>
+                  </a:lnTo>
+                  <a:lnTo>
+                    <a:pt x="4229188" y="1044605"/>
+                  </a:lnTo>
+                  <a:lnTo>
+                    <a:pt x="4299533" y="1046974"/>
+                  </a:lnTo>
+                  <a:lnTo>
+                    <a:pt x="4369877" y="1049316"/>
+                  </a:lnTo>
+                  <a:lnTo>
+                    <a:pt x="4440222" y="1051632"/>
+                  </a:lnTo>
+                  <a:lnTo>
+                    <a:pt x="4510566" y="1053923"/>
+                  </a:lnTo>
+                  <a:lnTo>
+                    <a:pt x="4580911" y="1056187"/>
+                  </a:lnTo>
+                  <a:lnTo>
+                    <a:pt x="4651255" y="1058427"/>
+                  </a:lnTo>
+                  <a:lnTo>
+                    <a:pt x="4721600" y="1060642"/>
+                  </a:lnTo>
+                  <a:lnTo>
+                    <a:pt x="4791944" y="1062832"/>
+                  </a:lnTo>
+                  <a:lnTo>
+                    <a:pt x="4862289" y="1064997"/>
+                  </a:lnTo>
+                  <a:lnTo>
+                    <a:pt x="4932633" y="1067139"/>
+                  </a:lnTo>
+                  <a:lnTo>
+                    <a:pt x="5002978" y="1069256"/>
+                  </a:lnTo>
+                  <a:lnTo>
+                    <a:pt x="5073322" y="1071350"/>
+                  </a:lnTo>
+                  <a:lnTo>
+                    <a:pt x="5143667" y="1073421"/>
+                  </a:lnTo>
+                  <a:lnTo>
+                    <a:pt x="5214011" y="1075468"/>
+                  </a:lnTo>
+                  <a:lnTo>
+                    <a:pt x="5284356" y="1077493"/>
+                  </a:lnTo>
+                  <a:lnTo>
+                    <a:pt x="5354700" y="1079495"/>
+                  </a:lnTo>
+                  <a:lnTo>
+                    <a:pt x="5425045" y="1081475"/>
+                  </a:lnTo>
+                  <a:lnTo>
+                    <a:pt x="5495389" y="1083433"/>
+                  </a:lnTo>
+                  <a:lnTo>
+                    <a:pt x="5565734" y="1085369"/>
+                  </a:lnTo>
+                  <a:lnTo>
+                    <a:pt x="5636078" y="1087283"/>
+                  </a:lnTo>
+                  <a:lnTo>
+                    <a:pt x="5706423" y="1089177"/>
+                  </a:lnTo>
+                  <a:lnTo>
+                    <a:pt x="5776767" y="1091049"/>
+                  </a:lnTo>
+                  <a:lnTo>
+                    <a:pt x="5847112" y="1092900"/>
+                  </a:lnTo>
+                  <a:lnTo>
+                    <a:pt x="5917456" y="1094730"/>
+                  </a:lnTo>
+                  <a:lnTo>
+                    <a:pt x="5987800" y="1096540"/>
+                  </a:lnTo>
+                </a:path>
+              </a:pathLst>
+            </a:custGeom>
+          </p:spPr>
+          <p:txBody>
+            <a:bodyPr/>
+            <a:lstStyle/>
+            <a:p/>
+          </p:txBody>
+        </p:sp>
+        <p:sp>
+          <p:nvSpPr>
+            <p:cNvPr id="73" name="pl73"/>
+            <p:cNvSpPr/>
+            <p:nvPr/>
+          </p:nvSpPr>
+          <p:spPr>
+            <a:xfrm>
+              <a:off x="1235312" y="5106580"/>
+              <a:ext cx="6964104" cy="466872"/>
+            </a:xfrm>
+            <a:custGeom>
+              <a:avLst/>
+              <a:pathLst>
+                <a:path w="6964104" h="466872">
+                  <a:moveTo>
+                    <a:pt x="6964104" y="466872"/>
+                  </a:moveTo>
+                  <a:lnTo>
+                    <a:pt x="6893760" y="465866"/>
+                  </a:lnTo>
+                  <a:lnTo>
+                    <a:pt x="6823415" y="464810"/>
+                  </a:lnTo>
+                  <a:lnTo>
+                    <a:pt x="6753071" y="463702"/>
+                  </a:lnTo>
+                  <a:lnTo>
+                    <a:pt x="6682726" y="462539"/>
+                  </a:lnTo>
+                  <a:lnTo>
+                    <a:pt x="6612382" y="461318"/>
+                  </a:lnTo>
+                  <a:lnTo>
+                    <a:pt x="6542037" y="460036"/>
+                  </a:lnTo>
+                  <a:lnTo>
+                    <a:pt x="6471693" y="458690"/>
+                  </a:lnTo>
+                  <a:lnTo>
+                    <a:pt x="6401348" y="457278"/>
+                  </a:lnTo>
+                  <a:lnTo>
+                    <a:pt x="6331004" y="455795"/>
+                  </a:lnTo>
+                  <a:lnTo>
+                    <a:pt x="6260659" y="454239"/>
+                  </a:lnTo>
+                  <a:lnTo>
+                    <a:pt x="6190315" y="452605"/>
+                  </a:lnTo>
+                  <a:lnTo>
+                    <a:pt x="6119970" y="450890"/>
+                  </a:lnTo>
+                  <a:lnTo>
+                    <a:pt x="6049626" y="449090"/>
+                  </a:lnTo>
+                  <a:lnTo>
+                    <a:pt x="5979281" y="447201"/>
+                  </a:lnTo>
+                  <a:lnTo>
+                    <a:pt x="5908937" y="445217"/>
+                  </a:lnTo>
+                  <a:lnTo>
+                    <a:pt x="5838592" y="443135"/>
+                  </a:lnTo>
+                  <a:lnTo>
+                    <a:pt x="5768248" y="440950"/>
+                  </a:lnTo>
+                  <a:lnTo>
+                    <a:pt x="5697903" y="438655"/>
+                  </a:lnTo>
+                  <a:lnTo>
+                    <a:pt x="5627559" y="436247"/>
+                  </a:lnTo>
+                  <a:lnTo>
+                    <a:pt x="5557214" y="433719"/>
+                  </a:lnTo>
+                  <a:lnTo>
+                    <a:pt x="5486870" y="431066"/>
+                  </a:lnTo>
+                  <a:lnTo>
+                    <a:pt x="5416525" y="428280"/>
+                  </a:lnTo>
+                  <a:lnTo>
+                    <a:pt x="5346181" y="425356"/>
+                  </a:lnTo>
+                  <a:lnTo>
+                    <a:pt x="5275836" y="422287"/>
+                  </a:lnTo>
+                  <a:lnTo>
+                    <a:pt x="5205492" y="419065"/>
+                  </a:lnTo>
+                  <a:lnTo>
+                    <a:pt x="5135147" y="415683"/>
+                  </a:lnTo>
+                  <a:lnTo>
+                    <a:pt x="5064803" y="412133"/>
+                  </a:lnTo>
+                  <a:lnTo>
+                    <a:pt x="4994458" y="408407"/>
+                  </a:lnTo>
+                  <a:lnTo>
+                    <a:pt x="4924114" y="404495"/>
+                  </a:lnTo>
+                  <a:lnTo>
+                    <a:pt x="4853769" y="400389"/>
+                  </a:lnTo>
+                  <a:lnTo>
+                    <a:pt x="4783425" y="396078"/>
+                  </a:lnTo>
+                  <a:lnTo>
+                    <a:pt x="4713080" y="391554"/>
+                  </a:lnTo>
+                  <a:lnTo>
+                    <a:pt x="4642736" y="386805"/>
+                  </a:lnTo>
+                  <a:lnTo>
+                    <a:pt x="4572391" y="381819"/>
+                  </a:lnTo>
+                  <a:lnTo>
+                    <a:pt x="4502047" y="376586"/>
+                  </a:lnTo>
+                  <a:lnTo>
+                    <a:pt x="4431702" y="371093"/>
+                  </a:lnTo>
+                  <a:lnTo>
+                    <a:pt x="4361358" y="365326"/>
+                  </a:lnTo>
+                  <a:lnTo>
+                    <a:pt x="4291013" y="359273"/>
+                  </a:lnTo>
+                  <a:lnTo>
+                    <a:pt x="4220669" y="352919"/>
+                  </a:lnTo>
+                  <a:lnTo>
+                    <a:pt x="4150324" y="346249"/>
+                  </a:lnTo>
+                  <a:lnTo>
+                    <a:pt x="4079980" y="339248"/>
+                  </a:lnTo>
+                  <a:lnTo>
+                    <a:pt x="4009635" y="331899"/>
+                  </a:lnTo>
+                  <a:lnTo>
+                    <a:pt x="3939291" y="324184"/>
+                  </a:lnTo>
+                  <a:lnTo>
+                    <a:pt x="3868946" y="316086"/>
+                  </a:lnTo>
+                  <a:lnTo>
+                    <a:pt x="3798602" y="307586"/>
+                  </a:lnTo>
+                  <a:lnTo>
+                    <a:pt x="3728257" y="298663"/>
+                  </a:lnTo>
+                  <a:lnTo>
+                    <a:pt x="3657913" y="289296"/>
+                  </a:lnTo>
+                  <a:lnTo>
+                    <a:pt x="3587569" y="279464"/>
+                  </a:lnTo>
+                  <a:lnTo>
+                    <a:pt x="3517224" y="269144"/>
+                  </a:lnTo>
+                  <a:lnTo>
+                    <a:pt x="3446880" y="258310"/>
+                  </a:lnTo>
+                  <a:lnTo>
+                    <a:pt x="3376535" y="246938"/>
+                  </a:lnTo>
+                  <a:lnTo>
+                    <a:pt x="3306191" y="235000"/>
+                  </a:lnTo>
+                  <a:lnTo>
+                    <a:pt x="3235846" y="222469"/>
+                  </a:lnTo>
+                  <a:lnTo>
+                    <a:pt x="3165502" y="209316"/>
+                  </a:lnTo>
+                  <a:lnTo>
+                    <a:pt x="3095157" y="195508"/>
+                  </a:lnTo>
+                  <a:lnTo>
+                    <a:pt x="3024813" y="186225"/>
+                  </a:lnTo>
+                  <a:lnTo>
+                    <a:pt x="2954468" y="182835"/>
+                  </a:lnTo>
+                  <a:lnTo>
+                    <a:pt x="2884124" y="179407"/>
+                  </a:lnTo>
+                  <a:lnTo>
+                    <a:pt x="2813779" y="175940"/>
+                  </a:lnTo>
+                  <a:lnTo>
+                    <a:pt x="2743435" y="172434"/>
+                  </a:lnTo>
+                  <a:lnTo>
+                    <a:pt x="2673090" y="168889"/>
+                  </a:lnTo>
+                  <a:lnTo>
+                    <a:pt x="2602746" y="165303"/>
+                  </a:lnTo>
+                  <a:lnTo>
+                    <a:pt x="2532401" y="161678"/>
+                  </a:lnTo>
+                  <a:lnTo>
+                    <a:pt x="2462057" y="158011"/>
+                  </a:lnTo>
+                  <a:lnTo>
+                    <a:pt x="2391712" y="154303"/>
+                  </a:lnTo>
+                  <a:lnTo>
+                    <a:pt x="2321368" y="150553"/>
+                  </a:lnTo>
+                  <a:lnTo>
+                    <a:pt x="2251023" y="146762"/>
+                  </a:lnTo>
+                  <a:lnTo>
+                    <a:pt x="2180679" y="142927"/>
+                  </a:lnTo>
+                  <a:lnTo>
+                    <a:pt x="2110334" y="139049"/>
+                  </a:lnTo>
+                  <a:lnTo>
+                    <a:pt x="2039990" y="135128"/>
+                  </a:lnTo>
+                  <a:lnTo>
+                    <a:pt x="1969645" y="131162"/>
+                  </a:lnTo>
+                  <a:lnTo>
+                    <a:pt x="1899301" y="127151"/>
+                  </a:lnTo>
+                  <a:lnTo>
+                    <a:pt x="1828956" y="123096"/>
+                  </a:lnTo>
+                  <a:lnTo>
+                    <a:pt x="1758612" y="118995"/>
+                  </a:lnTo>
+                  <a:lnTo>
+                    <a:pt x="1688267" y="114847"/>
+                  </a:lnTo>
+                  <a:lnTo>
+                    <a:pt x="1617923" y="110653"/>
+                  </a:lnTo>
+                  <a:lnTo>
+                    <a:pt x="1547578" y="106412"/>
+                  </a:lnTo>
+                  <a:lnTo>
+                    <a:pt x="1477234" y="102122"/>
+                  </a:lnTo>
+                  <a:lnTo>
+                    <a:pt x="1406889" y="97785"/>
+                  </a:lnTo>
+                  <a:lnTo>
+                    <a:pt x="1336545" y="93398"/>
+                  </a:lnTo>
+                  <a:lnTo>
+                    <a:pt x="1266200" y="88962"/>
+                  </a:lnTo>
+                  <a:lnTo>
+                    <a:pt x="1195856" y="84477"/>
+                  </a:lnTo>
+                  <a:lnTo>
+                    <a:pt x="1125511" y="79940"/>
+                  </a:lnTo>
+                  <a:lnTo>
+                    <a:pt x="1055167" y="75353"/>
+                  </a:lnTo>
+                  <a:lnTo>
+                    <a:pt x="984822" y="70714"/>
+                  </a:lnTo>
+                  <a:lnTo>
+                    <a:pt x="914478" y="66022"/>
+                  </a:lnTo>
+                  <a:lnTo>
+                    <a:pt x="844133" y="61278"/>
+                  </a:lnTo>
+                  <a:lnTo>
+                    <a:pt x="773789" y="56480"/>
+                  </a:lnTo>
+                  <a:lnTo>
+                    <a:pt x="703444" y="51628"/>
+                  </a:lnTo>
+                  <a:lnTo>
+                    <a:pt x="633100" y="46722"/>
+                  </a:lnTo>
+                  <a:lnTo>
+                    <a:pt x="562755" y="41760"/>
+                  </a:lnTo>
+                  <a:lnTo>
+                    <a:pt x="492411" y="36742"/>
+                  </a:lnTo>
+                  <a:lnTo>
+                    <a:pt x="422066" y="31668"/>
+                  </a:lnTo>
+                  <a:lnTo>
+                    <a:pt x="351722" y="26537"/>
+                  </a:lnTo>
+                  <a:lnTo>
+                    <a:pt x="281377" y="21348"/>
+                  </a:lnTo>
+                  <a:lnTo>
+                    <a:pt x="211033" y="16100"/>
+                  </a:lnTo>
+                  <a:lnTo>
+                    <a:pt x="140688" y="10793"/>
+                  </a:lnTo>
+                  <a:lnTo>
+                    <a:pt x="70344" y="5427"/>
+                  </a:lnTo>
+                  <a:lnTo>
+                    <a:pt x="0" y="0"/>
+                  </a:lnTo>
+                </a:path>
+              </a:pathLst>
+            </a:custGeom>
+          </p:spPr>
+          <p:txBody>
+            <a:bodyPr/>
+            <a:lstStyle/>
+            <a:p/>
+          </p:txBody>
+        </p:sp>
+        <p:sp>
+          <p:nvSpPr>
+            <p:cNvPr id="74" name="pl74"/>
+            <p:cNvSpPr/>
+            <p:nvPr/>
+          </p:nvSpPr>
+          <p:spPr>
+            <a:xfrm>
+              <a:off x="1235312" y="4498012"/>
+              <a:ext cx="6964104" cy="1038657"/>
+            </a:xfrm>
+            <a:custGeom>
+              <a:avLst/>
+              <a:pathLst>
+                <a:path w="6964104" h="1038657">
+                  <a:moveTo>
+                    <a:pt x="0" y="0"/>
+                  </a:moveTo>
+                  <a:lnTo>
+                    <a:pt x="70344" y="32229"/>
+                  </a:lnTo>
+                  <a:lnTo>
+                    <a:pt x="140688" y="63510"/>
+                  </a:lnTo>
+                  <a:lnTo>
+                    <a:pt x="211033" y="93871"/>
+                  </a:lnTo>
+                  <a:lnTo>
+                    <a:pt x="281377" y="123339"/>
+                  </a:lnTo>
+                  <a:lnTo>
+                    <a:pt x="351722" y="151941"/>
+                  </a:lnTo>
+                  <a:lnTo>
+                    <a:pt x="422066" y="179701"/>
+                  </a:lnTo>
+                  <a:lnTo>
+                    <a:pt x="492411" y="206644"/>
+                  </a:lnTo>
+                  <a:lnTo>
+                    <a:pt x="562755" y="232795"/>
+                  </a:lnTo>
+                  <a:lnTo>
+                    <a:pt x="633100" y="258177"/>
+                  </a:lnTo>
+                  <a:lnTo>
+                    <a:pt x="703444" y="282812"/>
+                  </a:lnTo>
+                  <a:lnTo>
+                    <a:pt x="773789" y="306722"/>
+                  </a:lnTo>
+                  <a:lnTo>
+                    <a:pt x="844133" y="329929"/>
+                  </a:lnTo>
+                  <a:lnTo>
+                    <a:pt x="914478" y="352453"/>
+                  </a:lnTo>
+                  <a:lnTo>
+                    <a:pt x="984822" y="374315"/>
+                  </a:lnTo>
+                  <a:lnTo>
+                    <a:pt x="1055167" y="395534"/>
+                  </a:lnTo>
+                  <a:lnTo>
+                    <a:pt x="1125511" y="416129"/>
+                  </a:lnTo>
+                  <a:lnTo>
+                    <a:pt x="1195856" y="436118"/>
+                  </a:lnTo>
+                  <a:lnTo>
+                    <a:pt x="1266200" y="455519"/>
+                  </a:lnTo>
+                  <a:lnTo>
+                    <a:pt x="1336545" y="474349"/>
+                  </a:lnTo>
+                  <a:lnTo>
+                    <a:pt x="1406889" y="492625"/>
+                  </a:lnTo>
+                  <a:lnTo>
+                    <a:pt x="1477234" y="510364"/>
+                  </a:lnTo>
+                  <a:lnTo>
+                    <a:pt x="1547578" y="527581"/>
+                  </a:lnTo>
+                  <a:lnTo>
+                    <a:pt x="1617923" y="544291"/>
+                  </a:lnTo>
+                  <a:lnTo>
+                    <a:pt x="1688267" y="560510"/>
+                  </a:lnTo>
+                  <a:lnTo>
+                    <a:pt x="1758612" y="576252"/>
+                  </a:lnTo>
+                  <a:lnTo>
+                    <a:pt x="1828956" y="591531"/>
+                  </a:lnTo>
+                  <a:lnTo>
+                    <a:pt x="1899301" y="606360"/>
+                  </a:lnTo>
+                  <a:lnTo>
+                    <a:pt x="1969645" y="620753"/>
+                  </a:lnTo>
+                  <a:lnTo>
+                    <a:pt x="2039990" y="634723"/>
+                  </a:lnTo>
+                  <a:lnTo>
+                    <a:pt x="2110334" y="648282"/>
+                  </a:lnTo>
+                  <a:lnTo>
+                    <a:pt x="2180679" y="661442"/>
+                  </a:lnTo>
+                  <a:lnTo>
+                    <a:pt x="2251023" y="674215"/>
+                  </a:lnTo>
+                  <a:lnTo>
+                    <a:pt x="2321368" y="686612"/>
+                  </a:lnTo>
+                  <a:lnTo>
+                    <a:pt x="2391712" y="698645"/>
+                  </a:lnTo>
+                  <a:lnTo>
+                    <a:pt x="2462057" y="710324"/>
+                  </a:lnTo>
+                  <a:lnTo>
+                    <a:pt x="2532401" y="721659"/>
+                  </a:lnTo>
+                  <a:lnTo>
+                    <a:pt x="2602746" y="732660"/>
+                  </a:lnTo>
+                  <a:lnTo>
+                    <a:pt x="2673090" y="743338"/>
+                  </a:lnTo>
+                  <a:lnTo>
+                    <a:pt x="2743435" y="753702"/>
+                  </a:lnTo>
+                  <a:lnTo>
+                    <a:pt x="2813779" y="763761"/>
+                  </a:lnTo>
+                  <a:lnTo>
+                    <a:pt x="2884124" y="773525"/>
+                  </a:lnTo>
+                  <a:lnTo>
+                    <a:pt x="2954468" y="783001"/>
+                  </a:lnTo>
+                  <a:lnTo>
+                    <a:pt x="3024813" y="792198"/>
+                  </a:lnTo>
+                  <a:lnTo>
+                    <a:pt x="3095157" y="801125"/>
+                  </a:lnTo>
+                  <a:lnTo>
+                    <a:pt x="3165502" y="809789"/>
+                  </a:lnTo>
+                  <a:lnTo>
+                    <a:pt x="3235846" y="818198"/>
+                  </a:lnTo>
+                  <a:lnTo>
+                    <a:pt x="3306191" y="826360"/>
+                  </a:lnTo>
+                  <a:lnTo>
+                    <a:pt x="3376535" y="834282"/>
+                  </a:lnTo>
+                  <a:lnTo>
+                    <a:pt x="3446880" y="841971"/>
+                  </a:lnTo>
+                  <a:lnTo>
+                    <a:pt x="3517224" y="849434"/>
+                  </a:lnTo>
+                  <a:lnTo>
+                    <a:pt x="3587569" y="856677"/>
+                  </a:lnTo>
+                  <a:lnTo>
+                    <a:pt x="3657913" y="863707"/>
+                  </a:lnTo>
+                  <a:lnTo>
+                    <a:pt x="3728257" y="870530"/>
+                  </a:lnTo>
+                  <a:lnTo>
+                    <a:pt x="3798602" y="877153"/>
+                  </a:lnTo>
+                  <a:lnTo>
+                    <a:pt x="3868946" y="883581"/>
+                  </a:lnTo>
+                  <a:lnTo>
+                    <a:pt x="3939291" y="889819"/>
+                  </a:lnTo>
+                  <a:lnTo>
+                    <a:pt x="4009635" y="895874"/>
+                  </a:lnTo>
+                  <a:lnTo>
+                    <a:pt x="4079980" y="901752"/>
+                  </a:lnTo>
+                  <a:lnTo>
+                    <a:pt x="4150324" y="907456"/>
+                  </a:lnTo>
+                  <a:lnTo>
+                    <a:pt x="4220669" y="912992"/>
+                  </a:lnTo>
+                  <a:lnTo>
+                    <a:pt x="4291013" y="918366"/>
+                  </a:lnTo>
+                  <a:lnTo>
+                    <a:pt x="4361358" y="923581"/>
+                  </a:lnTo>
+                  <a:lnTo>
+                    <a:pt x="4431702" y="928643"/>
+                  </a:lnTo>
+                  <a:lnTo>
+                    <a:pt x="4502047" y="933557"/>
+                  </a:lnTo>
+                  <a:lnTo>
+                    <a:pt x="4572391" y="938325"/>
+                  </a:lnTo>
+                  <a:lnTo>
+                    <a:pt x="4642736" y="942954"/>
+                  </a:lnTo>
+                  <a:lnTo>
+                    <a:pt x="4713080" y="947446"/>
+                  </a:lnTo>
+                  <a:lnTo>
+                    <a:pt x="4783425" y="951806"/>
+                  </a:lnTo>
+                  <a:lnTo>
+                    <a:pt x="4853769" y="956038"/>
+                  </a:lnTo>
+                  <a:lnTo>
+                    <a:pt x="4924114" y="960145"/>
+                  </a:lnTo>
+                  <a:lnTo>
+                    <a:pt x="4994458" y="964132"/>
+                  </a:lnTo>
+                  <a:lnTo>
+                    <a:pt x="5064803" y="968001"/>
+                  </a:lnTo>
+                  <a:lnTo>
+                    <a:pt x="5135147" y="971757"/>
+                  </a:lnTo>
+                  <a:lnTo>
+                    <a:pt x="5205492" y="975402"/>
+                  </a:lnTo>
+                  <a:lnTo>
+                    <a:pt x="5275836" y="978940"/>
+                  </a:lnTo>
+                  <a:lnTo>
+                    <a:pt x="5346181" y="982373"/>
+                  </a:lnTo>
+                  <a:lnTo>
+                    <a:pt x="5416525" y="985706"/>
+                  </a:lnTo>
+                  <a:lnTo>
+                    <a:pt x="5486870" y="988941"/>
+                  </a:lnTo>
+                  <a:lnTo>
+                    <a:pt x="5557214" y="992080"/>
+                  </a:lnTo>
+                  <a:lnTo>
+                    <a:pt x="5627559" y="995127"/>
+                  </a:lnTo>
+                  <a:lnTo>
+                    <a:pt x="5697903" y="998085"/>
+                  </a:lnTo>
+                  <a:lnTo>
+                    <a:pt x="5768248" y="1000956"/>
+                  </a:lnTo>
+                  <a:lnTo>
+                    <a:pt x="5838592" y="1003742"/>
+                  </a:lnTo>
+                  <a:lnTo>
+                    <a:pt x="5908937" y="1006446"/>
+                  </a:lnTo>
+                  <a:lnTo>
+                    <a:pt x="5979281" y="1009071"/>
+                  </a:lnTo>
+                  <a:lnTo>
+                    <a:pt x="6049626" y="1011618"/>
+                  </a:lnTo>
+                  <a:lnTo>
+                    <a:pt x="6119970" y="1014090"/>
+                  </a:lnTo>
+                  <a:lnTo>
+                    <a:pt x="6190315" y="1016490"/>
+                  </a:lnTo>
+                  <a:lnTo>
+                    <a:pt x="6260659" y="1018819"/>
+                  </a:lnTo>
+                  <a:lnTo>
+                    <a:pt x="6331004" y="1021080"/>
+                  </a:lnTo>
+                  <a:lnTo>
+                    <a:pt x="6401348" y="1023274"/>
+                  </a:lnTo>
+                  <a:lnTo>
+                    <a:pt x="6471693" y="1025404"/>
+                  </a:lnTo>
+                  <a:lnTo>
+                    <a:pt x="6542037" y="1027471"/>
+                  </a:lnTo>
+                  <a:lnTo>
+                    <a:pt x="6612382" y="1029477"/>
+                  </a:lnTo>
+                  <a:lnTo>
+                    <a:pt x="6682726" y="1031424"/>
+                  </a:lnTo>
+                  <a:lnTo>
+                    <a:pt x="6753071" y="1033314"/>
+                  </a:lnTo>
+                  <a:lnTo>
+                    <a:pt x="6823415" y="1035148"/>
+                  </a:lnTo>
+                  <a:lnTo>
+                    <a:pt x="6893760" y="1036929"/>
+                  </a:lnTo>
+                  <a:lnTo>
+                    <a:pt x="6964104" y="1038657"/>
+                  </a:lnTo>
+                </a:path>
+              </a:pathLst>
+            </a:custGeom>
+            <a:ln w="27101" cap="flat">
+              <a:solidFill>
+                <a:srgbClr val="FF8C00">
+                  <a:alpha val="100000"/>
+                </a:srgbClr>
+              </a:solidFill>
+              <a:prstDash val="solid"/>
+              <a:round/>
+            </a:ln>
+          </p:spPr>
+          <p:txBody>
+            <a:bodyPr/>
+            <a:lstStyle/>
+            <a:p/>
+          </p:txBody>
+        </p:sp>
+        <p:sp>
+          <p:nvSpPr>
+            <p:cNvPr id="75" name="pl75"/>
+            <p:cNvSpPr/>
+            <p:nvPr/>
+          </p:nvSpPr>
+          <p:spPr>
+            <a:xfrm>
+              <a:off x="887106" y="5294352"/>
+              <a:ext cx="7660515" cy="0"/>
+            </a:xfrm>
+            <a:custGeom>
+              <a:avLst/>
+              <a:pathLst>
+                <a:path w="7660515" h="0">
+                  <a:moveTo>
+                    <a:pt x="0" y="0"/>
+                  </a:moveTo>
+                  <a:lnTo>
+                    <a:pt x="7660515" y="0"/>
+                  </a:lnTo>
+                  <a:lnTo>
+                    <a:pt x="7660515" y="0"/>
+                  </a:lnTo>
+                </a:path>
+              </a:pathLst>
+            </a:custGeom>
+            <a:ln w="13550" cap="flat">
+              <a:solidFill>
+                <a:srgbClr val="7F7F7F">
+                  <a:alpha val="100000"/>
+                </a:srgbClr>
+              </a:solidFill>
+              <a:prstDash val="dash"/>
+              <a:round/>
+            </a:ln>
+          </p:spPr>
+          <p:txBody>
+            <a:bodyPr/>
+            <a:lstStyle/>
+            <a:p/>
+          </p:txBody>
+        </p:sp>
+        <p:sp>
+          <p:nvSpPr>
+            <p:cNvPr id="76" name="pl76"/>
+            <p:cNvSpPr/>
+            <p:nvPr/>
+          </p:nvSpPr>
+          <p:spPr>
+            <a:xfrm>
+              <a:off x="4292500" y="4336484"/>
+              <a:ext cx="0" cy="1317069"/>
+            </a:xfrm>
+            <a:custGeom>
+              <a:avLst/>
+              <a:pathLst>
+                <a:path w="0" h="1317069">
+                  <a:moveTo>
+                    <a:pt x="0" y="1317069"/>
+                  </a:moveTo>
+                  <a:lnTo>
+                    <a:pt x="0" y="0"/>
+                  </a:lnTo>
+                  <a:lnTo>
+                    <a:pt x="0" y="0"/>
+                  </a:lnTo>
+                </a:path>
+              </a:pathLst>
+            </a:custGeom>
+            <a:ln w="13550" cap="flat">
+              <a:solidFill>
+                <a:srgbClr val="666666">
+                  <a:alpha val="100000"/>
+                </a:srgbClr>
+              </a:solidFill>
+              <a:prstDash val="dot"/>
+              <a:round/>
+            </a:ln>
+          </p:spPr>
+          <p:txBody>
+            <a:bodyPr/>
+            <a:lstStyle/>
+            <a:p/>
+          </p:txBody>
+        </p:sp>
+        <p:sp>
+          <p:nvSpPr>
+            <p:cNvPr id="77" name="pl77"/>
+            <p:cNvSpPr/>
+            <p:nvPr/>
+          </p:nvSpPr>
+          <p:spPr>
+            <a:xfrm>
+              <a:off x="3124839" y="4336484"/>
+              <a:ext cx="0" cy="1317069"/>
+            </a:xfrm>
+            <a:custGeom>
+              <a:avLst/>
+              <a:pathLst>
+                <a:path w="0" h="1317069">
+                  <a:moveTo>
+                    <a:pt x="0" y="1317069"/>
+                  </a:moveTo>
+                  <a:lnTo>
+                    <a:pt x="0" y="0"/>
+                  </a:lnTo>
+                  <a:lnTo>
+                    <a:pt x="0" y="0"/>
+                  </a:lnTo>
+                </a:path>
+              </a:pathLst>
+            </a:custGeom>
+            <a:ln w="13550" cap="flat">
+              <a:solidFill>
+                <a:srgbClr val="4682B4">
+                  <a:alpha val="69803"/>
+                </a:srgbClr>
+              </a:solidFill>
+              <a:prstDash val="dash"/>
+              <a:round/>
+            </a:ln>
+          </p:spPr>
+          <p:txBody>
+            <a:bodyPr/>
+            <a:lstStyle/>
+            <a:p/>
+          </p:txBody>
+        </p:sp>
+        <p:sp>
+          <p:nvSpPr>
+            <p:cNvPr id="78" name="pl78"/>
+            <p:cNvSpPr/>
+            <p:nvPr/>
+          </p:nvSpPr>
+          <p:spPr>
+            <a:xfrm>
+              <a:off x="5508592" y="4336484"/>
+              <a:ext cx="0" cy="1317069"/>
+            </a:xfrm>
+            <a:custGeom>
+              <a:avLst/>
+              <a:pathLst>
+                <a:path w="0" h="1317069">
+                  <a:moveTo>
+                    <a:pt x="0" y="1317069"/>
+                  </a:moveTo>
+                  <a:lnTo>
+                    <a:pt x="0" y="0"/>
+                  </a:lnTo>
+                  <a:lnTo>
+                    <a:pt x="0" y="0"/>
+                  </a:lnTo>
+                </a:path>
+              </a:pathLst>
+            </a:custGeom>
+            <a:ln w="13550" cap="flat">
+              <a:solidFill>
+                <a:srgbClr val="4682B4">
+                  <a:alpha val="69803"/>
+                </a:srgbClr>
+              </a:solidFill>
+              <a:prstDash val="dash"/>
+              <a:round/>
+            </a:ln>
+          </p:spPr>
+          <p:txBody>
+            <a:bodyPr/>
+            <a:lstStyle/>
+            <a:p/>
+          </p:txBody>
+        </p:sp>
+        <p:sp>
+          <p:nvSpPr>
+            <p:cNvPr id="79" name="tx79"/>
+            <p:cNvSpPr/>
+            <p:nvPr/>
+          </p:nvSpPr>
+          <p:spPr>
+            <a:xfrm>
+              <a:off x="762297" y="5553636"/>
+              <a:ext cx="62179" cy="80101"/>
+            </a:xfrm>
+            <a:prstGeom prst="rect">
+              <a:avLst/>
+            </a:prstGeom>
+            <a:noFill/>
+          </p:spPr>
+          <p:txBody>
+            <a:bodyPr lIns="0" rIns="0" tIns="0" bIns="0" anchorCtr="1" anchor="ctr" wrap="none"/>
+            <a:lstStyle/>
+            <a:p>
+              <a:pPr algn="l" marL="0" marR="0" indent="0">
+                <a:lnSpc>
+                  <a:spcPts val="880"/>
+                </a:lnSpc>
+                <a:spcBef>
+                  <a:spcPts val="0"/>
+                </a:spcBef>
+                <a:spcAft>
+                  <a:spcPts val="0"/>
+                </a:spcAft>
+              </a:pPr>
+              <a:r>
+                <a:rPr sz="880">
+                  <a:solidFill>
+                    <a:srgbClr val="4D4D4D">
+                      <a:alpha val="100000"/>
+                    </a:srgbClr>
+                  </a:solidFill>
+                  <a:latin typeface="Helvetica"/>
+                  <a:cs typeface="Helvetica"/>
+                </a:rPr>
+                <a:t>0</a:t>
+              </a:r>
+            </a:p>
+          </p:txBody>
+        </p:sp>
+        <p:sp>
+          <p:nvSpPr>
+            <p:cNvPr id="80" name="tx80"/>
+            <p:cNvSpPr/>
+            <p:nvPr/>
+          </p:nvSpPr>
+          <p:spPr>
+            <a:xfrm>
+              <a:off x="762297" y="5254302"/>
+              <a:ext cx="62179" cy="80101"/>
+            </a:xfrm>
+            <a:prstGeom prst="rect">
+              <a:avLst/>
+            </a:prstGeom>
+            <a:noFill/>
+          </p:spPr>
+          <p:txBody>
+            <a:bodyPr lIns="0" rIns="0" tIns="0" bIns="0" anchorCtr="1" anchor="ctr" wrap="none"/>
+            <a:lstStyle/>
+            <a:p>
+              <a:pPr algn="l" marL="0" marR="0" indent="0">
+                <a:lnSpc>
+                  <a:spcPts val="880"/>
+                </a:lnSpc>
+                <a:spcBef>
+                  <a:spcPts val="0"/>
+                </a:spcBef>
+                <a:spcAft>
+                  <a:spcPts val="0"/>
+                </a:spcAft>
+              </a:pPr>
+              <a:r>
+                <a:rPr sz="880">
+                  <a:solidFill>
+                    <a:srgbClr val="4D4D4D">
+                      <a:alpha val="100000"/>
+                    </a:srgbClr>
+                  </a:solidFill>
+                  <a:latin typeface="Helvetica"/>
+                  <a:cs typeface="Helvetica"/>
+                </a:rPr>
+                <a:t>1</a:t>
+              </a:r>
+            </a:p>
+          </p:txBody>
+        </p:sp>
+        <p:sp>
+          <p:nvSpPr>
+            <p:cNvPr id="81" name="tx81"/>
+            <p:cNvSpPr/>
+            <p:nvPr/>
+          </p:nvSpPr>
+          <p:spPr>
+            <a:xfrm>
+              <a:off x="762297" y="4954968"/>
+              <a:ext cx="62179" cy="80101"/>
+            </a:xfrm>
+            <a:prstGeom prst="rect">
+              <a:avLst/>
+            </a:prstGeom>
+            <a:noFill/>
+          </p:spPr>
+          <p:txBody>
+            <a:bodyPr lIns="0" rIns="0" tIns="0" bIns="0" anchorCtr="1" anchor="ctr" wrap="none"/>
+            <a:lstStyle/>
+            <a:p>
+              <a:pPr algn="l" marL="0" marR="0" indent="0">
+                <a:lnSpc>
+                  <a:spcPts val="880"/>
+                </a:lnSpc>
+                <a:spcBef>
+                  <a:spcPts val="0"/>
+                </a:spcBef>
+                <a:spcAft>
+                  <a:spcPts val="0"/>
+                </a:spcAft>
+              </a:pPr>
+              <a:r>
+                <a:rPr sz="880">
+                  <a:solidFill>
+                    <a:srgbClr val="4D4D4D">
+                      <a:alpha val="100000"/>
+                    </a:srgbClr>
+                  </a:solidFill>
+                  <a:latin typeface="Helvetica"/>
+                  <a:cs typeface="Helvetica"/>
+                </a:rPr>
+                <a:t>2</a:t>
+              </a:r>
+            </a:p>
+          </p:txBody>
+        </p:sp>
+        <p:sp>
+          <p:nvSpPr>
+            <p:cNvPr id="82" name="tx82"/>
+            <p:cNvSpPr/>
+            <p:nvPr/>
+          </p:nvSpPr>
+          <p:spPr>
+            <a:xfrm>
+              <a:off x="762297" y="4655634"/>
+              <a:ext cx="62179" cy="80101"/>
+            </a:xfrm>
+            <a:prstGeom prst="rect">
+              <a:avLst/>
+            </a:prstGeom>
+            <a:noFill/>
+          </p:spPr>
+          <p:txBody>
+            <a:bodyPr lIns="0" rIns="0" tIns="0" bIns="0" anchorCtr="1" anchor="ctr" wrap="none"/>
+            <a:lstStyle/>
+            <a:p>
+              <a:pPr algn="l" marL="0" marR="0" indent="0">
+                <a:lnSpc>
+                  <a:spcPts val="880"/>
+                </a:lnSpc>
+                <a:spcBef>
+                  <a:spcPts val="0"/>
+                </a:spcBef>
+                <a:spcAft>
+                  <a:spcPts val="0"/>
+                </a:spcAft>
+              </a:pPr>
+              <a:r>
+                <a:rPr sz="880">
+                  <a:solidFill>
+                    <a:srgbClr val="4D4D4D">
+                      <a:alpha val="100000"/>
+                    </a:srgbClr>
+                  </a:solidFill>
+                  <a:latin typeface="Helvetica"/>
+                  <a:cs typeface="Helvetica"/>
+                </a:rPr>
+                <a:t>3</a:t>
+              </a:r>
+            </a:p>
+          </p:txBody>
+        </p:sp>
+        <p:sp>
+          <p:nvSpPr>
+            <p:cNvPr id="83" name="tx83"/>
+            <p:cNvSpPr/>
+            <p:nvPr/>
+          </p:nvSpPr>
+          <p:spPr>
+            <a:xfrm>
+              <a:off x="762297" y="4356300"/>
+              <a:ext cx="62179" cy="80101"/>
+            </a:xfrm>
+            <a:prstGeom prst="rect">
+              <a:avLst/>
+            </a:prstGeom>
+            <a:noFill/>
+          </p:spPr>
+          <p:txBody>
+            <a:bodyPr lIns="0" rIns="0" tIns="0" bIns="0" anchorCtr="1" anchor="ctr" wrap="none"/>
+            <a:lstStyle/>
+            <a:p>
+              <a:pPr algn="l" marL="0" marR="0" indent="0">
+                <a:lnSpc>
+                  <a:spcPts val="880"/>
+                </a:lnSpc>
+                <a:spcBef>
+                  <a:spcPts val="0"/>
+                </a:spcBef>
+                <a:spcAft>
+                  <a:spcPts val="0"/>
+                </a:spcAft>
+              </a:pPr>
+              <a:r>
+                <a:rPr sz="880">
+                  <a:solidFill>
+                    <a:srgbClr val="4D4D4D">
+                      <a:alpha val="100000"/>
+                    </a:srgbClr>
+                  </a:solidFill>
+                  <a:latin typeface="Helvetica"/>
+                  <a:cs typeface="Helvetica"/>
+                </a:rPr>
+                <a:t>4</a:t>
+              </a:r>
+            </a:p>
+          </p:txBody>
+        </p:sp>
+        <p:sp>
+          <p:nvSpPr>
+            <p:cNvPr id="84" name="tx84"/>
+            <p:cNvSpPr/>
+            <p:nvPr/>
+          </p:nvSpPr>
+          <p:spPr>
+            <a:xfrm>
+              <a:off x="1346003" y="5716183"/>
+              <a:ext cx="161574" cy="80101"/>
+            </a:xfrm>
+            <a:prstGeom prst="rect">
+              <a:avLst/>
+            </a:prstGeom>
+            <a:noFill/>
+          </p:spPr>
+          <p:txBody>
+            <a:bodyPr lIns="0" rIns="0" tIns="0" bIns="0" anchorCtr="1" anchor="ctr" wrap="none"/>
+            <a:lstStyle/>
+            <a:p>
+              <a:pPr algn="l" marL="0" marR="0" indent="0">
+                <a:lnSpc>
+                  <a:spcPts val="880"/>
+                </a:lnSpc>
+                <a:spcBef>
+                  <a:spcPts val="0"/>
+                </a:spcBef>
+                <a:spcAft>
+                  <a:spcPts val="0"/>
+                </a:spcAft>
+              </a:pPr>
+              <a:r>
+                <a:rPr sz="880">
+                  <a:solidFill>
+                    <a:srgbClr val="4D4D4D">
+                      <a:alpha val="100000"/>
+                    </a:srgbClr>
+                  </a:solidFill>
+                  <a:latin typeface="Helvetica"/>
+                  <a:cs typeface="Helvetica"/>
+                </a:rPr>
+                <a:t>-50</a:t>
+              </a:r>
+            </a:p>
+          </p:txBody>
+        </p:sp>
+        <p:sp>
+          <p:nvSpPr>
+            <p:cNvPr id="85" name="tx85"/>
+            <p:cNvSpPr/>
+            <p:nvPr/>
+          </p:nvSpPr>
+          <p:spPr>
+            <a:xfrm>
+              <a:off x="2196512" y="5716183"/>
+              <a:ext cx="161574" cy="80101"/>
+            </a:xfrm>
+            <a:prstGeom prst="rect">
+              <a:avLst/>
+            </a:prstGeom>
+            <a:noFill/>
+          </p:spPr>
+          <p:txBody>
+            <a:bodyPr lIns="0" rIns="0" tIns="0" bIns="0" anchorCtr="1" anchor="ctr" wrap="none"/>
+            <a:lstStyle/>
+            <a:p>
+              <a:pPr algn="l" marL="0" marR="0" indent="0">
+                <a:lnSpc>
+                  <a:spcPts val="880"/>
+                </a:lnSpc>
+                <a:spcBef>
+                  <a:spcPts val="0"/>
+                </a:spcBef>
+                <a:spcAft>
+                  <a:spcPts val="0"/>
+                </a:spcAft>
+              </a:pPr>
+              <a:r>
+                <a:rPr sz="880">
+                  <a:solidFill>
+                    <a:srgbClr val="4D4D4D">
+                      <a:alpha val="100000"/>
+                    </a:srgbClr>
+                  </a:solidFill>
+                  <a:latin typeface="Helvetica"/>
+                  <a:cs typeface="Helvetica"/>
+                </a:rPr>
+                <a:t>-40</a:t>
+              </a:r>
+            </a:p>
+          </p:txBody>
+        </p:sp>
+        <p:sp>
+          <p:nvSpPr>
+            <p:cNvPr id="86" name="tx86"/>
+            <p:cNvSpPr/>
+            <p:nvPr/>
+          </p:nvSpPr>
+          <p:spPr>
+            <a:xfrm>
+              <a:off x="3047022" y="5716183"/>
+              <a:ext cx="161574" cy="80101"/>
+            </a:xfrm>
+            <a:prstGeom prst="rect">
+              <a:avLst/>
+            </a:prstGeom>
+            <a:noFill/>
+          </p:spPr>
+          <p:txBody>
+            <a:bodyPr lIns="0" rIns="0" tIns="0" bIns="0" anchorCtr="1" anchor="ctr" wrap="none"/>
+            <a:lstStyle/>
+            <a:p>
+              <a:pPr algn="l" marL="0" marR="0" indent="0">
+                <a:lnSpc>
+                  <a:spcPts val="880"/>
+                </a:lnSpc>
+                <a:spcBef>
+                  <a:spcPts val="0"/>
+                </a:spcBef>
+                <a:spcAft>
+                  <a:spcPts val="0"/>
+                </a:spcAft>
+              </a:pPr>
+              <a:r>
+                <a:rPr sz="880">
+                  <a:solidFill>
+                    <a:srgbClr val="4D4D4D">
+                      <a:alpha val="100000"/>
+                    </a:srgbClr>
+                  </a:solidFill>
+                  <a:latin typeface="Helvetica"/>
+                  <a:cs typeface="Helvetica"/>
+                </a:rPr>
+                <a:t>-30</a:t>
+              </a:r>
+            </a:p>
+          </p:txBody>
+        </p:sp>
+        <p:sp>
+          <p:nvSpPr>
+            <p:cNvPr id="87" name="tx87"/>
+            <p:cNvSpPr/>
+            <p:nvPr/>
+          </p:nvSpPr>
+          <p:spPr>
+            <a:xfrm>
+              <a:off x="3897531" y="5716183"/>
+              <a:ext cx="161574" cy="80101"/>
+            </a:xfrm>
+            <a:prstGeom prst="rect">
+              <a:avLst/>
+            </a:prstGeom>
+            <a:noFill/>
+          </p:spPr>
+          <p:txBody>
+            <a:bodyPr lIns="0" rIns="0" tIns="0" bIns="0" anchorCtr="1" anchor="ctr" wrap="none"/>
+            <a:lstStyle/>
+            <a:p>
+              <a:pPr algn="l" marL="0" marR="0" indent="0">
+                <a:lnSpc>
+                  <a:spcPts val="880"/>
+                </a:lnSpc>
+                <a:spcBef>
+                  <a:spcPts val="0"/>
+                </a:spcBef>
+                <a:spcAft>
+                  <a:spcPts val="0"/>
+                </a:spcAft>
+              </a:pPr>
+              <a:r>
+                <a:rPr sz="880">
+                  <a:solidFill>
+                    <a:srgbClr val="4D4D4D">
+                      <a:alpha val="100000"/>
+                    </a:srgbClr>
+                  </a:solidFill>
+                  <a:latin typeface="Helvetica"/>
+                  <a:cs typeface="Helvetica"/>
+                </a:rPr>
+                <a:t>-20</a:t>
+              </a:r>
+            </a:p>
+          </p:txBody>
+        </p:sp>
+        <p:sp>
+          <p:nvSpPr>
+            <p:cNvPr id="88" name="tx88"/>
+            <p:cNvSpPr/>
+            <p:nvPr/>
+          </p:nvSpPr>
+          <p:spPr>
+            <a:xfrm>
+              <a:off x="4748041" y="5716183"/>
+              <a:ext cx="161574" cy="80101"/>
+            </a:xfrm>
+            <a:prstGeom prst="rect">
+              <a:avLst/>
+            </a:prstGeom>
+            <a:noFill/>
+          </p:spPr>
+          <p:txBody>
+            <a:bodyPr lIns="0" rIns="0" tIns="0" bIns="0" anchorCtr="1" anchor="ctr" wrap="none"/>
+            <a:lstStyle/>
+            <a:p>
+              <a:pPr algn="l" marL="0" marR="0" indent="0">
+                <a:lnSpc>
+                  <a:spcPts val="880"/>
+                </a:lnSpc>
+                <a:spcBef>
+                  <a:spcPts val="0"/>
+                </a:spcBef>
+                <a:spcAft>
+                  <a:spcPts val="0"/>
+                </a:spcAft>
+              </a:pPr>
+              <a:r>
+                <a:rPr sz="880">
+                  <a:solidFill>
+                    <a:srgbClr val="4D4D4D">
+                      <a:alpha val="100000"/>
+                    </a:srgbClr>
+                  </a:solidFill>
+                  <a:latin typeface="Helvetica"/>
+                  <a:cs typeface="Helvetica"/>
+                </a:rPr>
+                <a:t>-10</a:t>
+              </a:r>
+            </a:p>
+          </p:txBody>
+        </p:sp>
+        <p:sp>
+          <p:nvSpPr>
+            <p:cNvPr id="89" name="tx89"/>
+            <p:cNvSpPr/>
+            <p:nvPr/>
+          </p:nvSpPr>
+          <p:spPr>
+            <a:xfrm>
+              <a:off x="5648248" y="5716183"/>
+              <a:ext cx="62179" cy="80101"/>
+            </a:xfrm>
+            <a:prstGeom prst="rect">
+              <a:avLst/>
+            </a:prstGeom>
+            <a:noFill/>
+          </p:spPr>
+          <p:txBody>
+            <a:bodyPr lIns="0" rIns="0" tIns="0" bIns="0" anchorCtr="1" anchor="ctr" wrap="none"/>
+            <a:lstStyle/>
+            <a:p>
+              <a:pPr algn="l" marL="0" marR="0" indent="0">
+                <a:lnSpc>
+                  <a:spcPts val="880"/>
+                </a:lnSpc>
+                <a:spcBef>
+                  <a:spcPts val="0"/>
+                </a:spcBef>
+                <a:spcAft>
+                  <a:spcPts val="0"/>
+                </a:spcAft>
+              </a:pPr>
+              <a:r>
+                <a:rPr sz="880">
+                  <a:solidFill>
+                    <a:srgbClr val="4D4D4D">
+                      <a:alpha val="100000"/>
+                    </a:srgbClr>
+                  </a:solidFill>
+                  <a:latin typeface="Helvetica"/>
+                  <a:cs typeface="Helvetica"/>
+                </a:rPr>
+                <a:t>0</a:t>
+              </a:r>
+            </a:p>
+          </p:txBody>
+        </p:sp>
+        <p:sp>
+          <p:nvSpPr>
+            <p:cNvPr id="90" name="tx90"/>
+            <p:cNvSpPr/>
+            <p:nvPr/>
+          </p:nvSpPr>
+          <p:spPr>
+            <a:xfrm>
+              <a:off x="6467667" y="5716183"/>
+              <a:ext cx="124358" cy="80101"/>
+            </a:xfrm>
+            <a:prstGeom prst="rect">
+              <a:avLst/>
+            </a:prstGeom>
+            <a:noFill/>
+          </p:spPr>
+          <p:txBody>
+            <a:bodyPr lIns="0" rIns="0" tIns="0" bIns="0" anchorCtr="1" anchor="ctr" wrap="none"/>
+            <a:lstStyle/>
+            <a:p>
+              <a:pPr algn="l" marL="0" marR="0" indent="0">
+                <a:lnSpc>
+                  <a:spcPts val="880"/>
+                </a:lnSpc>
+                <a:spcBef>
+                  <a:spcPts val="0"/>
+                </a:spcBef>
+                <a:spcAft>
+                  <a:spcPts val="0"/>
+                </a:spcAft>
+              </a:pPr>
+              <a:r>
+                <a:rPr sz="880">
+                  <a:solidFill>
+                    <a:srgbClr val="4D4D4D">
+                      <a:alpha val="100000"/>
+                    </a:srgbClr>
+                  </a:solidFill>
+                  <a:latin typeface="Helvetica"/>
+                  <a:cs typeface="Helvetica"/>
+                </a:rPr>
+                <a:t>10</a:t>
+              </a:r>
+            </a:p>
+          </p:txBody>
+        </p:sp>
+        <p:sp>
+          <p:nvSpPr>
+            <p:cNvPr id="91" name="tx91"/>
+            <p:cNvSpPr/>
+            <p:nvPr/>
+          </p:nvSpPr>
+          <p:spPr>
+            <a:xfrm>
+              <a:off x="7318177" y="5716183"/>
+              <a:ext cx="124358" cy="80101"/>
+            </a:xfrm>
+            <a:prstGeom prst="rect">
+              <a:avLst/>
+            </a:prstGeom>
+            <a:noFill/>
+          </p:spPr>
+          <p:txBody>
+            <a:bodyPr lIns="0" rIns="0" tIns="0" bIns="0" anchorCtr="1" anchor="ctr" wrap="none"/>
+            <a:lstStyle/>
+            <a:p>
+              <a:pPr algn="l" marL="0" marR="0" indent="0">
+                <a:lnSpc>
+                  <a:spcPts val="880"/>
+                </a:lnSpc>
+                <a:spcBef>
+                  <a:spcPts val="0"/>
+                </a:spcBef>
+                <a:spcAft>
+                  <a:spcPts val="0"/>
+                </a:spcAft>
+              </a:pPr>
+              <a:r>
+                <a:rPr sz="880">
+                  <a:solidFill>
+                    <a:srgbClr val="4D4D4D">
+                      <a:alpha val="100000"/>
+                    </a:srgbClr>
+                  </a:solidFill>
+                  <a:latin typeface="Helvetica"/>
+                  <a:cs typeface="Helvetica"/>
+                </a:rPr>
+                <a:t>20</a:t>
+              </a:r>
+            </a:p>
+          </p:txBody>
+        </p:sp>
+        <p:sp>
+          <p:nvSpPr>
+            <p:cNvPr id="92" name="tx92"/>
+            <p:cNvSpPr/>
+            <p:nvPr/>
+          </p:nvSpPr>
+          <p:spPr>
+            <a:xfrm>
+              <a:off x="8168686" y="5716183"/>
+              <a:ext cx="124358" cy="80101"/>
+            </a:xfrm>
+            <a:prstGeom prst="rect">
+              <a:avLst/>
+            </a:prstGeom>
+            <a:noFill/>
+          </p:spPr>
+          <p:txBody>
+            <a:bodyPr lIns="0" rIns="0" tIns="0" bIns="0" anchorCtr="1" anchor="ctr" wrap="none"/>
+            <a:lstStyle/>
+            <a:p>
+              <a:pPr algn="l" marL="0" marR="0" indent="0">
+                <a:lnSpc>
+                  <a:spcPts val="880"/>
+                </a:lnSpc>
+                <a:spcBef>
+                  <a:spcPts val="0"/>
+                </a:spcBef>
+                <a:spcAft>
+                  <a:spcPts val="0"/>
+                </a:spcAft>
+              </a:pPr>
+              <a:r>
+                <a:rPr sz="880">
+                  <a:solidFill>
+                    <a:srgbClr val="4D4D4D">
+                      <a:alpha val="100000"/>
+                    </a:srgbClr>
+                  </a:solidFill>
+                  <a:latin typeface="Helvetica"/>
+                  <a:cs typeface="Helvetica"/>
+                </a:rPr>
+                <a:t>30</a:t>
+              </a:r>
+            </a:p>
+          </p:txBody>
+        </p:sp>
+        <p:sp>
+          <p:nvSpPr>
+            <p:cNvPr id="93" name="tx93"/>
+            <p:cNvSpPr/>
+            <p:nvPr/>
+          </p:nvSpPr>
+          <p:spPr>
+            <a:xfrm>
+              <a:off x="1561815" y="5855859"/>
+              <a:ext cx="6311097" cy="100218"/>
+            </a:xfrm>
+            <a:prstGeom prst="rect">
+              <a:avLst/>
+            </a:prstGeom>
+            <a:noFill/>
+          </p:spPr>
+          <p:txBody>
+            <a:bodyPr lIns="0" rIns="0" tIns="0" bIns="0" anchorCtr="1" anchor="ctr" wrap="none"/>
+            <a:lstStyle/>
+            <a:p>
+              <a:pPr algn="l" marL="0" marR="0" indent="0">
+                <a:lnSpc>
+                  <a:spcPts val="1100"/>
+                </a:lnSpc>
+                <a:spcBef>
+                  <a:spcPts val="0"/>
+                </a:spcBef>
+                <a:spcAft>
+                  <a:spcPts val="0"/>
+                </a:spcAft>
+              </a:pPr>
+              <a:r>
+                <a:rPr sz="1100">
+                  <a:solidFill>
+                    <a:srgbClr val="000000">
+                      <a:alpha val="100000"/>
+                    </a:srgbClr>
+                  </a:solidFill>
+                  <a:latin typeface="Helvetica"/>
+                  <a:cs typeface="Helvetica"/>
+                </a:rPr>
+                <a:t>Sensitivity eGFR Difference (%): 100 × (CKD-EPI 2012 CysC − CKD-EPI 2021 Cr) / CKD-EPI 2021 Cr</a:t>
+              </a:r>
+            </a:p>
+          </p:txBody>
+        </p:sp>
+        <p:sp>
+          <p:nvSpPr>
+            <p:cNvPr id="94" name="tx94"/>
+            <p:cNvSpPr/>
+            <p:nvPr/>
+          </p:nvSpPr>
+          <p:spPr>
+            <a:xfrm rot="-5400000">
+              <a:off x="138035" y="4944909"/>
+              <a:ext cx="1016904" cy="100218"/>
+            </a:xfrm>
+            <a:prstGeom prst="rect">
+              <a:avLst/>
+            </a:prstGeom>
+            <a:noFill/>
+          </p:spPr>
+          <p:txBody>
+            <a:bodyPr lIns="0" rIns="0" tIns="0" bIns="0" anchorCtr="1" anchor="ctr" wrap="none"/>
+            <a:lstStyle/>
+            <a:p>
+              <a:pPr algn="l" marL="0" marR="0" indent="0">
+                <a:lnSpc>
+                  <a:spcPts val="1100"/>
+                </a:lnSpc>
+                <a:spcBef>
+                  <a:spcPts val="0"/>
+                </a:spcBef>
+                <a:spcAft>
+                  <a:spcPts val="0"/>
+                </a:spcAft>
+              </a:pPr>
+              <a:r>
+                <a:rPr sz="1100">
+                  <a:solidFill>
+                    <a:srgbClr val="000000">
+                      <a:alpha val="100000"/>
+                    </a:srgbClr>
+                  </a:solidFill>
+                  <a:latin typeface="Helvetica"/>
+                  <a:cs typeface="Helvetica"/>
+                </a:rPr>
+                <a:t>subHR (95% CI)</a:t>
+              </a:r>
+            </a:p>
+          </p:txBody>
+        </p:sp>
+        <p:sp>
+          <p:nvSpPr>
+            <p:cNvPr id="95" name="tx95"/>
+            <p:cNvSpPr/>
+            <p:nvPr/>
+          </p:nvSpPr>
+          <p:spPr>
+            <a:xfrm>
+              <a:off x="887106" y="4159544"/>
+              <a:ext cx="6959864" cy="82021"/>
+            </a:xfrm>
+            <a:prstGeom prst="rect">
+              <a:avLst/>
+            </a:prstGeom>
+            <a:noFill/>
+          </p:spPr>
+          <p:txBody>
+            <a:bodyPr lIns="0" rIns="0" tIns="0" bIns="0" anchorCtr="1" anchor="ctr" wrap="none"/>
+            <a:lstStyle/>
+            <a:p>
+              <a:pPr algn="l" marL="0" marR="0" indent="0">
+                <a:lnSpc>
+                  <a:spcPts val="900"/>
+                </a:lnSpc>
+                <a:spcBef>
+                  <a:spcPts val="0"/>
+                </a:spcBef>
+                <a:spcAft>
+                  <a:spcPts val="0"/>
+                </a:spcAft>
+              </a:pPr>
+              <a:r>
+                <a:rPr sz="900">
+                  <a:solidFill>
+                    <a:srgbClr val="404040">
+                      <a:alpha val="100000"/>
+                    </a:srgbClr>
+                  </a:solidFill>
+                  <a:latin typeface="Helvetica"/>
+                  <a:cs typeface="Helvetica"/>
+                </a:rPr>
+                <a:t>subHR per 10 % decline: 1.43 (1.15-1.80), p_Bonf = 0.010 (n = 6)  |  per IQR decline (Δ = 28.0 %): 2.75 (1.46-5.17)  |  IQR: [-30.0, -2.0] %</a:t>
+              </a:r>
+            </a:p>
+          </p:txBody>
+        </p:sp>
+        <p:sp>
+          <p:nvSpPr>
+            <p:cNvPr id="96" name="tx96"/>
+            <p:cNvSpPr/>
+            <p:nvPr/>
+          </p:nvSpPr>
+          <p:spPr>
+            <a:xfrm>
+              <a:off x="887106" y="3932770"/>
               <a:ext cx="3901470" cy="120152"/>
             </a:xfrm>
             <a:prstGeom prst="rect">
